--- a/中期答辩材料/汇报PPT/中期汇报-v5.pptx
+++ b/中期答辩材料/汇报PPT/中期汇报-v5.pptx
@@ -3114,7 +3114,7 @@
         <p:spPr>
           <a:xfrm>
             <a:off x="0" y="0"/>
-            <a:ext cx="5943600" cy="6858000"/>
+            <a:ext cx="6035040" cy="6858000"/>
           </a:xfrm>
           <a:prstGeom prst="rect">
             <a:avLst/>
@@ -3158,8 +3158,8 @@
         </p:nvSpPr>
         <p:spPr>
           <a:xfrm>
-            <a:off x="6492240" y="1298448"/>
-            <a:ext cx="5010912" cy="4370832"/>
+            <a:off x="6446520" y="1234440"/>
+            <a:ext cx="5074920" cy="4526280"/>
           </a:xfrm>
           <a:prstGeom prst="roundRect">
             <a:avLst/>
@@ -3203,8 +3203,8 @@
         </p:nvSpPr>
         <p:spPr>
           <a:xfrm>
-            <a:off x="6839712" y="1755648"/>
-            <a:ext cx="1901952" cy="1024128"/>
+            <a:off x="6766560" y="1645920"/>
+            <a:ext cx="2011680" cy="1051560"/>
           </a:xfrm>
           <a:prstGeom prst="roundRect">
             <a:avLst/>
@@ -3233,7 +3233,7 @@
           </a:fontRef>
         </p:style>
         <p:txBody>
-          <a:bodyPr rtlCol="0" anchor="ctr" wrap="square" lIns="146304" rIns="146304" tIns="91440" bIns="73152"/>
+          <a:bodyPr rtlCol="0" anchor="t" wrap="square" lIns="146304" rIns="146304" tIns="91440" bIns="73152"/>
           <a:lstStyle/>
           <a:p>
             <a:pPr algn="l">
@@ -3258,7 +3258,7 @@
               </a:spcAft>
             </a:pPr>
             <a:r>
-              <a:rPr sz="1200">
+              <a:rPr sz="1300">
                 <a:solidFill>
                   <a:srgbClr val="263642"/>
                 </a:solidFill>
@@ -3277,8 +3277,8 @@
         </p:nvSpPr>
         <p:spPr>
           <a:xfrm>
-            <a:off x="9162288" y="1755648"/>
-            <a:ext cx="1901952" cy="1024128"/>
+            <a:off x="9144000" y="1645920"/>
+            <a:ext cx="2011680" cy="1051560"/>
           </a:xfrm>
           <a:prstGeom prst="roundRect">
             <a:avLst/>
@@ -3307,7 +3307,7 @@
           </a:fontRef>
         </p:style>
         <p:txBody>
-          <a:bodyPr rtlCol="0" anchor="ctr" wrap="square" lIns="146304" rIns="146304" tIns="91440" bIns="73152"/>
+          <a:bodyPr rtlCol="0" anchor="t" wrap="square" lIns="146304" rIns="146304" tIns="91440" bIns="73152"/>
           <a:lstStyle/>
           <a:p>
             <a:pPr algn="l">
@@ -3322,23 +3322,23 @@
                 </a:solidFill>
                 <a:latin typeface="Microsoft YaHei"/>
               </a:rPr>
-              <a:t>检索</a:t>
-            </a:r>
-          </a:p>
-          <a:p>
-            <a:pPr algn="l">
-              <a:spcAft>
-                <a:spcPts val="200"/>
-              </a:spcAft>
-            </a:pPr>
-            <a:r>
-              <a:rPr sz="1200">
+              <a:t>演示检索</a:t>
+            </a:r>
+          </a:p>
+          <a:p>
+            <a:pPr algn="l">
+              <a:spcAft>
+                <a:spcPts val="200"/>
+              </a:spcAft>
+            </a:pPr>
+            <a:r>
+              <a:rPr sz="1300">
                 <a:solidFill>
                   <a:srgbClr val="263642"/>
                 </a:solidFill>
                 <a:latin typeface="Microsoft YaHei"/>
               </a:rPr>
-              <a:t>Dense / BM25</a:t>
+              <a:t>默认 Dense</a:t>
             </a:r>
           </a:p>
         </p:txBody>
@@ -3351,8 +3351,8 @@
         </p:nvCxnSpPr>
         <p:spPr>
           <a:xfrm>
-            <a:off x="8741664" y="2267712"/>
-            <a:ext cx="347472" cy="0"/>
+            <a:off x="8778240" y="2176272"/>
+            <a:ext cx="320040" cy="0"/>
           </a:xfrm>
           <a:prstGeom prst="line">
             <a:avLst/>
@@ -3386,8 +3386,8 @@
         </p:nvSpPr>
         <p:spPr>
           <a:xfrm>
-            <a:off x="7973568" y="3511296"/>
-            <a:ext cx="2084831" cy="1078992"/>
+            <a:off x="6766560" y="3017520"/>
+            <a:ext cx="2011680" cy="1051560"/>
           </a:xfrm>
           <a:prstGeom prst="roundRect">
             <a:avLst/>
@@ -3416,7 +3416,7 @@
           </a:fontRef>
         </p:style>
         <p:txBody>
-          <a:bodyPr rtlCol="0" anchor="ctr" wrap="square" lIns="146304" rIns="146304" tIns="91440" bIns="73152"/>
+          <a:bodyPr rtlCol="0" anchor="t" wrap="square" lIns="146304" rIns="146304" tIns="91440" bIns="73152"/>
           <a:lstStyle/>
           <a:p>
             <a:pPr algn="l">
@@ -3425,13 +3425,13 @@
               </a:spcAft>
             </a:pPr>
             <a:r>
-              <a:rPr sz="1700" b="1">
+              <a:rPr sz="1600" b="1">
                 <a:solidFill>
                   <a:srgbClr val="D39A37"/>
                 </a:solidFill>
                 <a:latin typeface="Microsoft YaHei"/>
               </a:rPr>
-              <a:t>答案与证据</a:t>
+              <a:t>生成</a:t>
             </a:r>
           </a:p>
           <a:p>
@@ -3447,56 +3447,185 @@
                 </a:solidFill>
                 <a:latin typeface="Microsoft YaHei"/>
               </a:rPr>
-              <a:t>引用页码 · 原文核对</a:t>
-            </a:r>
-          </a:p>
-        </p:txBody>
-      </p:sp>
-      <p:cxnSp>
-        <p:nvCxnSpPr>
-          <p:cNvPr id="8" name="Connector 7"/>
-          <p:cNvCxnSpPr/>
-          <p:nvPr/>
-        </p:nvCxnSpPr>
-        <p:spPr>
-          <a:xfrm flipH="1">
-            <a:off x="9372600" y="2798064"/>
-            <a:ext cx="731520" cy="621792"/>
-          </a:xfrm>
-          <a:prstGeom prst="line">
-            <a:avLst/>
-          </a:prstGeom>
-          <a:ln w="25400">
+              <a:t>DeepSeek</a:t>
+            </a:r>
+          </a:p>
+          <a:p>
+            <a:pPr algn="l">
+              <a:spcAft>
+                <a:spcPts val="200"/>
+              </a:spcAft>
+            </a:pPr>
+            <a:r>
+              <a:rPr sz="1200">
+                <a:solidFill>
+                  <a:srgbClr val="263642"/>
+                </a:solidFill>
+                <a:latin typeface="Microsoft YaHei"/>
+              </a:rPr>
+              <a:t>deepseek-flash</a:t>
+            </a:r>
+          </a:p>
+        </p:txBody>
+      </p:sp>
+      <p:sp>
+        <p:nvSpPr>
+          <p:cNvPr id="8" name="Rounded Rectangle 7"/>
+          <p:cNvSpPr/>
+          <p:nvPr/>
+        </p:nvSpPr>
+        <p:spPr>
+          <a:xfrm>
+            <a:off x="9144000" y="3017520"/>
+            <a:ext cx="2011680" cy="1051560"/>
+          </a:xfrm>
+          <a:prstGeom prst="roundRect">
+            <a:avLst/>
+          </a:prstGeom>
+          <a:solidFill>
+            <a:srgbClr val="FFFFFF"/>
+          </a:solidFill>
+          <a:ln w="13970">
             <a:solidFill>
-              <a:srgbClr val="D39A37"/>
+              <a:srgbClr val="FFFFFF"/>
             </a:solidFill>
           </a:ln>
         </p:spPr>
         <p:style>
-          <a:lnRef idx="2">
+          <a:lnRef idx="1">
             <a:schemeClr val="accent1"/>
           </a:lnRef>
-          <a:fillRef idx="0">
+          <a:fillRef idx="3">
             <a:schemeClr val="accent1"/>
           </a:fillRef>
-          <a:effectRef idx="1">
+          <a:effectRef idx="2">
             <a:schemeClr val="accent1"/>
           </a:effectRef>
           <a:fontRef idx="minor">
-            <a:schemeClr val="tx1"/>
+            <a:schemeClr val="lt1"/>
           </a:fontRef>
         </p:style>
-      </p:cxnSp>
-      <p:sp>
-        <p:nvSpPr>
-          <p:cNvPr id="9" name="TextBox 8"/>
+        <p:txBody>
+          <a:bodyPr rtlCol="0" anchor="t" wrap="square" lIns="146304" rIns="146304" tIns="91440" bIns="73152"/>
+          <a:lstStyle/>
+          <a:p>
+            <a:pPr algn="l">
+              <a:spcAft>
+                <a:spcPts val="600"/>
+              </a:spcAft>
+            </a:pPr>
+            <a:r>
+              <a:rPr sz="1700" b="1">
+                <a:solidFill>
+                  <a:srgbClr val="163247"/>
+                </a:solidFill>
+                <a:latin typeface="Microsoft YaHei"/>
+              </a:rPr>
+              <a:t>核对</a:t>
+            </a:r>
+          </a:p>
+          <a:p>
+            <a:pPr algn="l">
+              <a:spcAft>
+                <a:spcPts val="200"/>
+              </a:spcAft>
+            </a:pPr>
+            <a:r>
+              <a:rPr sz="1300">
+                <a:solidFill>
+                  <a:srgbClr val="263642"/>
+                </a:solidFill>
+                <a:latin typeface="Microsoft YaHei"/>
+              </a:rPr>
+              <a:t>引用回原 PDF</a:t>
+            </a:r>
+          </a:p>
+        </p:txBody>
+      </p:sp>
+      <p:sp>
+        <p:nvSpPr>
+          <p:cNvPr id="9" name="Rounded Rectangle 8"/>
+          <p:cNvSpPr/>
+          <p:nvPr/>
+        </p:nvSpPr>
+        <p:spPr>
+          <a:xfrm>
+            <a:off x="7635240" y="4343400"/>
+            <a:ext cx="2697480" cy="1005840"/>
+          </a:xfrm>
+          <a:prstGeom prst="roundRect">
+            <a:avLst/>
+          </a:prstGeom>
+          <a:solidFill>
+            <a:srgbClr val="E4F1E9"/>
+          </a:solidFill>
+          <a:ln w="13970">
+            <a:solidFill>
+              <a:srgbClr val="26734E"/>
+            </a:solidFill>
+          </a:ln>
+        </p:spPr>
+        <p:style>
+          <a:lnRef idx="1">
+            <a:schemeClr val="accent1"/>
+          </a:lnRef>
+          <a:fillRef idx="3">
+            <a:schemeClr val="accent1"/>
+          </a:fillRef>
+          <a:effectRef idx="2">
+            <a:schemeClr val="accent1"/>
+          </a:effectRef>
+          <a:fontRef idx="minor">
+            <a:schemeClr val="lt1"/>
+          </a:fontRef>
+        </p:style>
+        <p:txBody>
+          <a:bodyPr rtlCol="0" anchor="t" wrap="square" lIns="146304" rIns="146304" tIns="91440" bIns="73152"/>
+          <a:lstStyle/>
+          <a:p>
+            <a:pPr algn="l">
+              <a:spcAft>
+                <a:spcPts val="600"/>
+              </a:spcAft>
+            </a:pPr>
+            <a:r>
+              <a:rPr sz="1600" b="1">
+                <a:solidFill>
+                  <a:srgbClr val="26734E"/>
+                </a:solidFill>
+                <a:latin typeface="Microsoft YaHei"/>
+              </a:rPr>
+              <a:t>教学反馈</a:t>
+            </a:r>
+          </a:p>
+          <a:p>
+            <a:pPr algn="l">
+              <a:spcAft>
+                <a:spcPts val="200"/>
+              </a:spcAft>
+            </a:pPr>
+            <a:r>
+              <a:rPr sz="1200">
+                <a:solidFill>
+                  <a:srgbClr val="263642"/>
+                </a:solidFill>
+                <a:latin typeface="Microsoft YaHei"/>
+              </a:rPr>
+              <a:t>高频问句 · 依据不足线索</a:t>
+            </a:r>
+          </a:p>
+        </p:txBody>
+      </p:sp>
+      <p:sp>
+        <p:nvSpPr>
+          <p:cNvPr id="10" name="TextBox 9"/>
           <p:cNvSpPr txBox="1"/>
           <p:nvPr/>
         </p:nvSpPr>
         <p:spPr>
           <a:xfrm>
-            <a:off x="6876288" y="4937760"/>
-            <a:ext cx="4206240" cy="310896"/>
+            <a:off x="6766560" y="5532120"/>
+            <a:ext cx="4434840" cy="292608"/>
           </a:xfrm>
           <a:prstGeom prst="rect">
             <a:avLst/>
@@ -3515,7 +3644,7 @@
               </a:spcAft>
             </a:pPr>
             <a:r>
-              <a:rPr sz="1800" b="1">
+              <a:rPr sz="1600" b="1">
                 <a:solidFill>
                   <a:srgbClr val="D8E7EE"/>
                 </a:solidFill>
@@ -3528,14 +3657,14 @@
       </p:sp>
       <p:sp>
         <p:nvSpPr>
-          <p:cNvPr id="10" name="TextBox 9"/>
+          <p:cNvPr id="11" name="TextBox 10"/>
           <p:cNvSpPr txBox="1"/>
           <p:nvPr/>
         </p:nvSpPr>
         <p:spPr>
           <a:xfrm>
-            <a:off x="713232" y="1508760"/>
-            <a:ext cx="5120640" cy="1463040"/>
+            <a:off x="713232" y="1417320"/>
+            <a:ext cx="5120640" cy="1417320"/>
           </a:xfrm>
           <a:prstGeom prst="rect">
             <a:avLst/>
@@ -3554,7 +3683,7 @@
               </a:spcAft>
             </a:pPr>
             <a:r>
-              <a:rPr sz="3700" b="1">
+              <a:rPr sz="3600" b="1">
                 <a:solidFill>
                   <a:srgbClr val="FFFFFF"/>
                 </a:solidFill>
@@ -3570,7 +3699,7 @@
               </a:spcAft>
             </a:pPr>
             <a:r>
-              <a:rPr sz="3700" b="1">
+              <a:rPr sz="3600" b="1">
                 <a:solidFill>
                   <a:srgbClr val="FFFFFF"/>
                 </a:solidFill>
@@ -3583,13 +3712,13 @@
       </p:sp>
       <p:sp>
         <p:nvSpPr>
-          <p:cNvPr id="11" name="Rectangle 10"/>
+          <p:cNvPr id="12" name="Rectangle 11"/>
           <p:cNvSpPr/>
           <p:nvPr/>
         </p:nvSpPr>
         <p:spPr>
           <a:xfrm>
-            <a:off x="749808" y="3246120"/>
+            <a:off x="749808" y="3108960"/>
             <a:ext cx="822960" cy="54864"/>
           </a:xfrm>
           <a:prstGeom prst="rect">
@@ -3628,14 +3757,14 @@
       </p:sp>
       <p:sp>
         <p:nvSpPr>
-          <p:cNvPr id="12" name="TextBox 11"/>
+          <p:cNvPr id="13" name="TextBox 12"/>
           <p:cNvSpPr txBox="1"/>
           <p:nvPr/>
         </p:nvSpPr>
         <p:spPr>
           <a:xfrm>
-            <a:off x="749808" y="3529584"/>
-            <a:ext cx="4754880" cy="530352"/>
+            <a:off x="749808" y="3383280"/>
+            <a:ext cx="4754880" cy="457200"/>
           </a:xfrm>
           <a:prstGeom prst="rect">
             <a:avLst/>
@@ -3660,21 +3789,21 @@
                 </a:solidFill>
                 <a:latin typeface="Microsoft YaHei"/>
               </a:rPr>
-              <a:t>中期进展与验证结果</a:t>
-            </a:r>
-          </a:p>
-        </p:txBody>
-      </p:sp>
-      <p:sp>
-        <p:nvSpPr>
-          <p:cNvPr id="13" name="TextBox 12"/>
+              <a:t>中期进展汇报</a:t>
+            </a:r>
+          </a:p>
+        </p:txBody>
+      </p:sp>
+      <p:sp>
+        <p:nvSpPr>
+          <p:cNvPr id="14" name="TextBox 13"/>
           <p:cNvSpPr txBox="1"/>
           <p:nvPr/>
         </p:nvSpPr>
         <p:spPr>
           <a:xfrm>
-            <a:off x="768096" y="5989320"/>
-            <a:ext cx="5029200" cy="310896"/>
+            <a:off x="768096" y="3977639"/>
+            <a:ext cx="4846320" cy="329184"/>
           </a:xfrm>
           <a:prstGeom prst="rect">
             <a:avLst/>
@@ -3693,13 +3822,91 @@
               </a:spcAft>
             </a:pPr>
             <a:r>
+              <a:rPr sz="1600" b="0">
+                <a:solidFill>
+                  <a:srgbClr val="D3E1E8"/>
+                </a:solidFill>
+                <a:latin typeface="Microsoft YaHei"/>
+              </a:rPr>
+              <a:t>有依据、可核对的课程问答原型</a:t>
+            </a:r>
+          </a:p>
+        </p:txBody>
+      </p:sp>
+      <p:sp>
+        <p:nvSpPr>
+          <p:cNvPr id="15" name="TextBox 14"/>
+          <p:cNvSpPr txBox="1"/>
+          <p:nvPr/>
+        </p:nvSpPr>
+        <p:spPr>
+          <a:xfrm>
+            <a:off x="768096" y="5349240"/>
+            <a:ext cx="4937760" cy="329184"/>
+          </a:xfrm>
+          <a:prstGeom prst="rect">
+            <a:avLst/>
+          </a:prstGeom>
+          <a:noFill/>
+        </p:spPr>
+        <p:txBody>
+          <a:bodyPr wrap="square" lIns="36576" rIns="36576" tIns="18288" bIns="18288" anchor="ctr">
+            <a:spAutoFit/>
+          </a:bodyPr>
+          <a:lstStyle/>
+          <a:p>
+            <a:pPr algn="l">
+              <a:spcAft>
+                <a:spcPts val="200"/>
+              </a:spcAft>
+            </a:pPr>
+            <a:r>
+              <a:rPr sz="1400" b="1">
+                <a:solidFill>
+                  <a:srgbClr val="D39A37"/>
+                </a:solidFill>
+                <a:latin typeface="Microsoft YaHei"/>
+              </a:rPr>
+              <a:t>参考稿，队友可改；终稿可由答辩同学重做</a:t>
+            </a:r>
+          </a:p>
+        </p:txBody>
+      </p:sp>
+      <p:sp>
+        <p:nvSpPr>
+          <p:cNvPr id="16" name="TextBox 15"/>
+          <p:cNvSpPr txBox="1"/>
+          <p:nvPr/>
+        </p:nvSpPr>
+        <p:spPr>
+          <a:xfrm>
+            <a:off x="768096" y="5989320"/>
+            <a:ext cx="5029200" cy="310896"/>
+          </a:xfrm>
+          <a:prstGeom prst="rect">
+            <a:avLst/>
+          </a:prstGeom>
+          <a:noFill/>
+        </p:spPr>
+        <p:txBody>
+          <a:bodyPr wrap="square" lIns="36576" rIns="36576" tIns="18288" bIns="18288" anchor="ctr">
+            <a:spAutoFit/>
+          </a:bodyPr>
+          <a:lstStyle/>
+          <a:p>
+            <a:pPr algn="l">
+              <a:spcAft>
+                <a:spcPts val="200"/>
+              </a:spcAft>
+            </a:pPr>
+            <a:r>
               <a:rPr sz="1400" b="0">
                 <a:solidFill>
                   <a:srgbClr val="D3E1E8"/>
                 </a:solidFill>
                 <a:latin typeface="Microsoft YaHei"/>
               </a:rPr>
-              <a:t>中文四课文本型 RAG 原型 · 2026.10</a:t>
+              <a:t>中文四课文本型 RAG · 2026.10</a:t>
             </a:r>
           </a:p>
         </p:txBody>
@@ -3803,7 +4010,7 @@
                 </a:solidFill>
                 <a:latin typeface="Microsoft YaHei"/>
               </a:rPr>
-              <a:t>已完成四课文本型问答原型、内部验收与恢复验证，下一阶段围绕可验证性收口</a:t>
+              <a:t>可演示、可追溯、可核对；不宣称通用多模态或人工事实准确率</a:t>
             </a:r>
           </a:p>
         </p:txBody>
@@ -3862,7 +4069,7 @@
         <p:spPr>
           <a:xfrm>
             <a:off x="566928" y="6510528"/>
-            <a:ext cx="7315200" cy="182880"/>
+            <a:ext cx="8686800" cy="182880"/>
           </a:xfrm>
           <a:prstGeom prst="rect">
             <a:avLst/>
@@ -3887,7 +4094,7 @@
                 </a:solidFill>
                 <a:latin typeface="Microsoft YaHei"/>
               </a:rPr>
-              <a:t>高校课程知识库智能问答 · 中期进展</a:t>
+              <a:t>高校课程知识库智能问答 · 中期进展（参考稿）</a:t>
             </a:r>
           </a:p>
         </p:txBody>
@@ -3939,8 +4146,8 @@
         </p:nvSpPr>
         <p:spPr>
           <a:xfrm>
-            <a:off x="749808" y="1664208"/>
-            <a:ext cx="1828800" cy="384048"/>
+            <a:off x="749808" y="1600200"/>
+            <a:ext cx="1828800" cy="365760"/>
           </a:xfrm>
           <a:prstGeom prst="rect">
             <a:avLst/>
@@ -3959,7 +4166,7 @@
               </a:spcAft>
             </a:pPr>
             <a:r>
-              <a:rPr sz="2200" b="1">
+              <a:rPr sz="2100" b="1">
                 <a:solidFill>
                   <a:srgbClr val="26734E"/>
                 </a:solidFill>
@@ -3978,8 +4185,8 @@
         </p:nvSpPr>
         <p:spPr>
           <a:xfrm>
-            <a:off x="749808" y="2148840"/>
-            <a:ext cx="5074920" cy="548640"/>
+            <a:off x="749808" y="2057400"/>
+            <a:ext cx="5074920" cy="530352"/>
           </a:xfrm>
           <a:prstGeom prst="roundRect">
             <a:avLst/>
@@ -4023,7 +4230,7 @@
         </p:nvSpPr>
         <p:spPr>
           <a:xfrm>
-            <a:off x="859536" y="2221992"/>
+            <a:off x="859536" y="2130552"/>
             <a:ext cx="411480" cy="365760"/>
           </a:xfrm>
           <a:prstGeom prst="rect">
@@ -4062,7 +4269,7 @@
         </p:nvSpPr>
         <p:spPr>
           <a:xfrm>
-            <a:off x="1353312" y="2212848"/>
+            <a:off x="1353312" y="2130552"/>
             <a:ext cx="4315968" cy="384048"/>
           </a:xfrm>
           <a:prstGeom prst="rect">
@@ -4082,13 +4289,13 @@
               </a:spcAft>
             </a:pPr>
             <a:r>
-              <a:rPr sz="1300" b="1">
+              <a:rPr sz="1400" b="1">
                 <a:solidFill>
                   <a:srgbClr val="263642"/>
                 </a:solidFill>
                 <a:latin typeface="Microsoft YaHei"/>
               </a:rPr>
-              <a:t>中文四课演示库：4 门课 / 27 份 PDF / 2,501 chunks（cn_v2）</a:t>
+              <a:t>中文四课演示库 4 / 27 / 2,501（cn_v2）</a:t>
             </a:r>
           </a:p>
         </p:txBody>
@@ -4101,8 +4308,8 @@
         </p:nvSpPr>
         <p:spPr>
           <a:xfrm>
-            <a:off x="749808" y="2834640"/>
-            <a:ext cx="5074920" cy="548640"/>
+            <a:off x="749808" y="2715768"/>
+            <a:ext cx="5074920" cy="530352"/>
           </a:xfrm>
           <a:prstGeom prst="roundRect">
             <a:avLst/>
@@ -4146,7 +4353,7 @@
         </p:nvSpPr>
         <p:spPr>
           <a:xfrm>
-            <a:off x="859536" y="2907792"/>
+            <a:off x="859536" y="2788920"/>
             <a:ext cx="411480" cy="365760"/>
           </a:xfrm>
           <a:prstGeom prst="rect">
@@ -4185,7 +4392,7 @@
         </p:nvSpPr>
         <p:spPr>
           <a:xfrm>
-            <a:off x="1353312" y="2898648"/>
+            <a:off x="1353312" y="2788920"/>
             <a:ext cx="4315968" cy="384048"/>
           </a:xfrm>
           <a:prstGeom prst="rect">
@@ -4205,13 +4412,13 @@
               </a:spcAft>
             </a:pPr>
             <a:r>
-              <a:rPr sz="1300" b="1">
+              <a:rPr sz="1400" b="1">
                 <a:solidFill>
                   <a:srgbClr val="263642"/>
                 </a:solidFill>
                 <a:latin typeface="Microsoft YaHei"/>
               </a:rPr>
-              <a:t>中期彩排：学生引用闭环 + 拒答 + 教师/Admin 一眼</a:t>
+              <a:t>业务闭环可走：提问 → 引用 → 回原页</a:t>
             </a:r>
           </a:p>
         </p:txBody>
@@ -4224,8 +4431,8 @@
         </p:nvSpPr>
         <p:spPr>
           <a:xfrm>
-            <a:off x="749808" y="3520440"/>
-            <a:ext cx="5074920" cy="548640"/>
+            <a:off x="749808" y="3374136"/>
+            <a:ext cx="5074920" cy="530352"/>
           </a:xfrm>
           <a:prstGeom prst="roundRect">
             <a:avLst/>
@@ -4269,7 +4476,7 @@
         </p:nvSpPr>
         <p:spPr>
           <a:xfrm>
-            <a:off x="859536" y="3593592"/>
+            <a:off x="859536" y="3447288"/>
             <a:ext cx="411480" cy="365760"/>
           </a:xfrm>
           <a:prstGeom prst="rect">
@@ -4308,7 +4515,7 @@
         </p:nvSpPr>
         <p:spPr>
           <a:xfrm>
-            <a:off x="1353312" y="3584448"/>
+            <a:off x="1353312" y="3447288"/>
             <a:ext cx="4315968" cy="384048"/>
           </a:xfrm>
           <a:prstGeom prst="rect">
@@ -4328,13 +4535,13 @@
               </a:spcAft>
             </a:pPr>
             <a:r>
-              <a:rPr sz="1300" b="1">
+              <a:rPr sz="1400" b="1">
                 <a:solidFill>
                   <a:srgbClr val="263642"/>
                 </a:solidFill>
                 <a:latin typeface="Microsoft YaHei"/>
               </a:rPr>
-              <a:t>P7-3：数据库与文件隔离恢复通过</a:t>
+              <a:t>拒答与有据回答可区分演示</a:t>
             </a:r>
           </a:p>
         </p:txBody>
@@ -4347,8 +4554,8 @@
         </p:nvSpPr>
         <p:spPr>
           <a:xfrm>
-            <a:off x="749808" y="4206240"/>
-            <a:ext cx="5074920" cy="548640"/>
+            <a:off x="749808" y="4032504"/>
+            <a:ext cx="5074920" cy="530352"/>
           </a:xfrm>
           <a:prstGeom prst="roundRect">
             <a:avLst/>
@@ -4392,7 +4599,7 @@
         </p:nvSpPr>
         <p:spPr>
           <a:xfrm>
-            <a:off x="859536" y="4279392"/>
+            <a:off x="859536" y="4105656"/>
             <a:ext cx="411480" cy="365760"/>
           </a:xfrm>
           <a:prstGeom prst="rect">
@@ -4431,7 +4638,7 @@
         </p:nvSpPr>
         <p:spPr>
           <a:xfrm>
-            <a:off x="1353312" y="4270248"/>
+            <a:off x="1353312" y="4105656"/>
             <a:ext cx="4315968" cy="384048"/>
           </a:xfrm>
           <a:prstGeom prst="rect">
@@ -4451,13 +4658,13 @@
               </a:spcAft>
             </a:pPr>
             <a:r>
-              <a:rPr sz="1300" b="1">
+              <a:rPr sz="1400" b="1">
                 <a:solidFill>
                   <a:srgbClr val="263642"/>
                 </a:solidFill>
                 <a:latin typeface="Microsoft YaHei"/>
               </a:rPr>
-              <a:t>R9 刷新：当前 HEAD + cn_v2 身份清单已登记</a:t>
+              <a:t>教师基础反馈与三角色入口可用</a:t>
             </a:r>
           </a:p>
         </p:txBody>
@@ -4470,8 +4677,8 @@
         </p:nvSpPr>
         <p:spPr>
           <a:xfrm>
-            <a:off x="6236208" y="1664208"/>
-            <a:ext cx="1828800" cy="384048"/>
+            <a:off x="6236208" y="1600200"/>
+            <a:ext cx="1828800" cy="365760"/>
           </a:xfrm>
           <a:prstGeom prst="rect">
             <a:avLst/>
@@ -4490,7 +4697,7 @@
               </a:spcAft>
             </a:pPr>
             <a:r>
-              <a:rPr sz="2200" b="1">
+              <a:rPr sz="2100" b="1">
                 <a:solidFill>
                   <a:srgbClr val="D39A37"/>
                 </a:solidFill>
@@ -4509,8 +4716,8 @@
         </p:nvSpPr>
         <p:spPr>
           <a:xfrm>
-            <a:off x="6236208" y="2148840"/>
-            <a:ext cx="5074920" cy="548640"/>
+            <a:off x="6236208" y="2057400"/>
+            <a:ext cx="5074920" cy="530352"/>
           </a:xfrm>
           <a:prstGeom prst="roundRect">
             <a:avLst/>
@@ -4554,7 +4761,7 @@
         </p:nvSpPr>
         <p:spPr>
           <a:xfrm>
-            <a:off x="6345936" y="2221992"/>
+            <a:off x="6345936" y="2130552"/>
             <a:ext cx="411480" cy="365760"/>
           </a:xfrm>
           <a:prstGeom prst="rect">
@@ -4593,7 +4800,7 @@
         </p:nvSpPr>
         <p:spPr>
           <a:xfrm>
-            <a:off x="6839712" y="2212848"/>
+            <a:off x="6839712" y="2130552"/>
             <a:ext cx="4315968" cy="384048"/>
           </a:xfrm>
           <a:prstGeom prst="rect">
@@ -4613,13 +4820,13 @@
               </a:spcAft>
             </a:pPr>
             <a:r>
-              <a:rPr sz="1300" b="1">
+              <a:rPr sz="1400" b="1">
                 <a:solidFill>
                   <a:srgbClr val="263642"/>
                 </a:solidFill>
                 <a:latin typeface="Microsoft YaHei"/>
               </a:rPr>
-              <a:t>完成 Office 视觉复核与固定 Demo 彩排</a:t>
+              <a:t>答辩同学可按提纲重做 PPT 终稿</a:t>
             </a:r>
           </a:p>
         </p:txBody>
@@ -4632,8 +4839,8 @@
         </p:nvSpPr>
         <p:spPr>
           <a:xfrm>
-            <a:off x="6236208" y="2834640"/>
-            <a:ext cx="5074920" cy="548640"/>
+            <a:off x="6236208" y="2715768"/>
+            <a:ext cx="5074920" cy="530352"/>
           </a:xfrm>
           <a:prstGeom prst="roundRect">
             <a:avLst/>
@@ -4677,7 +4884,7 @@
         </p:nvSpPr>
         <p:spPr>
           <a:xfrm>
-            <a:off x="6345936" y="2907792"/>
+            <a:off x="6345936" y="2788920"/>
             <a:ext cx="411480" cy="365760"/>
           </a:xfrm>
           <a:prstGeom prst="rect">
@@ -4716,7 +4923,7 @@
         </p:nvSpPr>
         <p:spPr>
           <a:xfrm>
-            <a:off x="6839712" y="2898648"/>
+            <a:off x="6839712" y="2788920"/>
             <a:ext cx="4315968" cy="384048"/>
           </a:xfrm>
           <a:prstGeom prst="rect">
@@ -4736,13 +4943,13 @@
               </a:spcAft>
             </a:pPr>
             <a:r>
-              <a:rPr sz="1300" b="1">
+              <a:rPr sz="1400" b="1">
                 <a:solidFill>
                   <a:srgbClr val="263642"/>
                 </a:solidFill>
                 <a:latin typeface="Microsoft YaHei"/>
               </a:rPr>
-              <a:t>选定题集做小规模人工事实复核</a:t>
+              <a:t>固定问句再彩排（模型已对齐 flash）</a:t>
             </a:r>
           </a:p>
         </p:txBody>
@@ -4755,8 +4962,8 @@
         </p:nvSpPr>
         <p:spPr>
           <a:xfrm>
-            <a:off x="6236208" y="3520440"/>
-            <a:ext cx="5074920" cy="548640"/>
+            <a:off x="6236208" y="3374136"/>
+            <a:ext cx="5074920" cy="530352"/>
           </a:xfrm>
           <a:prstGeom prst="roundRect">
             <a:avLst/>
@@ -4800,7 +5007,7 @@
         </p:nvSpPr>
         <p:spPr>
           <a:xfrm>
-            <a:off x="6345936" y="3593592"/>
+            <a:off x="6345936" y="3447288"/>
             <a:ext cx="411480" cy="365760"/>
           </a:xfrm>
           <a:prstGeom prst="rect">
@@ -4839,7 +5046,7 @@
         </p:nvSpPr>
         <p:spPr>
           <a:xfrm>
-            <a:off x="6839712" y="3584448"/>
+            <a:off x="6839712" y="3447288"/>
             <a:ext cx="4315968" cy="384048"/>
           </a:xfrm>
           <a:prstGeom prst="rect">
@@ -4859,13 +5066,13 @@
               </a:spcAft>
             </a:pPr>
             <a:r>
-              <a:rPr sz="1300" b="1">
+              <a:rPr sz="1400" b="1">
                 <a:solidFill>
                   <a:srgbClr val="263642"/>
                 </a:solidFill>
                 <a:latin typeface="Microsoft YaHei"/>
               </a:rPr>
-              <a:t>补成本/资源限制专项核验</a:t>
+              <a:t>小规模人工事实与引用复核</a:t>
             </a:r>
           </a:p>
         </p:txBody>
@@ -4878,8 +5085,8 @@
         </p:nvSpPr>
         <p:spPr>
           <a:xfrm>
-            <a:off x="6236208" y="4206240"/>
-            <a:ext cx="5074920" cy="548640"/>
+            <a:off x="6236208" y="4032504"/>
+            <a:ext cx="5074920" cy="530352"/>
           </a:xfrm>
           <a:prstGeom prst="roundRect">
             <a:avLst/>
@@ -4923,7 +5130,7 @@
         </p:nvSpPr>
         <p:spPr>
           <a:xfrm>
-            <a:off x="6345936" y="4279392"/>
+            <a:off x="6345936" y="4105656"/>
             <a:ext cx="411480" cy="365760"/>
           </a:xfrm>
           <a:prstGeom prst="rect">
@@ -4962,7 +5169,7 @@
         </p:nvSpPr>
         <p:spPr>
           <a:xfrm>
-            <a:off x="6839712" y="4270248"/>
+            <a:off x="6839712" y="4105656"/>
             <a:ext cx="4315968" cy="384048"/>
           </a:xfrm>
           <a:prstGeom prst="rect">
@@ -4982,13 +5189,13 @@
               </a:spcAft>
             </a:pPr>
             <a:r>
-              <a:rPr sz="1300" b="1">
+              <a:rPr sz="1400" b="1">
                 <a:solidFill>
                   <a:srgbClr val="263642"/>
                 </a:solidFill>
                 <a:latin typeface="Microsoft YaHei"/>
               </a:rPr>
-              <a:t>后续再争取非开发者独立试用</a:t>
+              <a:t>成本/资源专项与结题试用</a:t>
             </a:r>
           </a:p>
         </p:txBody>
@@ -5001,8 +5208,8 @@
         </p:nvSpPr>
         <p:spPr>
           <a:xfrm>
-            <a:off x="749808" y="5257800"/>
-            <a:ext cx="10561320" cy="658368"/>
+            <a:off x="749808" y="5074920"/>
+            <a:ext cx="10561320" cy="777240"/>
           </a:xfrm>
           <a:prstGeom prst="roundRect">
             <a:avLst/>
@@ -5046,8 +5253,8 @@
         </p:nvSpPr>
         <p:spPr>
           <a:xfrm>
-            <a:off x="960120" y="5404104"/>
-            <a:ext cx="10149840" cy="365760"/>
+            <a:off x="960120" y="5257800"/>
+            <a:ext cx="10149840" cy="411480"/>
           </a:xfrm>
           <a:prstGeom prst="rect">
             <a:avLst/>
@@ -5066,13 +5273,13 @@
               </a:spcAft>
             </a:pPr>
             <a:r>
-              <a:rPr sz="2000" b="1">
+              <a:rPr sz="1700" b="1">
                 <a:solidFill>
                   <a:srgbClr val="FFFFFF"/>
                 </a:solidFill>
                 <a:latin typeface="Microsoft YaHei"/>
               </a:rPr>
-              <a:t>结论：可演示、可追溯、可恢复；不宣称通用多模态能力或人工事实准确率。</a:t>
+              <a:t>结论：本机可演示的有依据课程问答原型；参考稿供队友改写，终稿可由答辩同学重做。</a:t>
             </a:r>
           </a:p>
         </p:txBody>
@@ -5137,7 +5344,7 @@
                 </a:solidFill>
                 <a:latin typeface="Microsoft YaHei"/>
               </a:rPr>
-              <a:t>项目问题与边界</a:t>
+              <a:t>问题背景与中期目标</a:t>
             </a:r>
           </a:p>
         </p:txBody>
@@ -5176,7 +5383,7 @@
                 </a:solidFill>
                 <a:latin typeface="Microsoft YaHei"/>
               </a:rPr>
-              <a:t>目标是让学生能回到课程原文核对依据，而不是把模型回答当权威答案</a:t>
+              <a:t>课件分散难定位；通用模型流畅≠课程依据；需要可核对的问答闭环</a:t>
             </a:r>
           </a:p>
         </p:txBody>
@@ -5235,7 +5442,7 @@
         <p:spPr>
           <a:xfrm>
             <a:off x="566928" y="6510528"/>
-            <a:ext cx="7315200" cy="182880"/>
+            <a:ext cx="8686800" cy="182880"/>
           </a:xfrm>
           <a:prstGeom prst="rect">
             <a:avLst/>
@@ -5260,7 +5467,7 @@
                 </a:solidFill>
                 <a:latin typeface="Microsoft YaHei"/>
               </a:rPr>
-              <a:t>高校课程知识库智能问答 · 中期进展</a:t>
+              <a:t>高校课程知识库智能问答 · 中期进展（参考稿）</a:t>
             </a:r>
           </a:p>
         </p:txBody>
@@ -5312,8 +5519,8 @@
         </p:nvSpPr>
         <p:spPr>
           <a:xfrm>
-            <a:off x="713232" y="1627632"/>
-            <a:ext cx="1828800" cy="347472"/>
+            <a:off x="713232" y="1554480"/>
+            <a:ext cx="1828800" cy="329184"/>
           </a:xfrm>
           <a:prstGeom prst="rect">
             <a:avLst/>
@@ -5332,144 +5539,27 @@
               </a:spcAft>
             </a:pPr>
             <a:r>
-              <a:rPr sz="2000" b="1">
+              <a:rPr sz="1800" b="1">
                 <a:solidFill>
                   <a:srgbClr val="247D78"/>
                 </a:solidFill>
                 <a:latin typeface="Microsoft YaHei"/>
               </a:rPr>
-              <a:t>核心问题</a:t>
-            </a:r>
-          </a:p>
-        </p:txBody>
-      </p:sp>
-      <p:sp>
-        <p:nvSpPr>
-          <p:cNvPr id="8" name="TextBox 7"/>
-          <p:cNvSpPr txBox="1"/>
-          <p:nvPr/>
-        </p:nvSpPr>
-        <p:spPr>
-          <a:xfrm>
-            <a:off x="713232" y="2029968"/>
-            <a:ext cx="4800600" cy="1024128"/>
-          </a:xfrm>
-          <a:prstGeom prst="rect">
-            <a:avLst/>
-          </a:prstGeom>
-          <a:noFill/>
-        </p:spPr>
-        <p:txBody>
-          <a:bodyPr wrap="square" lIns="36576" rIns="36576" tIns="18288" bIns="18288" anchor="ctr">
-            <a:spAutoFit/>
-          </a:bodyPr>
-          <a:lstStyle/>
-          <a:p>
-            <a:pPr algn="l">
-              <a:spcAft>
-                <a:spcPts val="200"/>
-              </a:spcAft>
-            </a:pPr>
-            <a:r>
-              <a:rPr sz="2400" b="1">
-                <a:solidFill>
-                  <a:srgbClr val="163247"/>
-                </a:solidFill>
-                <a:latin typeface="Microsoft YaHei"/>
-              </a:rPr>
-              <a:t>课件分散、资料内容难以定位；学生提出问题后，往往仍要手动翻找讲义。</a:t>
-            </a:r>
-          </a:p>
-        </p:txBody>
-      </p:sp>
-      <p:sp>
-        <p:nvSpPr>
-          <p:cNvPr id="9" name="TextBox 8"/>
-          <p:cNvSpPr txBox="1"/>
-          <p:nvPr/>
-        </p:nvSpPr>
-        <p:spPr>
-          <a:xfrm>
-            <a:off x="713232" y="3246120"/>
-            <a:ext cx="1737360" cy="329184"/>
-          </a:xfrm>
-          <a:prstGeom prst="rect">
-            <a:avLst/>
-          </a:prstGeom>
-          <a:noFill/>
-        </p:spPr>
-        <p:txBody>
-          <a:bodyPr wrap="square" lIns="36576" rIns="36576" tIns="18288" bIns="18288" anchor="ctr">
-            <a:spAutoFit/>
-          </a:bodyPr>
-          <a:lstStyle/>
-          <a:p>
-            <a:pPr algn="l">
-              <a:spcAft>
-                <a:spcPts val="200"/>
-              </a:spcAft>
-            </a:pPr>
-            <a:r>
-              <a:rPr sz="1900" b="1">
-                <a:solidFill>
-                  <a:srgbClr val="D39A37"/>
-                </a:solidFill>
-                <a:latin typeface="Microsoft YaHei"/>
-              </a:rPr>
-              <a:t>项目目标</a:t>
-            </a:r>
-          </a:p>
-        </p:txBody>
-      </p:sp>
-      <p:sp>
-        <p:nvSpPr>
-          <p:cNvPr id="10" name="TextBox 9"/>
-          <p:cNvSpPr txBox="1"/>
-          <p:nvPr/>
-        </p:nvSpPr>
-        <p:spPr>
-          <a:xfrm>
-            <a:off x="713232" y="3639312"/>
-            <a:ext cx="4800600" cy="987552"/>
-          </a:xfrm>
-          <a:prstGeom prst="rect">
-            <a:avLst/>
-          </a:prstGeom>
-          <a:noFill/>
-        </p:spPr>
-        <p:txBody>
-          <a:bodyPr wrap="square" lIns="36576" rIns="36576" tIns="18288" bIns="18288" anchor="ctr">
-            <a:spAutoFit/>
-          </a:bodyPr>
-          <a:lstStyle/>
-          <a:p>
-            <a:pPr algn="l">
-              <a:spcAft>
-                <a:spcPts val="200"/>
-              </a:spcAft>
-            </a:pPr>
-            <a:r>
-              <a:rPr sz="1900" b="0">
-                <a:solidFill>
-                  <a:srgbClr val="263642"/>
-                </a:solidFill>
-                <a:latin typeface="Microsoft YaHei"/>
-              </a:rPr>
-              <a:t>按课程隔离资料与检索范围，让回答带有可打开的原文引用；依据不足时明确拒答。</a:t>
-            </a:r>
-          </a:p>
-        </p:txBody>
-      </p:sp>
-      <p:sp>
-        <p:nvSpPr>
-          <p:cNvPr id="11" name="Rounded Rectangle 10"/>
+              <a:t>实际问题</a:t>
+            </a:r>
+          </a:p>
+        </p:txBody>
+      </p:sp>
+      <p:sp>
+        <p:nvSpPr>
+          <p:cNvPr id="8" name="Rounded Rectangle 7"/>
           <p:cNvSpPr/>
           <p:nvPr/>
         </p:nvSpPr>
         <p:spPr>
           <a:xfrm>
-            <a:off x="5989320" y="1645920"/>
-            <a:ext cx="5440680" cy="3639312"/>
+            <a:off x="685800" y="1938528"/>
+            <a:ext cx="5349240" cy="3246120"/>
           </a:xfrm>
           <a:prstGeom prst="roundRect">
             <a:avLst/>
@@ -5498,23 +5588,116 @@
           </a:fontRef>
         </p:style>
         <p:txBody>
-          <a:bodyPr rtlCol="0" anchor="ctr"/>
-          <a:lstStyle/>
-          <a:p>
-            <a:pPr algn="ctr"/>
-          </a:p>
-        </p:txBody>
-      </p:sp>
-      <p:sp>
-        <p:nvSpPr>
-          <p:cNvPr id="12" name="TextBox 11"/>
+          <a:bodyPr rtlCol="0" anchor="t" wrap="square" lIns="146304" rIns="146304" tIns="91440" bIns="73152"/>
+          <a:lstStyle/>
+          <a:p>
+            <a:pPr algn="l">
+              <a:spcAft>
+                <a:spcPts val="600"/>
+              </a:spcAft>
+            </a:pPr>
+            <a:r>
+              <a:rPr sz="1800" b="1">
+                <a:solidFill>
+                  <a:srgbClr val="163247"/>
+                </a:solidFill>
+                <a:latin typeface="Microsoft YaHei"/>
+              </a:rPr>
+              <a:t>为什么要做</a:t>
+            </a:r>
+          </a:p>
+          <a:p>
+            <a:pPr algn="l">
+              <a:spcAft>
+                <a:spcPts val="200"/>
+              </a:spcAft>
+            </a:pPr>
+            <a:r>
+              <a:rPr sz="1500">
+                <a:solidFill>
+                  <a:srgbClr val="263642"/>
+                </a:solidFill>
+                <a:latin typeface="Microsoft YaHei"/>
+              </a:rPr>
+              <a:t>• 课程知识分散在多份讲义/课件中</a:t>
+            </a:r>
+          </a:p>
+          <a:p>
+            <a:pPr algn="l">
+              <a:spcAft>
+                <a:spcPts val="200"/>
+              </a:spcAft>
+            </a:pPr>
+            <a:r>
+              <a:rPr sz="1500">
+                <a:solidFill>
+                  <a:srgbClr val="263642"/>
+                </a:solidFill>
+                <a:latin typeface="Microsoft YaHei"/>
+              </a:rPr>
+              <a:t>• 自然语言问题难以靠文件名检索定位</a:t>
+            </a:r>
+          </a:p>
+          <a:p>
+            <a:pPr algn="l">
+              <a:spcAft>
+                <a:spcPts val="200"/>
+              </a:spcAft>
+            </a:pPr>
+            <a:r>
+              <a:rPr sz="1500">
+                <a:solidFill>
+                  <a:srgbClr val="263642"/>
+                </a:solidFill>
+                <a:latin typeface="Microsoft YaHei"/>
+              </a:rPr>
+              <a:t>• 通用大模型回答流畅，但未必对应当前课程口径</a:t>
+            </a:r>
+          </a:p>
+          <a:p>
+            <a:pPr algn="l">
+              <a:spcAft>
+                <a:spcPts val="200"/>
+              </a:spcAft>
+            </a:pPr>
+            <a:r>
+              <a:rPr sz="1500">
+                <a:solidFill>
+                  <a:srgbClr val="263642"/>
+                </a:solidFill>
+                <a:latin typeface="Microsoft YaHei"/>
+              </a:rPr>
+              <a:t>• 学生需要原文核对入口；教师需要问题分布线索</a:t>
+            </a:r>
+          </a:p>
+          <a:p>
+            <a:pPr algn="l">
+              <a:spcAft>
+                <a:spcPts val="200"/>
+              </a:spcAft>
+            </a:pPr>
+            <a:r>
+              <a:rPr sz="1500">
+                <a:solidFill>
+                  <a:srgbClr val="263642"/>
+                </a:solidFill>
+                <a:latin typeface="Microsoft YaHei"/>
+              </a:rPr>
+              <a:t>• 多课程场景必须守住访问边界</a:t>
+            </a:r>
+          </a:p>
+        </p:txBody>
+      </p:sp>
+      <p:sp>
+        <p:nvSpPr>
+          <p:cNvPr id="9" name="TextBox 8"/>
           <p:cNvSpPr txBox="1"/>
           <p:nvPr/>
         </p:nvSpPr>
         <p:spPr>
           <a:xfrm>
-            <a:off x="6291072" y="1901952"/>
-            <a:ext cx="4754880" cy="384048"/>
+            <a:off x="6400800" y="1554480"/>
+            <a:ext cx="1828800" cy="329184"/>
           </a:xfrm>
           <a:prstGeom prst="rect">
             <a:avLst/>
@@ -5533,37 +5716,37 @@
               </a:spcAft>
             </a:pPr>
             <a:r>
-              <a:rPr sz="2100" b="1">
-                <a:solidFill>
-                  <a:srgbClr val="163247"/>
-                </a:solidFill>
-                <a:latin typeface="Microsoft YaHei"/>
-              </a:rPr>
-              <a:t>当前中期范围</a:t>
-            </a:r>
-          </a:p>
-        </p:txBody>
-      </p:sp>
-      <p:sp>
-        <p:nvSpPr>
-          <p:cNvPr id="13" name="Rounded Rectangle 12"/>
+              <a:rPr sz="1800" b="1">
+                <a:solidFill>
+                  <a:srgbClr val="D39A37"/>
+                </a:solidFill>
+                <a:latin typeface="Microsoft YaHei"/>
+              </a:rPr>
+              <a:t>中期目标</a:t>
+            </a:r>
+          </a:p>
+        </p:txBody>
+      </p:sp>
+      <p:sp>
+        <p:nvSpPr>
+          <p:cNvPr id="10" name="Rounded Rectangle 9"/>
           <p:cNvSpPr/>
           <p:nvPr/>
         </p:nvSpPr>
         <p:spPr>
           <a:xfrm>
-            <a:off x="6291072" y="2487168"/>
-            <a:ext cx="1389888" cy="1024128"/>
+            <a:off x="6355080" y="1938528"/>
+            <a:ext cx="5074920" cy="3246120"/>
           </a:xfrm>
           <a:prstGeom prst="roundRect">
             <a:avLst/>
           </a:prstGeom>
           <a:solidFill>
-            <a:srgbClr val="FFFFFF"/>
+            <a:srgbClr val="FBF0D8"/>
           </a:solidFill>
           <a:ln w="13970">
             <a:solidFill>
-              <a:srgbClr val="D6E0E5"/>
+              <a:srgbClr val="D39A37"/>
             </a:solidFill>
           </a:ln>
         </p:spPr>
@@ -5582,23 +5765,132 @@
           </a:fontRef>
         </p:style>
         <p:txBody>
-          <a:bodyPr rtlCol="0" anchor="ctr"/>
-          <a:lstStyle/>
-          <a:p>
-            <a:pPr algn="ctr"/>
-          </a:p>
-        </p:txBody>
-      </p:sp>
-      <p:sp>
-        <p:nvSpPr>
-          <p:cNvPr id="14" name="TextBox 13"/>
+          <a:bodyPr rtlCol="0" anchor="t" wrap="square" lIns="146304" rIns="146304" tIns="91440" bIns="73152"/>
+          <a:lstStyle/>
+          <a:p>
+            <a:pPr algn="l">
+              <a:spcAft>
+                <a:spcPts val="600"/>
+              </a:spcAft>
+            </a:pPr>
+            <a:r>
+              <a:rPr sz="1800" b="1">
+                <a:solidFill>
+                  <a:srgbClr val="D39A37"/>
+                </a:solidFill>
+                <a:latin typeface="Microsoft YaHei"/>
+              </a:rPr>
+              <a:t>本阶段交付什么</a:t>
+            </a:r>
+          </a:p>
+          <a:p>
+            <a:pPr algn="l">
+              <a:spcAft>
+                <a:spcPts val="200"/>
+              </a:spcAft>
+            </a:pPr>
+            <a:r>
+              <a:rPr sz="1500">
+                <a:solidFill>
+                  <a:srgbClr val="263642"/>
+                </a:solidFill>
+                <a:latin typeface="Microsoft YaHei"/>
+              </a:rPr>
+              <a:t>• 本机可演示的文本型 RAG 原型</a:t>
+            </a:r>
+          </a:p>
+          <a:p>
+            <a:pPr algn="l">
+              <a:spcAft>
+                <a:spcPts val="200"/>
+              </a:spcAft>
+            </a:pPr>
+            <a:r>
+              <a:rPr sz="1500">
+                <a:solidFill>
+                  <a:srgbClr val="263642"/>
+                </a:solidFill>
+                <a:latin typeface="Microsoft YaHei"/>
+              </a:rPr>
+              <a:t>• 中文四课受控资料：4 / 27 / 2,501</a:t>
+            </a:r>
+          </a:p>
+          <a:p>
+            <a:pPr algn="l">
+              <a:spcAft>
+                <a:spcPts val="200"/>
+              </a:spcAft>
+            </a:pPr>
+            <a:r>
+              <a:rPr sz="1500">
+                <a:solidFill>
+                  <a:srgbClr val="263642"/>
+                </a:solidFill>
+                <a:latin typeface="Microsoft YaHei"/>
+              </a:rPr>
+              <a:t>• 学生能提问、看引用、回原 PDF 页</a:t>
+            </a:r>
+          </a:p>
+          <a:p>
+            <a:pPr algn="l">
+              <a:spcAft>
+                <a:spcPts val="200"/>
+              </a:spcAft>
+            </a:pPr>
+            <a:r>
+              <a:rPr sz="1500">
+                <a:solidFill>
+                  <a:srgbClr val="263642"/>
+                </a:solidFill>
+                <a:latin typeface="Microsoft YaHei"/>
+              </a:rPr>
+              <a:t>• 依据不足与系统失败分开呈现</a:t>
+            </a:r>
+          </a:p>
+          <a:p>
+            <a:pPr algn="l">
+              <a:spcAft>
+                <a:spcPts val="200"/>
+              </a:spcAft>
+            </a:pPr>
+            <a:r>
+              <a:rPr sz="1500">
+                <a:solidFill>
+                  <a:srgbClr val="263642"/>
+                </a:solidFill>
+                <a:latin typeface="Microsoft YaHei"/>
+              </a:rPr>
+              <a:t>• 教师侧基础教学反馈（统计/待核对）</a:t>
+            </a:r>
+          </a:p>
+          <a:p>
+            <a:pPr algn="l">
+              <a:spcAft>
+                <a:spcPts val="200"/>
+              </a:spcAft>
+            </a:pPr>
+            <a:r>
+              <a:rPr sz="1500">
+                <a:solidFill>
+                  <a:srgbClr val="263642"/>
+                </a:solidFill>
+                <a:latin typeface="Microsoft YaHei"/>
+              </a:rPr>
+              <a:t>• 不宣称生产部署或通用多模态</a:t>
+            </a:r>
+          </a:p>
+        </p:txBody>
+      </p:sp>
+      <p:sp>
+        <p:nvSpPr>
+          <p:cNvPr id="11" name="TextBox 10"/>
           <p:cNvSpPr txBox="1"/>
           <p:nvPr/>
         </p:nvSpPr>
         <p:spPr>
           <a:xfrm>
-            <a:off x="6364224" y="2578608"/>
-            <a:ext cx="1243584" cy="457200"/>
+            <a:off x="777240" y="5532120"/>
+            <a:ext cx="10607040" cy="329184"/>
           </a:xfrm>
           <a:prstGeom prst="rect">
             <a:avLst/>
@@ -5617,421 +5909,13 @@
               </a:spcAft>
             </a:pPr>
             <a:r>
-              <a:rPr sz="2700" b="1">
-                <a:solidFill>
-                  <a:srgbClr val="247D78"/>
-                </a:solidFill>
-                <a:latin typeface="Microsoft YaHei"/>
-              </a:rPr>
-              <a:t>4</a:t>
-            </a:r>
-          </a:p>
-        </p:txBody>
-      </p:sp>
-      <p:sp>
-        <p:nvSpPr>
-          <p:cNvPr id="15" name="TextBox 14"/>
-          <p:cNvSpPr txBox="1"/>
-          <p:nvPr/>
-        </p:nvSpPr>
-        <p:spPr>
-          <a:xfrm>
-            <a:off x="6364224" y="3072384"/>
-            <a:ext cx="1243584" cy="274320"/>
-          </a:xfrm>
-          <a:prstGeom prst="rect">
-            <a:avLst/>
-          </a:prstGeom>
-          <a:noFill/>
-        </p:spPr>
-        <p:txBody>
-          <a:bodyPr wrap="square" lIns="36576" rIns="36576" tIns="18288" bIns="18288" anchor="ctr">
-            <a:spAutoFit/>
-          </a:bodyPr>
-          <a:lstStyle/>
-          <a:p>
-            <a:pPr algn="ctr">
-              <a:spcAft>
-                <a:spcPts val="200"/>
-              </a:spcAft>
-            </a:pPr>
-            <a:r>
-              <a:rPr sz="1300" b="0">
-                <a:solidFill>
-                  <a:srgbClr val="61727D"/>
-                </a:solidFill>
-                <a:latin typeface="Microsoft YaHei"/>
-              </a:rPr>
-              <a:t>门课程</a:t>
-            </a:r>
-          </a:p>
-        </p:txBody>
-      </p:sp>
-      <p:sp>
-        <p:nvSpPr>
-          <p:cNvPr id="16" name="Rounded Rectangle 15"/>
-          <p:cNvSpPr/>
-          <p:nvPr/>
-        </p:nvSpPr>
-        <p:spPr>
-          <a:xfrm>
-            <a:off x="7882127" y="2487168"/>
-            <a:ext cx="1389888" cy="1024128"/>
-          </a:xfrm>
-          <a:prstGeom prst="roundRect">
-            <a:avLst/>
-          </a:prstGeom>
-          <a:solidFill>
-            <a:srgbClr val="FFFFFF"/>
-          </a:solidFill>
-          <a:ln w="13970">
-            <a:solidFill>
-              <a:srgbClr val="D6E0E5"/>
-            </a:solidFill>
-          </a:ln>
-        </p:spPr>
-        <p:style>
-          <a:lnRef idx="1">
-            <a:schemeClr val="accent1"/>
-          </a:lnRef>
-          <a:fillRef idx="3">
-            <a:schemeClr val="accent1"/>
-          </a:fillRef>
-          <a:effectRef idx="2">
-            <a:schemeClr val="accent1"/>
-          </a:effectRef>
-          <a:fontRef idx="minor">
-            <a:schemeClr val="lt1"/>
-          </a:fontRef>
-        </p:style>
-        <p:txBody>
-          <a:bodyPr rtlCol="0" anchor="ctr"/>
-          <a:lstStyle/>
-          <a:p>
-            <a:pPr algn="ctr"/>
-          </a:p>
-        </p:txBody>
-      </p:sp>
-      <p:sp>
-        <p:nvSpPr>
-          <p:cNvPr id="17" name="TextBox 16"/>
-          <p:cNvSpPr txBox="1"/>
-          <p:nvPr/>
-        </p:nvSpPr>
-        <p:spPr>
-          <a:xfrm>
-            <a:off x="7955279" y="2578608"/>
-            <a:ext cx="1243584" cy="457200"/>
-          </a:xfrm>
-          <a:prstGeom prst="rect">
-            <a:avLst/>
-          </a:prstGeom>
-          <a:noFill/>
-        </p:spPr>
-        <p:txBody>
-          <a:bodyPr wrap="square" lIns="36576" rIns="36576" tIns="18288" bIns="18288" anchor="ctr">
-            <a:spAutoFit/>
-          </a:bodyPr>
-          <a:lstStyle/>
-          <a:p>
-            <a:pPr algn="ctr">
-              <a:spcAft>
-                <a:spcPts val="200"/>
-              </a:spcAft>
-            </a:pPr>
-            <a:r>
-              <a:rPr sz="2700" b="1">
-                <a:solidFill>
-                  <a:srgbClr val="D39A37"/>
-                </a:solidFill>
-                <a:latin typeface="Microsoft YaHei"/>
-              </a:rPr>
-              <a:t>27</a:t>
-            </a:r>
-          </a:p>
-        </p:txBody>
-      </p:sp>
-      <p:sp>
-        <p:nvSpPr>
-          <p:cNvPr id="18" name="TextBox 17"/>
-          <p:cNvSpPr txBox="1"/>
-          <p:nvPr/>
-        </p:nvSpPr>
-        <p:spPr>
-          <a:xfrm>
-            <a:off x="7955279" y="3072384"/>
-            <a:ext cx="1243584" cy="274320"/>
-          </a:xfrm>
-          <a:prstGeom prst="rect">
-            <a:avLst/>
-          </a:prstGeom>
-          <a:noFill/>
-        </p:spPr>
-        <p:txBody>
-          <a:bodyPr wrap="square" lIns="36576" rIns="36576" tIns="18288" bIns="18288" anchor="ctr">
-            <a:spAutoFit/>
-          </a:bodyPr>
-          <a:lstStyle/>
-          <a:p>
-            <a:pPr algn="ctr">
-              <a:spcAft>
-                <a:spcPts val="200"/>
-              </a:spcAft>
-            </a:pPr>
-            <a:r>
-              <a:rPr sz="1300" b="0">
-                <a:solidFill>
-                  <a:srgbClr val="61727D"/>
-                </a:solidFill>
-                <a:latin typeface="Microsoft YaHei"/>
-              </a:rPr>
-              <a:t>份 PDF</a:t>
-            </a:r>
-          </a:p>
-        </p:txBody>
-      </p:sp>
-      <p:sp>
-        <p:nvSpPr>
-          <p:cNvPr id="19" name="Rounded Rectangle 18"/>
-          <p:cNvSpPr/>
-          <p:nvPr/>
-        </p:nvSpPr>
-        <p:spPr>
-          <a:xfrm>
-            <a:off x="9473184" y="2487168"/>
-            <a:ext cx="1572768" cy="1024128"/>
-          </a:xfrm>
-          <a:prstGeom prst="roundRect">
-            <a:avLst/>
-          </a:prstGeom>
-          <a:solidFill>
-            <a:srgbClr val="FFFFFF"/>
-          </a:solidFill>
-          <a:ln w="13970">
-            <a:solidFill>
-              <a:srgbClr val="D6E0E5"/>
-            </a:solidFill>
-          </a:ln>
-        </p:spPr>
-        <p:style>
-          <a:lnRef idx="1">
-            <a:schemeClr val="accent1"/>
-          </a:lnRef>
-          <a:fillRef idx="3">
-            <a:schemeClr val="accent1"/>
-          </a:fillRef>
-          <a:effectRef idx="2">
-            <a:schemeClr val="accent1"/>
-          </a:effectRef>
-          <a:fontRef idx="minor">
-            <a:schemeClr val="lt1"/>
-          </a:fontRef>
-        </p:style>
-        <p:txBody>
-          <a:bodyPr rtlCol="0" anchor="ctr"/>
-          <a:lstStyle/>
-          <a:p>
-            <a:pPr algn="ctr"/>
-          </a:p>
-        </p:txBody>
-      </p:sp>
-      <p:sp>
-        <p:nvSpPr>
-          <p:cNvPr id="20" name="TextBox 19"/>
-          <p:cNvSpPr txBox="1"/>
-          <p:nvPr/>
-        </p:nvSpPr>
-        <p:spPr>
-          <a:xfrm>
-            <a:off x="9546336" y="2578608"/>
-            <a:ext cx="1426464" cy="457200"/>
-          </a:xfrm>
-          <a:prstGeom prst="rect">
-            <a:avLst/>
-          </a:prstGeom>
-          <a:noFill/>
-        </p:spPr>
-        <p:txBody>
-          <a:bodyPr wrap="square" lIns="36576" rIns="36576" tIns="18288" bIns="18288" anchor="ctr">
-            <a:spAutoFit/>
-          </a:bodyPr>
-          <a:lstStyle/>
-          <a:p>
-            <a:pPr algn="ctr">
-              <a:spcAft>
-                <a:spcPts val="200"/>
-              </a:spcAft>
-            </a:pPr>
-            <a:r>
-              <a:rPr sz="2700" b="1">
-                <a:solidFill>
-                  <a:srgbClr val="26734E"/>
-                </a:solidFill>
-                <a:latin typeface="Microsoft YaHei"/>
-              </a:rPr>
-              <a:t>2501</a:t>
-            </a:r>
-          </a:p>
-        </p:txBody>
-      </p:sp>
-      <p:sp>
-        <p:nvSpPr>
-          <p:cNvPr id="21" name="TextBox 20"/>
-          <p:cNvSpPr txBox="1"/>
-          <p:nvPr/>
-        </p:nvSpPr>
-        <p:spPr>
-          <a:xfrm>
-            <a:off x="9546336" y="3072384"/>
-            <a:ext cx="1426464" cy="274320"/>
-          </a:xfrm>
-          <a:prstGeom prst="rect">
-            <a:avLst/>
-          </a:prstGeom>
-          <a:noFill/>
-        </p:spPr>
-        <p:txBody>
-          <a:bodyPr wrap="square" lIns="36576" rIns="36576" tIns="18288" bIns="18288" anchor="ctr">
-            <a:spAutoFit/>
-          </a:bodyPr>
-          <a:lstStyle/>
-          <a:p>
-            <a:pPr algn="ctr">
-              <a:spcAft>
-                <a:spcPts val="200"/>
-              </a:spcAft>
-            </a:pPr>
-            <a:r>
-              <a:rPr sz="1300" b="0">
-                <a:solidFill>
-                  <a:srgbClr val="61727D"/>
-                </a:solidFill>
-                <a:latin typeface="Microsoft YaHei"/>
-              </a:rPr>
-              <a:t>chunks</a:t>
-            </a:r>
-          </a:p>
-        </p:txBody>
-      </p:sp>
-      <p:sp>
-        <p:nvSpPr>
-          <p:cNvPr id="22" name="TextBox 21"/>
-          <p:cNvSpPr txBox="1"/>
-          <p:nvPr/>
-        </p:nvSpPr>
-        <p:spPr>
-          <a:xfrm>
-            <a:off x="6291072" y="3931920"/>
-            <a:ext cx="4681728" cy="841248"/>
-          </a:xfrm>
-          <a:prstGeom prst="rect">
-            <a:avLst/>
-          </a:prstGeom>
-          <a:noFill/>
-        </p:spPr>
-        <p:txBody>
-          <a:bodyPr wrap="square" lIns="36576" rIns="36576" tIns="18288" bIns="18288" anchor="ctr">
-            <a:spAutoFit/>
-          </a:bodyPr>
-          <a:lstStyle/>
-          <a:p>
-            <a:pPr algn="l">
-              <a:spcAft>
-                <a:spcPts val="200"/>
-              </a:spcAft>
-            </a:pPr>
-            <a:r>
               <a:rPr sz="1700" b="1">
                 <a:solidFill>
-                  <a:srgbClr val="B84242"/>
-                </a:solidFill>
-                <a:latin typeface="Microsoft YaHei"/>
-              </a:rPr>
-              <a:t>不宣称校园网生产部署、通用多模态理解、OCR 全覆盖或人工事实准确率。</a:t>
-            </a:r>
-          </a:p>
-        </p:txBody>
-      </p:sp>
-      <p:sp>
-        <p:nvSpPr>
-          <p:cNvPr id="23" name="Rounded Rectangle 22"/>
-          <p:cNvSpPr/>
-          <p:nvPr/>
-        </p:nvSpPr>
-        <p:spPr>
-          <a:xfrm>
-            <a:off x="6291072" y="4773168"/>
-            <a:ext cx="1965960" cy="347472"/>
-          </a:xfrm>
-          <a:prstGeom prst="roundRect">
-            <a:avLst/>
-          </a:prstGeom>
-          <a:solidFill>
-            <a:srgbClr val="E4F1E9"/>
-          </a:solidFill>
-          <a:ln w="6350">
-            <a:solidFill>
-              <a:srgbClr val="E4F1E9"/>
-            </a:solidFill>
-          </a:ln>
-        </p:spPr>
-        <p:style>
-          <a:lnRef idx="1">
-            <a:schemeClr val="accent1"/>
-          </a:lnRef>
-          <a:fillRef idx="3">
-            <a:schemeClr val="accent1"/>
-          </a:fillRef>
-          <a:effectRef idx="2">
-            <a:schemeClr val="accent1"/>
-          </a:effectRef>
-          <a:fontRef idx="minor">
-            <a:schemeClr val="lt1"/>
-          </a:fontRef>
-        </p:style>
-        <p:txBody>
-          <a:bodyPr rtlCol="0" anchor="ctr"/>
-          <a:lstStyle/>
-          <a:p>
-            <a:pPr algn="ctr"/>
-          </a:p>
-        </p:txBody>
-      </p:sp>
-      <p:sp>
-        <p:nvSpPr>
-          <p:cNvPr id="24" name="TextBox 23"/>
-          <p:cNvSpPr txBox="1"/>
-          <p:nvPr/>
-        </p:nvSpPr>
-        <p:spPr>
-          <a:xfrm>
-            <a:off x="6336792" y="4786883"/>
-            <a:ext cx="1874519" cy="310896"/>
-          </a:xfrm>
-          <a:prstGeom prst="rect">
-            <a:avLst/>
-          </a:prstGeom>
-          <a:noFill/>
-        </p:spPr>
-        <p:txBody>
-          <a:bodyPr wrap="square" lIns="36576" rIns="36576" tIns="18288" bIns="18288" anchor="ctr">
-            <a:spAutoFit/>
-          </a:bodyPr>
-          <a:lstStyle/>
-          <a:p>
-            <a:pPr algn="ctr">
-              <a:spcAft>
-                <a:spcPts val="200"/>
-              </a:spcAft>
-            </a:pPr>
-            <a:r>
-              <a:rPr sz="1400" b="1">
-                <a:solidFill>
-                  <a:srgbClr val="26734E"/>
-                </a:solidFill>
-                <a:latin typeface="Microsoft YaHei"/>
-              </a:rPr>
-              <a:t>本机可演示原型</a:t>
+                  <a:srgbClr val="163247"/>
+                </a:solidFill>
+                <a:latin typeface="Microsoft YaHei"/>
+              </a:rPr>
+              <a:t>核心价值：有依据、可核对的课程问答；教学反馈是辅助闭环。</a:t>
             </a:r>
           </a:p>
         </p:txBody>
@@ -6096,7 +5980,7 @@
                 </a:solidFill>
                 <a:latin typeface="Microsoft YaHei"/>
               </a:rPr>
-              <a:t>系统架构与证据链</a:t>
+              <a:t>业务闭环</a:t>
             </a:r>
           </a:p>
         </p:txBody>
@@ -6135,7 +6019,7 @@
                 </a:solidFill>
                 <a:latin typeface="Microsoft YaHei"/>
               </a:rPr>
-              <a:t>复用成熟解析、Embedding、数据库与 Web 框架，本地实现课程边界和证据治理</a:t>
+              <a:t>课程资料管理 → 授权检索 → 证据问答 → 来源核对 → 教学反馈</a:t>
             </a:r>
           </a:p>
         </p:txBody>
@@ -6194,7 +6078,7 @@
         <p:spPr>
           <a:xfrm>
             <a:off x="566928" y="6510528"/>
-            <a:ext cx="7315200" cy="182880"/>
+            <a:ext cx="8686800" cy="182880"/>
           </a:xfrm>
           <a:prstGeom prst="rect">
             <a:avLst/>
@@ -6219,7 +6103,7 @@
                 </a:solidFill>
                 <a:latin typeface="Microsoft YaHei"/>
               </a:rPr>
-              <a:t>高校课程知识库智能问答 · 中期进展</a:t>
+              <a:t>高校课程知识库智能问答 · 中期进展（参考稿）</a:t>
             </a:r>
           </a:p>
         </p:txBody>
@@ -6271,8 +6155,8 @@
         </p:nvSpPr>
         <p:spPr>
           <a:xfrm>
-            <a:off x="566928" y="2148840"/>
-            <a:ext cx="1517904" cy="1353312"/>
+            <a:off x="502920" y="1691640"/>
+            <a:ext cx="2057400" cy="2331720"/>
           </a:xfrm>
           <a:prstGeom prst="roundRect">
             <a:avLst/>
@@ -6301,124 +6185,75 @@
           </a:fontRef>
         </p:style>
         <p:txBody>
-          <a:bodyPr rtlCol="0" anchor="ctr"/>
-          <a:lstStyle/>
-          <a:p>
-            <a:pPr algn="ctr"/>
-          </a:p>
-        </p:txBody>
-      </p:sp>
-      <p:sp>
-        <p:nvSpPr>
-          <p:cNvPr id="8" name="TextBox 7"/>
-          <p:cNvSpPr txBox="1"/>
-          <p:nvPr/>
-        </p:nvSpPr>
-        <p:spPr>
-          <a:xfrm>
-            <a:off x="640080" y="2340864"/>
-            <a:ext cx="1371600" cy="347472"/>
-          </a:xfrm>
-          <a:prstGeom prst="rect">
-            <a:avLst/>
-          </a:prstGeom>
-          <a:noFill/>
-        </p:spPr>
-        <p:txBody>
-          <a:bodyPr wrap="square" lIns="36576" rIns="36576" tIns="18288" bIns="18288" anchor="ctr">
-            <a:spAutoFit/>
-          </a:bodyPr>
-          <a:lstStyle/>
-          <a:p>
-            <a:pPr algn="ctr">
-              <a:spcAft>
-                <a:spcPts val="200"/>
-              </a:spcAft>
-            </a:pPr>
-            <a:r>
-              <a:rPr sz="1600" b="1">
-                <a:solidFill>
-                  <a:srgbClr val="163247"/>
-                </a:solidFill>
-                <a:latin typeface="Microsoft YaHei"/>
-              </a:rPr>
-              <a:t>课程 PDF</a:t>
-            </a:r>
-          </a:p>
-        </p:txBody>
-      </p:sp>
-      <p:sp>
-        <p:nvSpPr>
-          <p:cNvPr id="9" name="TextBox 8"/>
-          <p:cNvSpPr txBox="1"/>
-          <p:nvPr/>
-        </p:nvSpPr>
-        <p:spPr>
-          <a:xfrm>
-            <a:off x="640080" y="2770632"/>
-            <a:ext cx="1371600" cy="512064"/>
-          </a:xfrm>
-          <a:prstGeom prst="rect">
-            <a:avLst/>
-          </a:prstGeom>
-          <a:noFill/>
-        </p:spPr>
-        <p:txBody>
-          <a:bodyPr wrap="square" lIns="36576" rIns="36576" tIns="18288" bIns="18288" anchor="ctr">
-            <a:spAutoFit/>
-          </a:bodyPr>
-          <a:lstStyle/>
-          <a:p>
-            <a:pPr algn="ctr">
-              <a:spcAft>
-                <a:spcPts val="200"/>
-              </a:spcAft>
-            </a:pPr>
-            <a:r>
-              <a:rPr sz="1200" b="0">
-                <a:solidFill>
-                  <a:srgbClr val="61727D"/>
-                </a:solidFill>
-                <a:latin typeface="Microsoft YaHei"/>
-              </a:rPr>
-              <a:t>原始文件</a:t>
-            </a:r>
-          </a:p>
-          <a:p>
-            <a:pPr algn="ctr">
-              <a:spcAft>
-                <a:spcPts val="200"/>
-              </a:spcAft>
-            </a:pPr>
-            <a:r>
-              <a:rPr sz="1200" b="0">
-                <a:solidFill>
-                  <a:srgbClr val="61727D"/>
-                </a:solidFill>
-                <a:latin typeface="Microsoft YaHei"/>
-              </a:rPr>
-              <a:t>课程隔离</a:t>
+          <a:bodyPr rtlCol="0" anchor="t" wrap="square" lIns="146304" rIns="146304" tIns="91440" bIns="73152"/>
+          <a:lstStyle/>
+          <a:p>
+            <a:pPr algn="l">
+              <a:spcAft>
+                <a:spcPts val="600"/>
+              </a:spcAft>
+            </a:pPr>
+            <a:r>
+              <a:rPr sz="1700" b="1">
+                <a:solidFill>
+                  <a:srgbClr val="247D78"/>
+                </a:solidFill>
+                <a:latin typeface="Microsoft YaHei"/>
+              </a:rPr>
+              <a:t>① 资料管理</a:t>
+            </a:r>
+          </a:p>
+          <a:p>
+            <a:pPr algn="l">
+              <a:spcAft>
+                <a:spcPts val="200"/>
+              </a:spcAft>
+            </a:pPr>
+            <a:r>
+              <a:rPr sz="1400">
+                <a:solidFill>
+                  <a:srgbClr val="263642"/>
+                </a:solidFill>
+                <a:latin typeface="Microsoft YaHei"/>
+              </a:rPr>
+              <a:t>上传解析入库</a:t>
+            </a:r>
+          </a:p>
+          <a:p>
+            <a:pPr algn="l">
+              <a:spcAft>
+                <a:spcPts val="200"/>
+              </a:spcAft>
+            </a:pPr>
+            <a:r>
+              <a:rPr sz="1400">
+                <a:solidFill>
+                  <a:srgbClr val="263642"/>
+                </a:solidFill>
+                <a:latin typeface="Microsoft YaHei"/>
+              </a:rPr>
+              <a:t>页级质量门禁</a:t>
             </a:r>
           </a:p>
         </p:txBody>
       </p:sp>
       <p:cxnSp>
         <p:nvCxnSpPr>
-          <p:cNvPr id="10" name="Connector 9"/>
+          <p:cNvPr id="8" name="Connector 7"/>
           <p:cNvCxnSpPr/>
           <p:nvPr/>
         </p:nvCxnSpPr>
         <p:spPr>
           <a:xfrm>
-            <a:off x="2103120" y="2825496"/>
-            <a:ext cx="292608" cy="0"/>
+            <a:off x="2587752" y="2788920"/>
+            <a:ext cx="128016" cy="0"/>
           </a:xfrm>
           <a:prstGeom prst="line">
             <a:avLst/>
           </a:prstGeom>
-          <a:ln w="22860">
+          <a:ln w="25400">
             <a:solidFill>
-              <a:srgbClr val="247D78"/>
+              <a:srgbClr val="D39A37"/>
             </a:solidFill>
           </a:ln>
         </p:spPr>
@@ -6439,14 +6274,14 @@
       </p:cxnSp>
       <p:sp>
         <p:nvSpPr>
-          <p:cNvPr id="11" name="Rounded Rectangle 10"/>
+          <p:cNvPr id="9" name="Rounded Rectangle 8"/>
           <p:cNvSpPr/>
           <p:nvPr/>
         </p:nvSpPr>
         <p:spPr>
           <a:xfrm>
-            <a:off x="2468880" y="2148840"/>
-            <a:ext cx="1517904" cy="1353312"/>
+            <a:off x="2788920" y="1691640"/>
+            <a:ext cx="2057400" cy="2331720"/>
           </a:xfrm>
           <a:prstGeom prst="roundRect">
             <a:avLst/>
@@ -6475,124 +6310,75 @@
           </a:fontRef>
         </p:style>
         <p:txBody>
-          <a:bodyPr rtlCol="0" anchor="ctr"/>
-          <a:lstStyle/>
-          <a:p>
-            <a:pPr algn="ctr"/>
-          </a:p>
-        </p:txBody>
-      </p:sp>
-      <p:sp>
-        <p:nvSpPr>
-          <p:cNvPr id="12" name="TextBox 11"/>
-          <p:cNvSpPr txBox="1"/>
-          <p:nvPr/>
-        </p:nvSpPr>
-        <p:spPr>
-          <a:xfrm>
-            <a:off x="2542032" y="2340864"/>
-            <a:ext cx="1371600" cy="347472"/>
-          </a:xfrm>
-          <a:prstGeom prst="rect">
-            <a:avLst/>
-          </a:prstGeom>
-          <a:noFill/>
-        </p:spPr>
-        <p:txBody>
-          <a:bodyPr wrap="square" lIns="36576" rIns="36576" tIns="18288" bIns="18288" anchor="ctr">
-            <a:spAutoFit/>
-          </a:bodyPr>
-          <a:lstStyle/>
-          <a:p>
-            <a:pPr algn="ctr">
-              <a:spcAft>
-                <a:spcPts val="200"/>
-              </a:spcAft>
-            </a:pPr>
-            <a:r>
-              <a:rPr sz="1600" b="1">
+          <a:bodyPr rtlCol="0" anchor="t" wrap="square" lIns="146304" rIns="146304" tIns="91440" bIns="73152"/>
+          <a:lstStyle/>
+          <a:p>
+            <a:pPr algn="l">
+              <a:spcAft>
+                <a:spcPts val="600"/>
+              </a:spcAft>
+            </a:pPr>
+            <a:r>
+              <a:rPr sz="1700" b="1">
                 <a:solidFill>
                   <a:srgbClr val="163247"/>
                 </a:solidFill>
                 <a:latin typeface="Microsoft YaHei"/>
               </a:rPr>
-              <a:t>解析与质检</a:t>
-            </a:r>
-          </a:p>
-        </p:txBody>
-      </p:sp>
-      <p:sp>
-        <p:nvSpPr>
-          <p:cNvPr id="13" name="TextBox 12"/>
-          <p:cNvSpPr txBox="1"/>
-          <p:nvPr/>
-        </p:nvSpPr>
-        <p:spPr>
-          <a:xfrm>
-            <a:off x="2542032" y="2770632"/>
-            <a:ext cx="1371600" cy="512064"/>
-          </a:xfrm>
-          <a:prstGeom prst="rect">
-            <a:avLst/>
-          </a:prstGeom>
-          <a:noFill/>
-        </p:spPr>
-        <p:txBody>
-          <a:bodyPr wrap="square" lIns="36576" rIns="36576" tIns="18288" bIns="18288" anchor="ctr">
-            <a:spAutoFit/>
-          </a:bodyPr>
-          <a:lstStyle/>
-          <a:p>
-            <a:pPr algn="ctr">
-              <a:spcAft>
-                <a:spcPts val="200"/>
-              </a:spcAft>
-            </a:pPr>
-            <a:r>
-              <a:rPr sz="1200" b="0">
-                <a:solidFill>
-                  <a:srgbClr val="61727D"/>
-                </a:solidFill>
-                <a:latin typeface="Microsoft YaHei"/>
-              </a:rPr>
-              <a:t>PyMuPDF</a:t>
-            </a:r>
-          </a:p>
-          <a:p>
-            <a:pPr algn="ctr">
-              <a:spcAft>
-                <a:spcPts val="200"/>
-              </a:spcAft>
-            </a:pPr>
-            <a:r>
-              <a:rPr sz="1200" b="0">
-                <a:solidFill>
-                  <a:srgbClr val="61727D"/>
-                </a:solidFill>
-                <a:latin typeface="Microsoft YaHei"/>
-              </a:rPr>
-              <a:t>页级质量门禁</a:t>
+              <a:t>② 授权检索</a:t>
+            </a:r>
+          </a:p>
+          <a:p>
+            <a:pPr algn="l">
+              <a:spcAft>
+                <a:spcPts val="200"/>
+              </a:spcAft>
+            </a:pPr>
+            <a:r>
+              <a:rPr sz="1400">
+                <a:solidFill>
+                  <a:srgbClr val="263642"/>
+                </a:solidFill>
+                <a:latin typeface="Microsoft YaHei"/>
+              </a:rPr>
+              <a:t>课程成员边界</a:t>
+            </a:r>
+          </a:p>
+          <a:p>
+            <a:pPr algn="l">
+              <a:spcAft>
+                <a:spcPts val="200"/>
+              </a:spcAft>
+            </a:pPr>
+            <a:r>
+              <a:rPr sz="1400">
+                <a:solidFill>
+                  <a:srgbClr val="263642"/>
+                </a:solidFill>
+                <a:latin typeface="Microsoft YaHei"/>
+              </a:rPr>
+              <a:t>课内候选召回</a:t>
             </a:r>
           </a:p>
         </p:txBody>
       </p:sp>
       <p:cxnSp>
         <p:nvCxnSpPr>
-          <p:cNvPr id="14" name="Connector 13"/>
+          <p:cNvPr id="10" name="Connector 9"/>
           <p:cNvCxnSpPr/>
           <p:nvPr/>
         </p:nvCxnSpPr>
         <p:spPr>
           <a:xfrm>
-            <a:off x="4005072" y="2825496"/>
-            <a:ext cx="292608" cy="0"/>
+            <a:off x="4873752" y="2788920"/>
+            <a:ext cx="128016" cy="0"/>
           </a:xfrm>
           <a:prstGeom prst="line">
             <a:avLst/>
           </a:prstGeom>
-          <a:ln w="22860">
+          <a:ln w="25400">
             <a:solidFill>
-              <a:srgbClr val="247D78"/>
+              <a:srgbClr val="D39A37"/>
             </a:solidFill>
           </a:ln>
         </p:spPr>
@@ -6613,362 +6399,14 @@
       </p:cxnSp>
       <p:sp>
         <p:nvSpPr>
-          <p:cNvPr id="15" name="Rounded Rectangle 14"/>
+          <p:cNvPr id="11" name="Rounded Rectangle 10"/>
           <p:cNvSpPr/>
           <p:nvPr/>
         </p:nvSpPr>
         <p:spPr>
           <a:xfrm>
-            <a:off x="4370832" y="2148840"/>
-            <a:ext cx="1517904" cy="1353312"/>
-          </a:xfrm>
-          <a:prstGeom prst="roundRect">
-            <a:avLst/>
-          </a:prstGeom>
-          <a:solidFill>
-            <a:srgbClr val="FFFFFF"/>
-          </a:solidFill>
-          <a:ln w="13970">
-            <a:solidFill>
-              <a:srgbClr val="247D78"/>
-            </a:solidFill>
-          </a:ln>
-        </p:spPr>
-        <p:style>
-          <a:lnRef idx="1">
-            <a:schemeClr val="accent1"/>
-          </a:lnRef>
-          <a:fillRef idx="3">
-            <a:schemeClr val="accent1"/>
-          </a:fillRef>
-          <a:effectRef idx="2">
-            <a:schemeClr val="accent1"/>
-          </a:effectRef>
-          <a:fontRef idx="minor">
-            <a:schemeClr val="lt1"/>
-          </a:fontRef>
-        </p:style>
-        <p:txBody>
-          <a:bodyPr rtlCol="0" anchor="ctr"/>
-          <a:lstStyle/>
-          <a:p>
-            <a:pPr algn="ctr"/>
-          </a:p>
-        </p:txBody>
-      </p:sp>
-      <p:sp>
-        <p:nvSpPr>
-          <p:cNvPr id="16" name="TextBox 15"/>
-          <p:cNvSpPr txBox="1"/>
-          <p:nvPr/>
-        </p:nvSpPr>
-        <p:spPr>
-          <a:xfrm>
-            <a:off x="4443984" y="2340864"/>
-            <a:ext cx="1371600" cy="347472"/>
-          </a:xfrm>
-          <a:prstGeom prst="rect">
-            <a:avLst/>
-          </a:prstGeom>
-          <a:noFill/>
-        </p:spPr>
-        <p:txBody>
-          <a:bodyPr wrap="square" lIns="36576" rIns="36576" tIns="18288" bIns="18288" anchor="ctr">
-            <a:spAutoFit/>
-          </a:bodyPr>
-          <a:lstStyle/>
-          <a:p>
-            <a:pPr algn="ctr">
-              <a:spcAft>
-                <a:spcPts val="200"/>
-              </a:spcAft>
-            </a:pPr>
-            <a:r>
-              <a:rPr sz="1600" b="1">
-                <a:solidFill>
-                  <a:srgbClr val="163247"/>
-                </a:solidFill>
-                <a:latin typeface="Microsoft YaHei"/>
-              </a:rPr>
-              <a:t>切分与来源</a:t>
-            </a:r>
-          </a:p>
-        </p:txBody>
-      </p:sp>
-      <p:sp>
-        <p:nvSpPr>
-          <p:cNvPr id="17" name="TextBox 16"/>
-          <p:cNvSpPr txBox="1"/>
-          <p:nvPr/>
-        </p:nvSpPr>
-        <p:spPr>
-          <a:xfrm>
-            <a:off x="4443984" y="2770632"/>
-            <a:ext cx="1371600" cy="512064"/>
-          </a:xfrm>
-          <a:prstGeom prst="rect">
-            <a:avLst/>
-          </a:prstGeom>
-          <a:noFill/>
-        </p:spPr>
-        <p:txBody>
-          <a:bodyPr wrap="square" lIns="36576" rIns="36576" tIns="18288" bIns="18288" anchor="ctr">
-            <a:spAutoFit/>
-          </a:bodyPr>
-          <a:lstStyle/>
-          <a:p>
-            <a:pPr algn="ctr">
-              <a:spcAft>
-                <a:spcPts val="200"/>
-              </a:spcAft>
-            </a:pPr>
-            <a:r>
-              <a:rPr sz="1200" b="0">
-                <a:solidFill>
-                  <a:srgbClr val="61727D"/>
-                </a:solidFill>
-                <a:latin typeface="Microsoft YaHei"/>
-              </a:rPr>
-              <a:t>语义切分</a:t>
-            </a:r>
-          </a:p>
-          <a:p>
-            <a:pPr algn="ctr">
-              <a:spcAft>
-                <a:spcPts val="200"/>
-              </a:spcAft>
-            </a:pPr>
-            <a:r>
-              <a:rPr sz="1200" b="0">
-                <a:solidFill>
-                  <a:srgbClr val="61727D"/>
-                </a:solidFill>
-                <a:latin typeface="Microsoft YaHei"/>
-              </a:rPr>
-              <a:t>页码/来源映射</a:t>
-            </a:r>
-          </a:p>
-        </p:txBody>
-      </p:sp>
-      <p:cxnSp>
-        <p:nvCxnSpPr>
-          <p:cNvPr id="18" name="Connector 17"/>
-          <p:cNvCxnSpPr/>
-          <p:nvPr/>
-        </p:nvCxnSpPr>
-        <p:spPr>
-          <a:xfrm>
-            <a:off x="5907024" y="2825496"/>
-            <a:ext cx="292608" cy="0"/>
-          </a:xfrm>
-          <a:prstGeom prst="line">
-            <a:avLst/>
-          </a:prstGeom>
-          <a:ln w="22860">
-            <a:solidFill>
-              <a:srgbClr val="247D78"/>
-            </a:solidFill>
-          </a:ln>
-        </p:spPr>
-        <p:style>
-          <a:lnRef idx="2">
-            <a:schemeClr val="accent1"/>
-          </a:lnRef>
-          <a:fillRef idx="0">
-            <a:schemeClr val="accent1"/>
-          </a:fillRef>
-          <a:effectRef idx="1">
-            <a:schemeClr val="accent1"/>
-          </a:effectRef>
-          <a:fontRef idx="minor">
-            <a:schemeClr val="tx1"/>
-          </a:fontRef>
-        </p:style>
-      </p:cxnSp>
-      <p:sp>
-        <p:nvSpPr>
-          <p:cNvPr id="19" name="Rounded Rectangle 18"/>
-          <p:cNvSpPr/>
-          <p:nvPr/>
-        </p:nvSpPr>
-        <p:spPr>
-          <a:xfrm>
-            <a:off x="6272784" y="2148840"/>
-            <a:ext cx="1517904" cy="1353312"/>
-          </a:xfrm>
-          <a:prstGeom prst="roundRect">
-            <a:avLst/>
-          </a:prstGeom>
-          <a:solidFill>
-            <a:srgbClr val="FFFFFF"/>
-          </a:solidFill>
-          <a:ln w="13970">
-            <a:solidFill>
-              <a:srgbClr val="247D78"/>
-            </a:solidFill>
-          </a:ln>
-        </p:spPr>
-        <p:style>
-          <a:lnRef idx="1">
-            <a:schemeClr val="accent1"/>
-          </a:lnRef>
-          <a:fillRef idx="3">
-            <a:schemeClr val="accent1"/>
-          </a:fillRef>
-          <a:effectRef idx="2">
-            <a:schemeClr val="accent1"/>
-          </a:effectRef>
-          <a:fontRef idx="minor">
-            <a:schemeClr val="lt1"/>
-          </a:fontRef>
-        </p:style>
-        <p:txBody>
-          <a:bodyPr rtlCol="0" anchor="ctr"/>
-          <a:lstStyle/>
-          <a:p>
-            <a:pPr algn="ctr"/>
-          </a:p>
-        </p:txBody>
-      </p:sp>
-      <p:sp>
-        <p:nvSpPr>
-          <p:cNvPr id="20" name="TextBox 19"/>
-          <p:cNvSpPr txBox="1"/>
-          <p:nvPr/>
-        </p:nvSpPr>
-        <p:spPr>
-          <a:xfrm>
-            <a:off x="6345936" y="2340864"/>
-            <a:ext cx="1371600" cy="347472"/>
-          </a:xfrm>
-          <a:prstGeom prst="rect">
-            <a:avLst/>
-          </a:prstGeom>
-          <a:noFill/>
-        </p:spPr>
-        <p:txBody>
-          <a:bodyPr wrap="square" lIns="36576" rIns="36576" tIns="18288" bIns="18288" anchor="ctr">
-            <a:spAutoFit/>
-          </a:bodyPr>
-          <a:lstStyle/>
-          <a:p>
-            <a:pPr algn="ctr">
-              <a:spcAft>
-                <a:spcPts val="200"/>
-              </a:spcAft>
-            </a:pPr>
-            <a:r>
-              <a:rPr sz="1600" b="1">
-                <a:solidFill>
-                  <a:srgbClr val="163247"/>
-                </a:solidFill>
-                <a:latin typeface="Microsoft YaHei"/>
-              </a:rPr>
-              <a:t>检索</a:t>
-            </a:r>
-          </a:p>
-        </p:txBody>
-      </p:sp>
-      <p:sp>
-        <p:nvSpPr>
-          <p:cNvPr id="21" name="TextBox 20"/>
-          <p:cNvSpPr txBox="1"/>
-          <p:nvPr/>
-        </p:nvSpPr>
-        <p:spPr>
-          <a:xfrm>
-            <a:off x="6345936" y="2770632"/>
-            <a:ext cx="1371600" cy="512064"/>
-          </a:xfrm>
-          <a:prstGeom prst="rect">
-            <a:avLst/>
-          </a:prstGeom>
-          <a:noFill/>
-        </p:spPr>
-        <p:txBody>
-          <a:bodyPr wrap="square" lIns="36576" rIns="36576" tIns="18288" bIns="18288" anchor="ctr">
-            <a:spAutoFit/>
-          </a:bodyPr>
-          <a:lstStyle/>
-          <a:p>
-            <a:pPr algn="ctr">
-              <a:spcAft>
-                <a:spcPts val="200"/>
-              </a:spcAft>
-            </a:pPr>
-            <a:r>
-              <a:rPr sz="1200" b="0">
-                <a:solidFill>
-                  <a:srgbClr val="61727D"/>
-                </a:solidFill>
-                <a:latin typeface="Microsoft YaHei"/>
-              </a:rPr>
-              <a:t>Dense / BM25</a:t>
-            </a:r>
-          </a:p>
-          <a:p>
-            <a:pPr algn="ctr">
-              <a:spcAft>
-                <a:spcPts val="200"/>
-              </a:spcAft>
-            </a:pPr>
-            <a:r>
-              <a:rPr sz="1200" b="0">
-                <a:solidFill>
-                  <a:srgbClr val="61727D"/>
-                </a:solidFill>
-                <a:latin typeface="Microsoft YaHei"/>
-              </a:rPr>
-              <a:t>Hybrid 对照</a:t>
-            </a:r>
-          </a:p>
-        </p:txBody>
-      </p:sp>
-      <p:cxnSp>
-        <p:nvCxnSpPr>
-          <p:cNvPr id="22" name="Connector 21"/>
-          <p:cNvCxnSpPr/>
-          <p:nvPr/>
-        </p:nvCxnSpPr>
-        <p:spPr>
-          <a:xfrm>
-            <a:off x="7808976" y="2825496"/>
-            <a:ext cx="292607" cy="0"/>
-          </a:xfrm>
-          <a:prstGeom prst="line">
-            <a:avLst/>
-          </a:prstGeom>
-          <a:ln w="22860">
-            <a:solidFill>
-              <a:srgbClr val="D39A37"/>
-            </a:solidFill>
-          </a:ln>
-        </p:spPr>
-        <p:style>
-          <a:lnRef idx="2">
-            <a:schemeClr val="accent1"/>
-          </a:lnRef>
-          <a:fillRef idx="0">
-            <a:schemeClr val="accent1"/>
-          </a:fillRef>
-          <a:effectRef idx="1">
-            <a:schemeClr val="accent1"/>
-          </a:effectRef>
-          <a:fontRef idx="minor">
-            <a:schemeClr val="tx1"/>
-          </a:fontRef>
-        </p:style>
-      </p:cxnSp>
-      <p:sp>
-        <p:nvSpPr>
-          <p:cNvPr id="23" name="Rounded Rectangle 22"/>
-          <p:cNvSpPr/>
-          <p:nvPr/>
-        </p:nvSpPr>
-        <p:spPr>
-          <a:xfrm>
-            <a:off x="8174736" y="2148840"/>
-            <a:ext cx="1517904" cy="1353312"/>
+            <a:off x="5074920" y="1691640"/>
+            <a:ext cx="2057400" cy="2331720"/>
           </a:xfrm>
           <a:prstGeom prst="roundRect">
             <a:avLst/>
@@ -6997,122 +6435,73 @@
           </a:fontRef>
         </p:style>
         <p:txBody>
-          <a:bodyPr rtlCol="0" anchor="ctr"/>
-          <a:lstStyle/>
-          <a:p>
-            <a:pPr algn="ctr"/>
-          </a:p>
-        </p:txBody>
-      </p:sp>
-      <p:sp>
-        <p:nvSpPr>
-          <p:cNvPr id="24" name="TextBox 23"/>
-          <p:cNvSpPr txBox="1"/>
-          <p:nvPr/>
-        </p:nvSpPr>
-        <p:spPr>
-          <a:xfrm>
-            <a:off x="8247888" y="2340864"/>
-            <a:ext cx="1371600" cy="347472"/>
-          </a:xfrm>
-          <a:prstGeom prst="rect">
-            <a:avLst/>
-          </a:prstGeom>
-          <a:noFill/>
-        </p:spPr>
-        <p:txBody>
-          <a:bodyPr wrap="square" lIns="36576" rIns="36576" tIns="18288" bIns="18288" anchor="ctr">
-            <a:spAutoFit/>
-          </a:bodyPr>
-          <a:lstStyle/>
-          <a:p>
-            <a:pPr algn="ctr">
-              <a:spcAft>
-                <a:spcPts val="200"/>
-              </a:spcAft>
-            </a:pPr>
-            <a:r>
-              <a:rPr sz="1600" b="1">
-                <a:solidFill>
-                  <a:srgbClr val="163247"/>
-                </a:solidFill>
-                <a:latin typeface="Microsoft YaHei"/>
-              </a:rPr>
-              <a:t>生成</a:t>
-            </a:r>
-          </a:p>
-        </p:txBody>
-      </p:sp>
-      <p:sp>
-        <p:nvSpPr>
-          <p:cNvPr id="25" name="TextBox 24"/>
-          <p:cNvSpPr txBox="1"/>
-          <p:nvPr/>
-        </p:nvSpPr>
-        <p:spPr>
-          <a:xfrm>
-            <a:off x="8247888" y="2770632"/>
-            <a:ext cx="1371600" cy="512064"/>
-          </a:xfrm>
-          <a:prstGeom prst="rect">
-            <a:avLst/>
-          </a:prstGeom>
-          <a:noFill/>
-        </p:spPr>
-        <p:txBody>
-          <a:bodyPr wrap="square" lIns="36576" rIns="36576" tIns="18288" bIns="18288" anchor="ctr">
-            <a:spAutoFit/>
-          </a:bodyPr>
-          <a:lstStyle/>
-          <a:p>
-            <a:pPr algn="ctr">
-              <a:spcAft>
-                <a:spcPts val="200"/>
-              </a:spcAft>
-            </a:pPr>
-            <a:r>
-              <a:rPr sz="1200" b="0">
-                <a:solidFill>
-                  <a:srgbClr val="61727D"/>
-                </a:solidFill>
-                <a:latin typeface="Microsoft YaHei"/>
-              </a:rPr>
-              <a:t>DeepSeek V4 Flash</a:t>
-            </a:r>
-          </a:p>
-          <a:p>
-            <a:pPr algn="ctr">
-              <a:spcAft>
-                <a:spcPts val="200"/>
-              </a:spcAft>
-            </a:pPr>
-            <a:r>
-              <a:rPr sz="1200" b="0">
-                <a:solidFill>
-                  <a:srgbClr val="61727D"/>
-                </a:solidFill>
-                <a:latin typeface="Microsoft YaHei"/>
-              </a:rPr>
-              <a:t>受控上下文</a:t>
+          <a:bodyPr rtlCol="0" anchor="t" wrap="square" lIns="146304" rIns="146304" tIns="91440" bIns="73152"/>
+          <a:lstStyle/>
+          <a:p>
+            <a:pPr algn="l">
+              <a:spcAft>
+                <a:spcPts val="600"/>
+              </a:spcAft>
+            </a:pPr>
+            <a:r>
+              <a:rPr sz="1700" b="1">
+                <a:solidFill>
+                  <a:srgbClr val="D39A37"/>
+                </a:solidFill>
+                <a:latin typeface="Microsoft YaHei"/>
+              </a:rPr>
+              <a:t>③ 证据问答</a:t>
+            </a:r>
+          </a:p>
+          <a:p>
+            <a:pPr algn="l">
+              <a:spcAft>
+                <a:spcPts val="200"/>
+              </a:spcAft>
+            </a:pPr>
+            <a:r>
+              <a:rPr sz="1400">
+                <a:solidFill>
+                  <a:srgbClr val="263642"/>
+                </a:solidFill>
+                <a:latin typeface="Microsoft YaHei"/>
+              </a:rPr>
+              <a:t>受控上下文生成</a:t>
+            </a:r>
+          </a:p>
+          <a:p>
+            <a:pPr algn="l">
+              <a:spcAft>
+                <a:spcPts val="200"/>
+              </a:spcAft>
+            </a:pPr>
+            <a:r>
+              <a:rPr sz="1400">
+                <a:solidFill>
+                  <a:srgbClr val="263642"/>
+                </a:solidFill>
+                <a:latin typeface="Microsoft YaHei"/>
+              </a:rPr>
+              <a:t>有据 / 拒答 / 失败</a:t>
             </a:r>
           </a:p>
         </p:txBody>
       </p:sp>
       <p:cxnSp>
         <p:nvCxnSpPr>
-          <p:cNvPr id="26" name="Connector 25"/>
+          <p:cNvPr id="12" name="Connector 11"/>
           <p:cNvCxnSpPr/>
           <p:nvPr/>
         </p:nvCxnSpPr>
         <p:spPr>
           <a:xfrm>
-            <a:off x="9710928" y="2825496"/>
-            <a:ext cx="292608" cy="0"/>
+            <a:off x="7159752" y="2788920"/>
+            <a:ext cx="128016" cy="0"/>
           </a:xfrm>
           <a:prstGeom prst="line">
             <a:avLst/>
           </a:prstGeom>
-          <a:ln w="22860">
+          <a:ln w="25400">
             <a:solidFill>
               <a:srgbClr val="D39A37"/>
             </a:solidFill>
@@ -7135,24 +6524,24 @@
       </p:cxnSp>
       <p:sp>
         <p:nvSpPr>
-          <p:cNvPr id="27" name="Rounded Rectangle 26"/>
+          <p:cNvPr id="13" name="Rounded Rectangle 12"/>
           <p:cNvSpPr/>
           <p:nvPr/>
         </p:nvSpPr>
         <p:spPr>
           <a:xfrm>
-            <a:off x="10076688" y="2148840"/>
-            <a:ext cx="1517904" cy="1353312"/>
+            <a:off x="7360920" y="1691640"/>
+            <a:ext cx="2057400" cy="2331720"/>
           </a:xfrm>
           <a:prstGeom prst="roundRect">
             <a:avLst/>
           </a:prstGeom>
           <a:solidFill>
-            <a:srgbClr val="163247"/>
+            <a:srgbClr val="FFFFFF"/>
           </a:solidFill>
           <a:ln w="13970">
             <a:solidFill>
-              <a:srgbClr val="163247"/>
+              <a:srgbClr val="D39A37"/>
             </a:solidFill>
           </a:ln>
         </p:spPr>
@@ -7171,117 +6560,193 @@
           </a:fontRef>
         </p:style>
         <p:txBody>
-          <a:bodyPr rtlCol="0" anchor="ctr"/>
-          <a:lstStyle/>
-          <a:p>
-            <a:pPr algn="ctr"/>
-          </a:p>
-        </p:txBody>
-      </p:sp>
-      <p:sp>
-        <p:nvSpPr>
-          <p:cNvPr id="28" name="TextBox 27"/>
-          <p:cNvSpPr txBox="1"/>
-          <p:nvPr/>
-        </p:nvSpPr>
-        <p:spPr>
-          <a:xfrm>
-            <a:off x="10149840" y="2340864"/>
-            <a:ext cx="1371600" cy="347472"/>
-          </a:xfrm>
-          <a:prstGeom prst="rect">
-            <a:avLst/>
-          </a:prstGeom>
-          <a:noFill/>
-        </p:spPr>
-        <p:txBody>
-          <a:bodyPr wrap="square" lIns="36576" rIns="36576" tIns="18288" bIns="18288" anchor="ctr">
-            <a:spAutoFit/>
-          </a:bodyPr>
-          <a:lstStyle/>
-          <a:p>
-            <a:pPr algn="ctr">
-              <a:spcAft>
-                <a:spcPts val="200"/>
-              </a:spcAft>
-            </a:pPr>
-            <a:r>
-              <a:rPr sz="1600" b="1">
-                <a:solidFill>
-                  <a:srgbClr val="FFFFFF"/>
-                </a:solidFill>
-                <a:latin typeface="Microsoft YaHei"/>
-              </a:rPr>
-              <a:t>学生答案</a:t>
-            </a:r>
-          </a:p>
-        </p:txBody>
-      </p:sp>
-      <p:sp>
-        <p:nvSpPr>
-          <p:cNvPr id="29" name="TextBox 28"/>
-          <p:cNvSpPr txBox="1"/>
-          <p:nvPr/>
-        </p:nvSpPr>
-        <p:spPr>
-          <a:xfrm>
-            <a:off x="10149840" y="2770632"/>
-            <a:ext cx="1371600" cy="512064"/>
-          </a:xfrm>
-          <a:prstGeom prst="rect">
-            <a:avLst/>
-          </a:prstGeom>
-          <a:noFill/>
-        </p:spPr>
-        <p:txBody>
-          <a:bodyPr wrap="square" lIns="36576" rIns="36576" tIns="18288" bIns="18288" anchor="ctr">
-            <a:spAutoFit/>
-          </a:bodyPr>
-          <a:lstStyle/>
-          <a:p>
-            <a:pPr algn="ctr">
-              <a:spcAft>
-                <a:spcPts val="200"/>
-              </a:spcAft>
-            </a:pPr>
-            <a:r>
-              <a:rPr sz="1200" b="0">
-                <a:solidFill>
-                  <a:srgbClr val="FFFFFF"/>
-                </a:solidFill>
-                <a:latin typeface="Microsoft YaHei"/>
-              </a:rPr>
-              <a:t>回答/引用</a:t>
-            </a:r>
-          </a:p>
-          <a:p>
-            <a:pPr algn="ctr">
-              <a:spcAft>
-                <a:spcPts val="200"/>
-              </a:spcAft>
-            </a:pPr>
-            <a:r>
-              <a:rPr sz="1200" b="0">
-                <a:solidFill>
-                  <a:srgbClr val="FFFFFF"/>
-                </a:solidFill>
-                <a:latin typeface="Microsoft YaHei"/>
-              </a:rPr>
-              <a:t>依据不足</a:t>
-            </a:r>
-          </a:p>
-        </p:txBody>
-      </p:sp>
-      <p:sp>
-        <p:nvSpPr>
-          <p:cNvPr id="30" name="Rounded Rectangle 29"/>
+          <a:bodyPr rtlCol="0" anchor="t" wrap="square" lIns="146304" rIns="146304" tIns="91440" bIns="73152"/>
+          <a:lstStyle/>
+          <a:p>
+            <a:pPr algn="l">
+              <a:spcAft>
+                <a:spcPts val="600"/>
+              </a:spcAft>
+            </a:pPr>
+            <a:r>
+              <a:rPr sz="1700" b="1">
+                <a:solidFill>
+                  <a:srgbClr val="163247"/>
+                </a:solidFill>
+                <a:latin typeface="Microsoft YaHei"/>
+              </a:rPr>
+              <a:t>④ 来源核对</a:t>
+            </a:r>
+          </a:p>
+          <a:p>
+            <a:pPr algn="l">
+              <a:spcAft>
+                <a:spcPts val="200"/>
+              </a:spcAft>
+            </a:pPr>
+            <a:r>
+              <a:rPr sz="1400">
+                <a:solidFill>
+                  <a:srgbClr val="263642"/>
+                </a:solidFill>
+                <a:latin typeface="Microsoft YaHei"/>
+              </a:rPr>
+              <a:t>引用摘录</a:t>
+            </a:r>
+          </a:p>
+          <a:p>
+            <a:pPr algn="l">
+              <a:spcAft>
+                <a:spcPts val="200"/>
+              </a:spcAft>
+            </a:pPr>
+            <a:r>
+              <a:rPr sz="1400">
+                <a:solidFill>
+                  <a:srgbClr val="263642"/>
+                </a:solidFill>
+                <a:latin typeface="Microsoft YaHei"/>
+              </a:rPr>
+              <a:t>打开原 PDF 页</a:t>
+            </a:r>
+          </a:p>
+        </p:txBody>
+      </p:sp>
+      <p:cxnSp>
+        <p:nvCxnSpPr>
+          <p:cNvPr id="14" name="Connector 13"/>
+          <p:cNvCxnSpPr/>
+          <p:nvPr/>
+        </p:nvCxnSpPr>
+        <p:spPr>
+          <a:xfrm>
+            <a:off x="9445752" y="2788920"/>
+            <a:ext cx="128016" cy="0"/>
+          </a:xfrm>
+          <a:prstGeom prst="line">
+            <a:avLst/>
+          </a:prstGeom>
+          <a:ln w="25400">
+            <a:solidFill>
+              <a:srgbClr val="D39A37"/>
+            </a:solidFill>
+          </a:ln>
+        </p:spPr>
+        <p:style>
+          <a:lnRef idx="2">
+            <a:schemeClr val="accent1"/>
+          </a:lnRef>
+          <a:fillRef idx="0">
+            <a:schemeClr val="accent1"/>
+          </a:fillRef>
+          <a:effectRef idx="1">
+            <a:schemeClr val="accent1"/>
+          </a:effectRef>
+          <a:fontRef idx="minor">
+            <a:schemeClr val="tx1"/>
+          </a:fontRef>
+        </p:style>
+      </p:cxnSp>
+      <p:sp>
+        <p:nvSpPr>
+          <p:cNvPr id="15" name="Rounded Rectangle 14"/>
           <p:cNvSpPr/>
           <p:nvPr/>
         </p:nvSpPr>
         <p:spPr>
           <a:xfrm>
-            <a:off x="713232" y="4160520"/>
-            <a:ext cx="10744200" cy="1078992"/>
+            <a:off x="9646920" y="1691640"/>
+            <a:ext cx="2057400" cy="2331720"/>
+          </a:xfrm>
+          <a:prstGeom prst="roundRect">
+            <a:avLst/>
+          </a:prstGeom>
+          <a:solidFill>
+            <a:srgbClr val="E4F1E9"/>
+          </a:solidFill>
+          <a:ln w="13970">
+            <a:solidFill>
+              <a:srgbClr val="26734E"/>
+            </a:solidFill>
+          </a:ln>
+        </p:spPr>
+        <p:style>
+          <a:lnRef idx="1">
+            <a:schemeClr val="accent1"/>
+          </a:lnRef>
+          <a:fillRef idx="3">
+            <a:schemeClr val="accent1"/>
+          </a:fillRef>
+          <a:effectRef idx="2">
+            <a:schemeClr val="accent1"/>
+          </a:effectRef>
+          <a:fontRef idx="minor">
+            <a:schemeClr val="lt1"/>
+          </a:fontRef>
+        </p:style>
+        <p:txBody>
+          <a:bodyPr rtlCol="0" anchor="t" wrap="square" lIns="146304" rIns="146304" tIns="91440" bIns="73152"/>
+          <a:lstStyle/>
+          <a:p>
+            <a:pPr algn="l">
+              <a:spcAft>
+                <a:spcPts val="600"/>
+              </a:spcAft>
+            </a:pPr>
+            <a:r>
+              <a:rPr sz="1700" b="1">
+                <a:solidFill>
+                  <a:srgbClr val="26734E"/>
+                </a:solidFill>
+                <a:latin typeface="Microsoft YaHei"/>
+              </a:rPr>
+              <a:t>⑤ 教学反馈</a:t>
+            </a:r>
+          </a:p>
+          <a:p>
+            <a:pPr algn="l">
+              <a:spcAft>
+                <a:spcPts val="200"/>
+              </a:spcAft>
+            </a:pPr>
+            <a:r>
+              <a:rPr sz="1400">
+                <a:solidFill>
+                  <a:srgbClr val="263642"/>
+                </a:solidFill>
+                <a:latin typeface="Microsoft YaHei"/>
+              </a:rPr>
+              <a:t>高频问句</a:t>
+            </a:r>
+          </a:p>
+          <a:p>
+            <a:pPr algn="l">
+              <a:spcAft>
+                <a:spcPts val="200"/>
+              </a:spcAft>
+            </a:pPr>
+            <a:r>
+              <a:rPr sz="1400">
+                <a:solidFill>
+                  <a:srgbClr val="263642"/>
+                </a:solidFill>
+                <a:latin typeface="Microsoft YaHei"/>
+              </a:rPr>
+              <a:t>依据不足线索</a:t>
+            </a:r>
+          </a:p>
+        </p:txBody>
+      </p:sp>
+      <p:sp>
+        <p:nvSpPr>
+          <p:cNvPr id="16" name="Rounded Rectangle 15"/>
+          <p:cNvSpPr/>
+          <p:nvPr/>
+        </p:nvSpPr>
+        <p:spPr>
+          <a:xfrm>
+            <a:off x="640080" y="4343400"/>
+            <a:ext cx="10881360" cy="1234440"/>
           </a:xfrm>
           <a:prstGeom prst="roundRect">
             <a:avLst/>
@@ -7319,14 +6784,14 @@
       </p:sp>
       <p:sp>
         <p:nvSpPr>
-          <p:cNvPr id="31" name="TextBox 30"/>
+          <p:cNvPr id="17" name="TextBox 16"/>
           <p:cNvSpPr txBox="1"/>
           <p:nvPr/>
         </p:nvSpPr>
         <p:spPr>
           <a:xfrm>
-            <a:off x="932688" y="4389120"/>
-            <a:ext cx="1170432" cy="310896"/>
+            <a:off x="868680" y="4526280"/>
+            <a:ext cx="1828800" cy="310896"/>
           </a:xfrm>
           <a:prstGeom prst="rect">
             <a:avLst/>
@@ -7351,21 +6816,21 @@
                 </a:solidFill>
                 <a:latin typeface="Microsoft YaHei"/>
               </a:rPr>
-              <a:t>应用层</a:t>
-            </a:r>
-          </a:p>
-        </p:txBody>
-      </p:sp>
-      <p:sp>
-        <p:nvSpPr>
-          <p:cNvPr id="32" name="TextBox 31"/>
+              <a:t>三角色分工</a:t>
+            </a:r>
+          </a:p>
+        </p:txBody>
+      </p:sp>
+      <p:sp>
+        <p:nvSpPr>
+          <p:cNvPr id="18" name="TextBox 17"/>
           <p:cNvSpPr txBox="1"/>
           <p:nvPr/>
         </p:nvSpPr>
         <p:spPr>
           <a:xfrm>
-            <a:off x="2121408" y="4315968"/>
-            <a:ext cx="9015984" cy="566928"/>
+            <a:off x="868680" y="4937760"/>
+            <a:ext cx="10332720" cy="411480"/>
           </a:xfrm>
           <a:prstGeom prst="rect">
             <a:avLst/>
@@ -7390,46 +6855,7 @@
                 </a:solidFill>
                 <a:latin typeface="Microsoft YaHei"/>
               </a:rPr>
-              <a:t>FastAPI + PostgreSQL/pgvector + Vue 3 · Cookie Session · admin / teacher / student 课程权限 · 上传、问答、原文件读取与教师基础反馈</a:t>
-            </a:r>
-          </a:p>
-        </p:txBody>
-      </p:sp>
-      <p:sp>
-        <p:nvSpPr>
-          <p:cNvPr id="33" name="TextBox 32"/>
-          <p:cNvSpPr txBox="1"/>
-          <p:nvPr/>
-        </p:nvSpPr>
-        <p:spPr>
-          <a:xfrm>
-            <a:off x="777240" y="5577840"/>
-            <a:ext cx="10607040" cy="329184"/>
-          </a:xfrm>
-          <a:prstGeom prst="rect">
-            <a:avLst/>
-          </a:prstGeom>
-          <a:noFill/>
-        </p:spPr>
-        <p:txBody>
-          <a:bodyPr wrap="square" lIns="36576" rIns="36576" tIns="18288" bIns="18288" anchor="ctr">
-            <a:spAutoFit/>
-          </a:bodyPr>
-          <a:lstStyle/>
-          <a:p>
-            <a:pPr algn="ctr">
-              <a:spcAft>
-                <a:spcPts val="200"/>
-              </a:spcAft>
-            </a:pPr>
-            <a:r>
-              <a:rPr sz="1700" b="0">
-                <a:solidFill>
-                  <a:srgbClr val="61727D"/>
-                </a:solidFill>
-                <a:latin typeface="Microsoft YaHei"/>
-              </a:rPr>
-              <a:t>模型输出只作为候选证据；权限、来源映射、生命周期和失败状态由应用层控制。</a:t>
+              <a:t>管理员：账号与课程、成员授权　｜　教师：本课资料状态与基础反馈　｜　学生：我的课程 → 提问 → 查看引用 → 回原页</a:t>
             </a:r>
           </a:p>
         </p:txBody>
@@ -7494,7 +6920,7 @@
                 </a:solidFill>
                 <a:latin typeface="Microsoft YaHei"/>
               </a:rPr>
-              <a:t>产品闭环：三角色与可核对引用</a:t>
+              <a:t>三项技术特色</a:t>
             </a:r>
           </a:p>
         </p:txBody>
@@ -7533,7 +6959,7 @@
                 </a:solidFill>
                 <a:latin typeface="Microsoft YaHei"/>
               </a:rPr>
-              <a:t>验收重点不是页面数量，而是从课程授权到原文核对的闭环</a:t>
+              <a:t>开题方案研究重点：资料可追溯、检索可对照、回答可核对（开源复用，不自造平台）</a:t>
             </a:r>
           </a:p>
         </p:txBody>
@@ -7592,7 +7018,7 @@
         <p:spPr>
           <a:xfrm>
             <a:off x="566928" y="6510528"/>
-            <a:ext cx="7315200" cy="182880"/>
+            <a:ext cx="8686800" cy="182880"/>
           </a:xfrm>
           <a:prstGeom prst="rect">
             <a:avLst/>
@@ -7617,7 +7043,7 @@
                 </a:solidFill>
                 <a:latin typeface="Microsoft YaHei"/>
               </a:rPr>
-              <a:t>高校课程知识库智能问答 · 中期进展</a:t>
+              <a:t>高校课程知识库智能问答 · 中期进展（参考稿）</a:t>
             </a:r>
           </a:p>
         </p:txBody>
@@ -7669,8 +7095,146 @@
         </p:nvSpPr>
         <p:spPr>
           <a:xfrm>
-            <a:off x="685800" y="1755648"/>
-            <a:ext cx="3401568" cy="2240280"/>
+            <a:off x="640080" y="1645920"/>
+            <a:ext cx="3520440" cy="3840480"/>
+          </a:xfrm>
+          <a:prstGeom prst="roundRect">
+            <a:avLst/>
+          </a:prstGeom>
+          <a:solidFill>
+            <a:srgbClr val="E4F2F0"/>
+          </a:solidFill>
+          <a:ln w="13970">
+            <a:solidFill>
+              <a:srgbClr val="247D78"/>
+            </a:solidFill>
+          </a:ln>
+        </p:spPr>
+        <p:style>
+          <a:lnRef idx="1">
+            <a:schemeClr val="accent1"/>
+          </a:lnRef>
+          <a:fillRef idx="3">
+            <a:schemeClr val="accent1"/>
+          </a:fillRef>
+          <a:effectRef idx="2">
+            <a:schemeClr val="accent1"/>
+          </a:effectRef>
+          <a:fontRef idx="minor">
+            <a:schemeClr val="lt1"/>
+          </a:fontRef>
+        </p:style>
+        <p:txBody>
+          <a:bodyPr rtlCol="0" anchor="t" wrap="square" lIns="146304" rIns="146304" tIns="91440" bIns="73152"/>
+          <a:lstStyle/>
+          <a:p>
+            <a:pPr algn="l">
+              <a:spcAft>
+                <a:spcPts val="600"/>
+              </a:spcAft>
+            </a:pPr>
+            <a:r>
+              <a:rPr sz="1800" b="1">
+                <a:solidFill>
+                  <a:srgbClr val="247D78"/>
+                </a:solidFill>
+                <a:latin typeface="Microsoft YaHei"/>
+              </a:rPr>
+              <a:t>① 可追溯的资料组织</a:t>
+            </a:r>
+          </a:p>
+          <a:p>
+            <a:pPr algn="l">
+              <a:spcAft>
+                <a:spcPts val="200"/>
+              </a:spcAft>
+            </a:pPr>
+            <a:r>
+              <a:rPr sz="1500">
+                <a:solidFill>
+                  <a:srgbClr val="263642"/>
+                </a:solidFill>
+                <a:latin typeface="Microsoft YaHei"/>
+              </a:rPr>
+              <a:t>PyMuPDF 原生文字提取</a:t>
+            </a:r>
+          </a:p>
+          <a:p>
+            <a:pPr algn="l">
+              <a:spcAft>
+                <a:spcPts val="200"/>
+              </a:spcAft>
+            </a:pPr>
+            <a:r>
+              <a:rPr sz="1500">
+                <a:solidFill>
+                  <a:srgbClr val="263642"/>
+                </a:solidFill>
+                <a:latin typeface="Microsoft YaHei"/>
+              </a:rPr>
+              <a:t>保留页码与逐页质量记录</a:t>
+            </a:r>
+          </a:p>
+          <a:p>
+            <a:pPr algn="l">
+              <a:spcAft>
+                <a:spcPts val="200"/>
+              </a:spcAft>
+            </a:pPr>
+            <a:r>
+              <a:rPr sz="1500">
+                <a:solidFill>
+                  <a:srgbClr val="263642"/>
+                </a:solidFill>
+                <a:latin typeface="Microsoft YaHei"/>
+              </a:rPr>
+              <a:t>空页 / 稀疏页 / 异常可登记</a:t>
+            </a:r>
+          </a:p>
+          <a:p>
+            <a:pPr algn="l">
+              <a:spcAft>
+                <a:spcPts val="200"/>
+              </a:spcAft>
+            </a:pPr>
+            <a:r>
+              <a:rPr sz="1500">
+                <a:solidFill>
+                  <a:srgbClr val="263642"/>
+                </a:solidFill>
+                <a:latin typeface="Microsoft YaHei"/>
+              </a:rPr>
+              <a:t>资料哈希、切分与索引版本可解释</a:t>
+            </a:r>
+          </a:p>
+          <a:p>
+            <a:pPr algn="l">
+              <a:spcAft>
+                <a:spcPts val="200"/>
+              </a:spcAft>
+            </a:pPr>
+            <a:r>
+              <a:rPr sz="1500">
+                <a:solidFill>
+                  <a:srgbClr val="263642"/>
+                </a:solidFill>
+                <a:latin typeface="Microsoft YaHei"/>
+              </a:rPr>
+              <a:t>Markdown / Chunk 是派生视图</a:t>
+            </a:r>
+          </a:p>
+        </p:txBody>
+      </p:sp>
+      <p:sp>
+        <p:nvSpPr>
+          <p:cNvPr id="8" name="Rounded Rectangle 7"/>
+          <p:cNvSpPr/>
+          <p:nvPr/>
+        </p:nvSpPr>
+        <p:spPr>
+          <a:xfrm>
+            <a:off x="4343400" y="1645920"/>
+            <a:ext cx="3520440" cy="3840480"/>
           </a:xfrm>
           <a:prstGeom prst="roundRect">
             <a:avLst/>
@@ -7699,7 +7263,7 @@
           </a:fontRef>
         </p:style>
         <p:txBody>
-          <a:bodyPr rtlCol="0" anchor="ctr" wrap="square" lIns="146304" rIns="146304" tIns="91440" bIns="73152"/>
+          <a:bodyPr rtlCol="0" anchor="t" wrap="square" lIns="146304" rIns="146304" tIns="91440" bIns="73152"/>
           <a:lstStyle/>
           <a:p>
             <a:pPr algn="l">
@@ -7708,85 +7272,117 @@
               </a:spcAft>
             </a:pPr>
             <a:r>
-              <a:rPr sz="2000" b="1">
-                <a:solidFill>
-                  <a:srgbClr val="247D78"/>
-                </a:solidFill>
-                <a:latin typeface="Microsoft YaHei"/>
-              </a:rPr>
-              <a:t>管理员</a:t>
-            </a:r>
-          </a:p>
-          <a:p>
-            <a:pPr algn="l">
-              <a:spcAft>
-                <a:spcPts val="200"/>
-              </a:spcAft>
-            </a:pPr>
-            <a:r>
-              <a:rPr sz="1700">
+              <a:rPr sz="1800" b="1">
+                <a:solidFill>
+                  <a:srgbClr val="D39A37"/>
+                </a:solidFill>
+                <a:latin typeface="Microsoft YaHei"/>
+              </a:rPr>
+              <a:t>② 课程内检索（可对照）</a:t>
+            </a:r>
+          </a:p>
+          <a:p>
+            <a:pPr algn="l">
+              <a:spcAft>
+                <a:spcPts val="200"/>
+              </a:spcAft>
+            </a:pPr>
+            <a:r>
+              <a:rPr sz="1500">
                 <a:solidFill>
                   <a:srgbClr val="263642"/>
                 </a:solidFill>
                 <a:latin typeface="Microsoft YaHei"/>
               </a:rPr>
-              <a:t>账号与课程管理</a:t>
-            </a:r>
-          </a:p>
-          <a:p>
-            <a:pPr algn="l">
-              <a:spcAft>
-                <a:spcPts val="200"/>
-              </a:spcAft>
-            </a:pPr>
-            <a:r>
-              <a:rPr sz="1700">
+              <a:t>中期演示默认：Dense</a:t>
+            </a:r>
+          </a:p>
+          <a:p>
+            <a:pPr algn="l">
+              <a:spcAft>
+                <a:spcPts val="200"/>
+              </a:spcAft>
+            </a:pPr>
+            <a:r>
+              <a:rPr sz="1500">
                 <a:solidFill>
                   <a:srgbClr val="263642"/>
                 </a:solidFill>
                 <a:latin typeface="Microsoft YaHei"/>
               </a:rPr>
-              <a:t>课程成员授权</a:t>
-            </a:r>
-          </a:p>
-          <a:p>
-            <a:pPr algn="l">
-              <a:spcAft>
-                <a:spcPts val="200"/>
-              </a:spcAft>
-            </a:pPr>
-            <a:r>
-              <a:rPr sz="1700">
+              <a:t>Hybrid / BM25 / rerank</a:t>
+            </a:r>
+          </a:p>
+          <a:p>
+            <a:pPr algn="l">
+              <a:spcAft>
+                <a:spcPts val="200"/>
+              </a:spcAft>
+            </a:pPr>
+            <a:r>
+              <a:rPr sz="1500">
                 <a:solidFill>
                   <a:srgbClr val="263642"/>
                 </a:solidFill>
                 <a:latin typeface="Microsoft YaHei"/>
               </a:rPr>
-              <a:t>管理入口按角色显示</a:t>
-            </a:r>
-          </a:p>
-        </p:txBody>
-      </p:sp>
-      <p:sp>
-        <p:nvSpPr>
-          <p:cNvPr id="8" name="Rounded Rectangle 7"/>
+              <a:t>已实现、可开关</a:t>
+            </a:r>
+          </a:p>
+          <a:p>
+            <a:pPr algn="l">
+              <a:spcAft>
+                <a:spcPts val="200"/>
+              </a:spcAft>
+            </a:pPr>
+            <a:r>
+              <a:rPr sz="1500">
+                <a:solidFill>
+                  <a:srgbClr val="263642"/>
+                </a:solidFill>
+                <a:latin typeface="Microsoft YaHei"/>
+              </a:rPr>
+              <a:t>不作中期主结论</a:t>
+            </a:r>
+          </a:p>
+          <a:p>
+            <a:pPr algn="l">
+              <a:spcAft>
+                <a:spcPts val="200"/>
+              </a:spcAft>
+            </a:pPr>
+            <a:r>
+              <a:rPr sz="1500">
+                <a:solidFill>
+                  <a:srgbClr val="263642"/>
+                </a:solidFill>
+                <a:latin typeface="Microsoft YaHei"/>
+              </a:rPr>
+              <a:t>权限贯穿候选与缓存</a:t>
+            </a:r>
+          </a:p>
+        </p:txBody>
+      </p:sp>
+      <p:sp>
+        <p:nvSpPr>
+          <p:cNvPr id="9" name="Rounded Rectangle 8"/>
           <p:cNvSpPr/>
           <p:nvPr/>
         </p:nvSpPr>
         <p:spPr>
           <a:xfrm>
-            <a:off x="4407408" y="1755648"/>
-            <a:ext cx="3401568" cy="2240280"/>
+            <a:off x="8046720" y="1645920"/>
+            <a:ext cx="3520440" cy="3840480"/>
           </a:xfrm>
           <a:prstGeom prst="roundRect">
             <a:avLst/>
           </a:prstGeom>
           <a:solidFill>
-            <a:srgbClr val="FFFFFF"/>
+            <a:srgbClr val="FBF0D8"/>
           </a:solidFill>
           <a:ln w="13970">
             <a:solidFill>
-              <a:srgbClr val="D6E0E5"/>
+              <a:srgbClr val="D39A37"/>
             </a:solidFill>
           </a:ln>
         </p:spPr>
@@ -7805,7 +7401,7 @@
           </a:fontRef>
         </p:style>
         <p:txBody>
-          <a:bodyPr rtlCol="0" anchor="ctr" wrap="square" lIns="146304" rIns="146304" tIns="91440" bIns="73152"/>
+          <a:bodyPr rtlCol="0" anchor="t" wrap="square" lIns="146304" rIns="146304" tIns="91440" bIns="73152"/>
           <a:lstStyle/>
           <a:p>
             <a:pPr algn="l">
@@ -7814,329 +7410,77 @@
               </a:spcAft>
             </a:pPr>
             <a:r>
-              <a:rPr sz="2000" b="1">
+              <a:rPr sz="1800" b="1">
                 <a:solidFill>
                   <a:srgbClr val="D39A37"/>
                 </a:solidFill>
                 <a:latin typeface="Microsoft YaHei"/>
               </a:rPr>
-              <a:t>教师</a:t>
-            </a:r>
-          </a:p>
-          <a:p>
-            <a:pPr algn="l">
-              <a:spcAft>
-                <a:spcPts val="200"/>
-              </a:spcAft>
-            </a:pPr>
-            <a:r>
-              <a:rPr sz="1700">
+              <a:t>③ 可核对的证据回答</a:t>
+            </a:r>
+          </a:p>
+          <a:p>
+            <a:pPr algn="l">
+              <a:spcAft>
+                <a:spcPts val="200"/>
+              </a:spcAft>
+            </a:pPr>
+            <a:r>
+              <a:rPr sz="1500">
                 <a:solidFill>
                   <a:srgbClr val="263642"/>
                 </a:solidFill>
                 <a:latin typeface="Microsoft YaHei"/>
               </a:rPr>
-              <a:t>查看本课资料与入库状态</a:t>
-            </a:r>
-          </a:p>
-          <a:p>
-            <a:pPr algn="l">
-              <a:spcAft>
-                <a:spcPts val="200"/>
-              </a:spcAft>
-            </a:pPr>
-            <a:r>
-              <a:rPr sz="1700">
+              <a:t>只引用实际送入上下文的来源</a:t>
+            </a:r>
+          </a:p>
+          <a:p>
+            <a:pPr algn="l">
+              <a:spcAft>
+                <a:spcPts val="200"/>
+              </a:spcAft>
+            </a:pPr>
+            <a:r>
+              <a:rPr sz="1500">
                 <a:solidFill>
                   <a:srgbClr val="263642"/>
                 </a:solidFill>
                 <a:latin typeface="Microsoft YaHei"/>
               </a:rPr>
-              <a:t>覆盖不完整时显示警告</a:t>
-            </a:r>
-          </a:p>
-          <a:p>
-            <a:pPr algn="l">
-              <a:spcAft>
-                <a:spcPts val="200"/>
-              </a:spcAft>
-            </a:pPr>
-            <a:r>
-              <a:rPr sz="1700">
+              <a:t>区分有据回答 / 依据不足 / 失败</a:t>
+            </a:r>
+          </a:p>
+          <a:p>
+            <a:pPr algn="l">
+              <a:spcAft>
+                <a:spcPts val="200"/>
+              </a:spcAft>
+            </a:pPr>
+            <a:r>
+              <a:rPr sz="1500">
                 <a:solidFill>
                   <a:srgbClr val="263642"/>
                 </a:solidFill>
                 <a:latin typeface="Microsoft YaHei"/>
               </a:rPr>
-              <a:t>查看基础问题反馈</a:t>
-            </a:r>
-          </a:p>
-        </p:txBody>
-      </p:sp>
-      <p:sp>
-        <p:nvSpPr>
-          <p:cNvPr id="9" name="Rounded Rectangle 8"/>
-          <p:cNvSpPr/>
-          <p:nvPr/>
-        </p:nvSpPr>
-        <p:spPr>
-          <a:xfrm>
-            <a:off x="8129016" y="1755648"/>
-            <a:ext cx="3401568" cy="2240280"/>
-          </a:xfrm>
-          <a:prstGeom prst="roundRect">
-            <a:avLst/>
-          </a:prstGeom>
-          <a:solidFill>
-            <a:srgbClr val="FFFFFF"/>
-          </a:solidFill>
-          <a:ln w="13970">
-            <a:solidFill>
-              <a:srgbClr val="D6E0E5"/>
-            </a:solidFill>
-          </a:ln>
-        </p:spPr>
-        <p:style>
-          <a:lnRef idx="1">
-            <a:schemeClr val="accent1"/>
-          </a:lnRef>
-          <a:fillRef idx="3">
-            <a:schemeClr val="accent1"/>
-          </a:fillRef>
-          <a:effectRef idx="2">
-            <a:schemeClr val="accent1"/>
-          </a:effectRef>
-          <a:fontRef idx="minor">
-            <a:schemeClr val="lt1"/>
-          </a:fontRef>
-        </p:style>
-        <p:txBody>
-          <a:bodyPr rtlCol="0" anchor="ctr" wrap="square" lIns="146304" rIns="146304" tIns="91440" bIns="73152"/>
-          <a:lstStyle/>
-          <a:p>
-            <a:pPr algn="l">
-              <a:spcAft>
-                <a:spcPts val="600"/>
-              </a:spcAft>
-            </a:pPr>
-            <a:r>
-              <a:rPr sz="2000" b="1">
-                <a:solidFill>
-                  <a:srgbClr val="26734E"/>
-                </a:solidFill>
-                <a:latin typeface="Microsoft YaHei"/>
-              </a:rPr>
-              <a:t>学生</a:t>
-            </a:r>
-          </a:p>
-          <a:p>
-            <a:pPr algn="l">
-              <a:spcAft>
-                <a:spcPts val="200"/>
-              </a:spcAft>
-            </a:pPr>
-            <a:r>
-              <a:rPr sz="1700">
+              <a:t>学生可打开原 PDF #page=</a:t>
+            </a:r>
+          </a:p>
+          <a:p>
+            <a:pPr algn="l">
+              <a:spcAft>
+                <a:spcPts val="200"/>
+              </a:spcAft>
+            </a:pPr>
+            <a:r>
+              <a:rPr sz="1500">
                 <a:solidFill>
                   <a:srgbClr val="263642"/>
                 </a:solidFill>
                 <a:latin typeface="Microsoft YaHei"/>
               </a:rPr>
-              <a:t>我的课程 → 提问 → 查看引用</a:t>
-            </a:r>
-          </a:p>
-          <a:p>
-            <a:pPr algn="l">
-              <a:spcAft>
-                <a:spcPts val="200"/>
-              </a:spcAft>
-            </a:pPr>
-            <a:r>
-              <a:rPr sz="1700">
-                <a:solidFill>
-                  <a:srgbClr val="263642"/>
-                </a:solidFill>
-                <a:latin typeface="Microsoft YaHei"/>
-              </a:rPr>
-              <a:t>打开原 PDF 页码</a:t>
-            </a:r>
-          </a:p>
-          <a:p>
-            <a:pPr algn="l">
-              <a:spcAft>
-                <a:spcPts val="200"/>
-              </a:spcAft>
-            </a:pPr>
-            <a:r>
-              <a:rPr sz="1700">
-                <a:solidFill>
-                  <a:srgbClr val="263642"/>
-                </a:solidFill>
-                <a:latin typeface="Microsoft YaHei"/>
-              </a:rPr>
-              <a:t>依据不足与系统失败分开</a:t>
-            </a:r>
-          </a:p>
-        </p:txBody>
-      </p:sp>
-      <p:sp>
-        <p:nvSpPr>
-          <p:cNvPr id="10" name="Rounded Rectangle 9"/>
-          <p:cNvSpPr/>
-          <p:nvPr/>
-        </p:nvSpPr>
-        <p:spPr>
-          <a:xfrm>
-            <a:off x="713232" y="4407408"/>
-            <a:ext cx="10789920" cy="1051560"/>
-          </a:xfrm>
-          <a:prstGeom prst="roundRect">
-            <a:avLst/>
-          </a:prstGeom>
-          <a:solidFill>
-            <a:srgbClr val="E4F2F0"/>
-          </a:solidFill>
-          <a:ln w="13970">
-            <a:solidFill>
-              <a:srgbClr val="E4F2F0"/>
-            </a:solidFill>
-          </a:ln>
-        </p:spPr>
-        <p:style>
-          <a:lnRef idx="1">
-            <a:schemeClr val="accent1"/>
-          </a:lnRef>
-          <a:fillRef idx="3">
-            <a:schemeClr val="accent1"/>
-          </a:fillRef>
-          <a:effectRef idx="2">
-            <a:schemeClr val="accent1"/>
-          </a:effectRef>
-          <a:fontRef idx="minor">
-            <a:schemeClr val="lt1"/>
-          </a:fontRef>
-        </p:style>
-        <p:txBody>
-          <a:bodyPr rtlCol="0" anchor="ctr"/>
-          <a:lstStyle/>
-          <a:p>
-            <a:pPr algn="ctr"/>
-          </a:p>
-        </p:txBody>
-      </p:sp>
-      <p:sp>
-        <p:nvSpPr>
-          <p:cNvPr id="11" name="TextBox 10"/>
-          <p:cNvSpPr txBox="1"/>
-          <p:nvPr/>
-        </p:nvSpPr>
-        <p:spPr>
-          <a:xfrm>
-            <a:off x="932688" y="4645152"/>
-            <a:ext cx="1572768" cy="320040"/>
-          </a:xfrm>
-          <a:prstGeom prst="rect">
-            <a:avLst/>
-          </a:prstGeom>
-          <a:noFill/>
-        </p:spPr>
-        <p:txBody>
-          <a:bodyPr wrap="square" lIns="36576" rIns="36576" tIns="18288" bIns="18288" anchor="ctr">
-            <a:spAutoFit/>
-          </a:bodyPr>
-          <a:lstStyle/>
-          <a:p>
-            <a:pPr algn="l">
-              <a:spcAft>
-                <a:spcPts val="200"/>
-              </a:spcAft>
-            </a:pPr>
-            <a:r>
-              <a:rPr sz="1800" b="1">
-                <a:solidFill>
-                  <a:srgbClr val="247D78"/>
-                </a:solidFill>
-                <a:latin typeface="Microsoft YaHei"/>
-              </a:rPr>
-              <a:t>可靠性细节</a:t>
-            </a:r>
-          </a:p>
-        </p:txBody>
-      </p:sp>
-      <p:sp>
-        <p:nvSpPr>
-          <p:cNvPr id="12" name="TextBox 11"/>
-          <p:cNvSpPr txBox="1"/>
-          <p:nvPr/>
-        </p:nvSpPr>
-        <p:spPr>
-          <a:xfrm>
-            <a:off x="2596896" y="4572000"/>
-            <a:ext cx="8412480" cy="475488"/>
-          </a:xfrm>
-          <a:prstGeom prst="rect">
-            <a:avLst/>
-          </a:prstGeom>
-          <a:noFill/>
-        </p:spPr>
-        <p:txBody>
-          <a:bodyPr wrap="square" lIns="36576" rIns="36576" tIns="18288" bIns="18288" anchor="ctr">
-            <a:spAutoFit/>
-          </a:bodyPr>
-          <a:lstStyle/>
-          <a:p>
-            <a:pPr algn="l">
-              <a:spcAft>
-                <a:spcPts val="200"/>
-              </a:spcAft>
-            </a:pPr>
-            <a:r>
-              <a:rPr sz="1700" b="0">
-                <a:solidFill>
-                  <a:srgbClr val="163247"/>
-                </a:solidFill>
-                <a:latin typeface="Microsoft YaHei"/>
-              </a:rPr>
-              <a:t>失败后“重试本次问题”发送已提交问句快照；编辑后续草稿不会悄悄改写正在重试的问题。</a:t>
-            </a:r>
-          </a:p>
-        </p:txBody>
-      </p:sp>
-      <p:sp>
-        <p:nvSpPr>
-          <p:cNvPr id="13" name="TextBox 12"/>
-          <p:cNvSpPr txBox="1"/>
-          <p:nvPr/>
-        </p:nvSpPr>
-        <p:spPr>
-          <a:xfrm>
-            <a:off x="822960" y="5760720"/>
-            <a:ext cx="10515600" cy="292608"/>
-          </a:xfrm>
-          <a:prstGeom prst="rect">
-            <a:avLst/>
-          </a:prstGeom>
-          <a:noFill/>
-        </p:spPr>
-        <p:txBody>
-          <a:bodyPr wrap="square" lIns="36576" rIns="36576" tIns="18288" bIns="18288" anchor="ctr">
-            <a:spAutoFit/>
-          </a:bodyPr>
-          <a:lstStyle/>
-          <a:p>
-            <a:pPr algn="ctr">
-              <a:spcAft>
-                <a:spcPts val="200"/>
-              </a:spcAft>
-            </a:pPr>
-            <a:r>
-              <a:rPr sz="1600" b="0">
-                <a:solidFill>
-                  <a:srgbClr val="61727D"/>
-                </a:solidFill>
-                <a:latin typeface="Microsoft YaHei"/>
-              </a:rPr>
-              <a:t>权限拒绝、资料外问题与服务异常属于不同结果，不统一伪装成“没有答案”。</a:t>
+              <a:t>合法引用 ≠ 事实主张被支持</a:t>
             </a:r>
           </a:p>
         </p:txBody>
@@ -8201,7 +7545,7 @@
                 </a:solidFill>
                 <a:latin typeface="Microsoft YaHei"/>
               </a:rPr>
-              <a:t>数据准备与解析路线</a:t>
+              <a:t>系统链路与技术栈</a:t>
             </a:r>
           </a:p>
         </p:txBody>
@@ -8240,7 +7584,7 @@
                 </a:solidFill>
                 <a:latin typeface="Microsoft YaHei"/>
               </a:rPr>
-              <a:t>停止不可接受的重型解析路线，用轻量文本提取和页级质量门禁建立可复现基线</a:t>
+              <a:t>复用成熟组件；本地实现课程边界、来源映射与失败状态</a:t>
             </a:r>
           </a:p>
         </p:txBody>
@@ -8299,7 +7643,7 @@
         <p:spPr>
           <a:xfrm>
             <a:off x="566928" y="6510528"/>
-            <a:ext cx="7315200" cy="182880"/>
+            <a:ext cx="8686800" cy="182880"/>
           </a:xfrm>
           <a:prstGeom prst="rect">
             <a:avLst/>
@@ -8324,7 +7668,7 @@
                 </a:solidFill>
                 <a:latin typeface="Microsoft YaHei"/>
               </a:rPr>
-              <a:t>高校课程知识库智能问答 · 中期进展</a:t>
+              <a:t>高校课程知识库智能问答 · 中期进展（参考稿）</a:t>
             </a:r>
           </a:p>
         </p:txBody>
@@ -8376,8 +7720,1017 @@
         </p:nvSpPr>
         <p:spPr>
           <a:xfrm>
-            <a:off x="713232" y="1700784"/>
-            <a:ext cx="2395728" cy="1024128"/>
+            <a:off x="502920" y="1691640"/>
+            <a:ext cx="1691640" cy="1417320"/>
+          </a:xfrm>
+          <a:prstGeom prst="roundRect">
+            <a:avLst/>
+          </a:prstGeom>
+          <a:solidFill>
+            <a:srgbClr val="E4F2F0"/>
+          </a:solidFill>
+          <a:ln w="13970">
+            <a:solidFill>
+              <a:srgbClr val="247D78"/>
+            </a:solidFill>
+          </a:ln>
+        </p:spPr>
+        <p:style>
+          <a:lnRef idx="1">
+            <a:schemeClr val="accent1"/>
+          </a:lnRef>
+          <a:fillRef idx="3">
+            <a:schemeClr val="accent1"/>
+          </a:fillRef>
+          <a:effectRef idx="2">
+            <a:schemeClr val="accent1"/>
+          </a:effectRef>
+          <a:fontRef idx="minor">
+            <a:schemeClr val="lt1"/>
+          </a:fontRef>
+        </p:style>
+        <p:txBody>
+          <a:bodyPr rtlCol="0" anchor="ctr"/>
+          <a:lstStyle/>
+          <a:p>
+            <a:pPr algn="ctr"/>
+          </a:p>
+        </p:txBody>
+      </p:sp>
+      <p:sp>
+        <p:nvSpPr>
+          <p:cNvPr id="8" name="TextBox 7"/>
+          <p:cNvSpPr txBox="1"/>
+          <p:nvPr/>
+        </p:nvSpPr>
+        <p:spPr>
+          <a:xfrm>
+            <a:off x="576072" y="1828800"/>
+            <a:ext cx="1554480" cy="347472"/>
+          </a:xfrm>
+          <a:prstGeom prst="rect">
+            <a:avLst/>
+          </a:prstGeom>
+          <a:noFill/>
+        </p:spPr>
+        <p:txBody>
+          <a:bodyPr wrap="square" lIns="36576" rIns="36576" tIns="18288" bIns="18288" anchor="ctr">
+            <a:spAutoFit/>
+          </a:bodyPr>
+          <a:lstStyle/>
+          <a:p>
+            <a:pPr algn="ctr">
+              <a:spcAft>
+                <a:spcPts val="200"/>
+              </a:spcAft>
+            </a:pPr>
+            <a:r>
+              <a:rPr sz="1500" b="1">
+                <a:solidFill>
+                  <a:srgbClr val="163247"/>
+                </a:solidFill>
+                <a:latin typeface="Microsoft YaHei"/>
+              </a:rPr>
+              <a:t>课程 PDF</a:t>
+            </a:r>
+          </a:p>
+        </p:txBody>
+      </p:sp>
+      <p:sp>
+        <p:nvSpPr>
+          <p:cNvPr id="9" name="TextBox 8"/>
+          <p:cNvSpPr txBox="1"/>
+          <p:nvPr/>
+        </p:nvSpPr>
+        <p:spPr>
+          <a:xfrm>
+            <a:off x="576072" y="2240280"/>
+            <a:ext cx="1554480" cy="640080"/>
+          </a:xfrm>
+          <a:prstGeom prst="rect">
+            <a:avLst/>
+          </a:prstGeom>
+          <a:noFill/>
+        </p:spPr>
+        <p:txBody>
+          <a:bodyPr wrap="square" lIns="36576" rIns="36576" tIns="18288" bIns="18288" anchor="ctr">
+            <a:spAutoFit/>
+          </a:bodyPr>
+          <a:lstStyle/>
+          <a:p>
+            <a:pPr algn="ctr">
+              <a:spcAft>
+                <a:spcPts val="200"/>
+              </a:spcAft>
+            </a:pPr>
+            <a:r>
+              <a:rPr sz="1200" b="0">
+                <a:solidFill>
+                  <a:srgbClr val="61727D"/>
+                </a:solidFill>
+                <a:latin typeface="Microsoft YaHei"/>
+              </a:rPr>
+              <a:t>原始文件</a:t>
+            </a:r>
+          </a:p>
+          <a:p>
+            <a:pPr algn="ctr">
+              <a:spcAft>
+                <a:spcPts val="200"/>
+              </a:spcAft>
+            </a:pPr>
+            <a:r>
+              <a:rPr sz="1200" b="0">
+                <a:solidFill>
+                  <a:srgbClr val="61727D"/>
+                </a:solidFill>
+                <a:latin typeface="Microsoft YaHei"/>
+              </a:rPr>
+              <a:t>课程隔离</a:t>
+            </a:r>
+          </a:p>
+        </p:txBody>
+      </p:sp>
+      <p:cxnSp>
+        <p:nvCxnSpPr>
+          <p:cNvPr id="10" name="Connector 9"/>
+          <p:cNvCxnSpPr/>
+          <p:nvPr/>
+        </p:nvCxnSpPr>
+        <p:spPr>
+          <a:xfrm>
+            <a:off x="2221991" y="2377440"/>
+            <a:ext cx="201169" cy="0"/>
+          </a:xfrm>
+          <a:prstGeom prst="line">
+            <a:avLst/>
+          </a:prstGeom>
+          <a:ln w="22860">
+            <a:solidFill>
+              <a:srgbClr val="247D78"/>
+            </a:solidFill>
+          </a:ln>
+        </p:spPr>
+        <p:style>
+          <a:lnRef idx="2">
+            <a:schemeClr val="accent1"/>
+          </a:lnRef>
+          <a:fillRef idx="0">
+            <a:schemeClr val="accent1"/>
+          </a:fillRef>
+          <a:effectRef idx="1">
+            <a:schemeClr val="accent1"/>
+          </a:effectRef>
+          <a:fontRef idx="minor">
+            <a:schemeClr val="tx1"/>
+          </a:fontRef>
+        </p:style>
+      </p:cxnSp>
+      <p:sp>
+        <p:nvSpPr>
+          <p:cNvPr id="11" name="Rounded Rectangle 10"/>
+          <p:cNvSpPr/>
+          <p:nvPr/>
+        </p:nvSpPr>
+        <p:spPr>
+          <a:xfrm>
+            <a:off x="2468880" y="1691640"/>
+            <a:ext cx="1691640" cy="1417320"/>
+          </a:xfrm>
+          <a:prstGeom prst="roundRect">
+            <a:avLst/>
+          </a:prstGeom>
+          <a:solidFill>
+            <a:srgbClr val="FFFFFF"/>
+          </a:solidFill>
+          <a:ln w="13970">
+            <a:solidFill>
+              <a:srgbClr val="247D78"/>
+            </a:solidFill>
+          </a:ln>
+        </p:spPr>
+        <p:style>
+          <a:lnRef idx="1">
+            <a:schemeClr val="accent1"/>
+          </a:lnRef>
+          <a:fillRef idx="3">
+            <a:schemeClr val="accent1"/>
+          </a:fillRef>
+          <a:effectRef idx="2">
+            <a:schemeClr val="accent1"/>
+          </a:effectRef>
+          <a:fontRef idx="minor">
+            <a:schemeClr val="lt1"/>
+          </a:fontRef>
+        </p:style>
+        <p:txBody>
+          <a:bodyPr rtlCol="0" anchor="ctr"/>
+          <a:lstStyle/>
+          <a:p>
+            <a:pPr algn="ctr"/>
+          </a:p>
+        </p:txBody>
+      </p:sp>
+      <p:sp>
+        <p:nvSpPr>
+          <p:cNvPr id="12" name="TextBox 11"/>
+          <p:cNvSpPr txBox="1"/>
+          <p:nvPr/>
+        </p:nvSpPr>
+        <p:spPr>
+          <a:xfrm>
+            <a:off x="2542032" y="1828800"/>
+            <a:ext cx="1554480" cy="347472"/>
+          </a:xfrm>
+          <a:prstGeom prst="rect">
+            <a:avLst/>
+          </a:prstGeom>
+          <a:noFill/>
+        </p:spPr>
+        <p:txBody>
+          <a:bodyPr wrap="square" lIns="36576" rIns="36576" tIns="18288" bIns="18288" anchor="ctr">
+            <a:spAutoFit/>
+          </a:bodyPr>
+          <a:lstStyle/>
+          <a:p>
+            <a:pPr algn="ctr">
+              <a:spcAft>
+                <a:spcPts val="200"/>
+              </a:spcAft>
+            </a:pPr>
+            <a:r>
+              <a:rPr sz="1500" b="1">
+                <a:solidFill>
+                  <a:srgbClr val="163247"/>
+                </a:solidFill>
+                <a:latin typeface="Microsoft YaHei"/>
+              </a:rPr>
+              <a:t>解析质检</a:t>
+            </a:r>
+          </a:p>
+        </p:txBody>
+      </p:sp>
+      <p:sp>
+        <p:nvSpPr>
+          <p:cNvPr id="13" name="TextBox 12"/>
+          <p:cNvSpPr txBox="1"/>
+          <p:nvPr/>
+        </p:nvSpPr>
+        <p:spPr>
+          <a:xfrm>
+            <a:off x="2542032" y="2240280"/>
+            <a:ext cx="1554480" cy="640080"/>
+          </a:xfrm>
+          <a:prstGeom prst="rect">
+            <a:avLst/>
+          </a:prstGeom>
+          <a:noFill/>
+        </p:spPr>
+        <p:txBody>
+          <a:bodyPr wrap="square" lIns="36576" rIns="36576" tIns="18288" bIns="18288" anchor="ctr">
+            <a:spAutoFit/>
+          </a:bodyPr>
+          <a:lstStyle/>
+          <a:p>
+            <a:pPr algn="ctr">
+              <a:spcAft>
+                <a:spcPts val="200"/>
+              </a:spcAft>
+            </a:pPr>
+            <a:r>
+              <a:rPr sz="1200" b="0">
+                <a:solidFill>
+                  <a:srgbClr val="61727D"/>
+                </a:solidFill>
+                <a:latin typeface="Microsoft YaHei"/>
+              </a:rPr>
+              <a:t>PyMuPDF</a:t>
+            </a:r>
+          </a:p>
+          <a:p>
+            <a:pPr algn="ctr">
+              <a:spcAft>
+                <a:spcPts val="200"/>
+              </a:spcAft>
+            </a:pPr>
+            <a:r>
+              <a:rPr sz="1200" b="0">
+                <a:solidFill>
+                  <a:srgbClr val="61727D"/>
+                </a:solidFill>
+                <a:latin typeface="Microsoft YaHei"/>
+              </a:rPr>
+              <a:t>页级门禁</a:t>
+            </a:r>
+          </a:p>
+        </p:txBody>
+      </p:sp>
+      <p:cxnSp>
+        <p:nvCxnSpPr>
+          <p:cNvPr id="14" name="Connector 13"/>
+          <p:cNvCxnSpPr/>
+          <p:nvPr/>
+        </p:nvCxnSpPr>
+        <p:spPr>
+          <a:xfrm>
+            <a:off x="4187952" y="2377440"/>
+            <a:ext cx="201168" cy="0"/>
+          </a:xfrm>
+          <a:prstGeom prst="line">
+            <a:avLst/>
+          </a:prstGeom>
+          <a:ln w="22860">
+            <a:solidFill>
+              <a:srgbClr val="247D78"/>
+            </a:solidFill>
+          </a:ln>
+        </p:spPr>
+        <p:style>
+          <a:lnRef idx="2">
+            <a:schemeClr val="accent1"/>
+          </a:lnRef>
+          <a:fillRef idx="0">
+            <a:schemeClr val="accent1"/>
+          </a:fillRef>
+          <a:effectRef idx="1">
+            <a:schemeClr val="accent1"/>
+          </a:effectRef>
+          <a:fontRef idx="minor">
+            <a:schemeClr val="tx1"/>
+          </a:fontRef>
+        </p:style>
+      </p:cxnSp>
+      <p:sp>
+        <p:nvSpPr>
+          <p:cNvPr id="15" name="Rounded Rectangle 14"/>
+          <p:cNvSpPr/>
+          <p:nvPr/>
+        </p:nvSpPr>
+        <p:spPr>
+          <a:xfrm>
+            <a:off x="4434840" y="1691640"/>
+            <a:ext cx="1691640" cy="1417320"/>
+          </a:xfrm>
+          <a:prstGeom prst="roundRect">
+            <a:avLst/>
+          </a:prstGeom>
+          <a:solidFill>
+            <a:srgbClr val="FFFFFF"/>
+          </a:solidFill>
+          <a:ln w="13970">
+            <a:solidFill>
+              <a:srgbClr val="247D78"/>
+            </a:solidFill>
+          </a:ln>
+        </p:spPr>
+        <p:style>
+          <a:lnRef idx="1">
+            <a:schemeClr val="accent1"/>
+          </a:lnRef>
+          <a:fillRef idx="3">
+            <a:schemeClr val="accent1"/>
+          </a:fillRef>
+          <a:effectRef idx="2">
+            <a:schemeClr val="accent1"/>
+          </a:effectRef>
+          <a:fontRef idx="minor">
+            <a:schemeClr val="lt1"/>
+          </a:fontRef>
+        </p:style>
+        <p:txBody>
+          <a:bodyPr rtlCol="0" anchor="ctr"/>
+          <a:lstStyle/>
+          <a:p>
+            <a:pPr algn="ctr"/>
+          </a:p>
+        </p:txBody>
+      </p:sp>
+      <p:sp>
+        <p:nvSpPr>
+          <p:cNvPr id="16" name="TextBox 15"/>
+          <p:cNvSpPr txBox="1"/>
+          <p:nvPr/>
+        </p:nvSpPr>
+        <p:spPr>
+          <a:xfrm>
+            <a:off x="4507992" y="1828800"/>
+            <a:ext cx="1554480" cy="347472"/>
+          </a:xfrm>
+          <a:prstGeom prst="rect">
+            <a:avLst/>
+          </a:prstGeom>
+          <a:noFill/>
+        </p:spPr>
+        <p:txBody>
+          <a:bodyPr wrap="square" lIns="36576" rIns="36576" tIns="18288" bIns="18288" anchor="ctr">
+            <a:spAutoFit/>
+          </a:bodyPr>
+          <a:lstStyle/>
+          <a:p>
+            <a:pPr algn="ctr">
+              <a:spcAft>
+                <a:spcPts val="200"/>
+              </a:spcAft>
+            </a:pPr>
+            <a:r>
+              <a:rPr sz="1500" b="1">
+                <a:solidFill>
+                  <a:srgbClr val="163247"/>
+                </a:solidFill>
+                <a:latin typeface="Microsoft YaHei"/>
+              </a:rPr>
+              <a:t>切分索引</a:t>
+            </a:r>
+          </a:p>
+        </p:txBody>
+      </p:sp>
+      <p:sp>
+        <p:nvSpPr>
+          <p:cNvPr id="17" name="TextBox 16"/>
+          <p:cNvSpPr txBox="1"/>
+          <p:nvPr/>
+        </p:nvSpPr>
+        <p:spPr>
+          <a:xfrm>
+            <a:off x="4507992" y="2240280"/>
+            <a:ext cx="1554480" cy="640080"/>
+          </a:xfrm>
+          <a:prstGeom prst="rect">
+            <a:avLst/>
+          </a:prstGeom>
+          <a:noFill/>
+        </p:spPr>
+        <p:txBody>
+          <a:bodyPr wrap="square" lIns="36576" rIns="36576" tIns="18288" bIns="18288" anchor="ctr">
+            <a:spAutoFit/>
+          </a:bodyPr>
+          <a:lstStyle/>
+          <a:p>
+            <a:pPr algn="ctr">
+              <a:spcAft>
+                <a:spcPts val="200"/>
+              </a:spcAft>
+            </a:pPr>
+            <a:r>
+              <a:rPr sz="1200" b="0">
+                <a:solidFill>
+                  <a:srgbClr val="61727D"/>
+                </a:solidFill>
+                <a:latin typeface="Microsoft YaHei"/>
+              </a:rPr>
+              <a:t>语义切分</a:t>
+            </a:r>
+          </a:p>
+          <a:p>
+            <a:pPr algn="ctr">
+              <a:spcAft>
+                <a:spcPts val="200"/>
+              </a:spcAft>
+            </a:pPr>
+            <a:r>
+              <a:rPr sz="1200" b="0">
+                <a:solidFill>
+                  <a:srgbClr val="61727D"/>
+                </a:solidFill>
+                <a:latin typeface="Microsoft YaHei"/>
+              </a:rPr>
+              <a:t>BGE-M3</a:t>
+            </a:r>
+          </a:p>
+        </p:txBody>
+      </p:sp>
+      <p:cxnSp>
+        <p:nvCxnSpPr>
+          <p:cNvPr id="18" name="Connector 17"/>
+          <p:cNvCxnSpPr/>
+          <p:nvPr/>
+        </p:nvCxnSpPr>
+        <p:spPr>
+          <a:xfrm>
+            <a:off x="6153912" y="2377440"/>
+            <a:ext cx="201168" cy="0"/>
+          </a:xfrm>
+          <a:prstGeom prst="line">
+            <a:avLst/>
+          </a:prstGeom>
+          <a:ln w="22860">
+            <a:solidFill>
+              <a:srgbClr val="247D78"/>
+            </a:solidFill>
+          </a:ln>
+        </p:spPr>
+        <p:style>
+          <a:lnRef idx="2">
+            <a:schemeClr val="accent1"/>
+          </a:lnRef>
+          <a:fillRef idx="0">
+            <a:schemeClr val="accent1"/>
+          </a:fillRef>
+          <a:effectRef idx="1">
+            <a:schemeClr val="accent1"/>
+          </a:effectRef>
+          <a:fontRef idx="minor">
+            <a:schemeClr val="tx1"/>
+          </a:fontRef>
+        </p:style>
+      </p:cxnSp>
+      <p:sp>
+        <p:nvSpPr>
+          <p:cNvPr id="19" name="Rounded Rectangle 18"/>
+          <p:cNvSpPr/>
+          <p:nvPr/>
+        </p:nvSpPr>
+        <p:spPr>
+          <a:xfrm>
+            <a:off x="6400800" y="1691640"/>
+            <a:ext cx="1691640" cy="1417320"/>
+          </a:xfrm>
+          <a:prstGeom prst="roundRect">
+            <a:avLst/>
+          </a:prstGeom>
+          <a:solidFill>
+            <a:srgbClr val="FFFFFF"/>
+          </a:solidFill>
+          <a:ln w="13970">
+            <a:solidFill>
+              <a:srgbClr val="247D78"/>
+            </a:solidFill>
+          </a:ln>
+        </p:spPr>
+        <p:style>
+          <a:lnRef idx="1">
+            <a:schemeClr val="accent1"/>
+          </a:lnRef>
+          <a:fillRef idx="3">
+            <a:schemeClr val="accent1"/>
+          </a:fillRef>
+          <a:effectRef idx="2">
+            <a:schemeClr val="accent1"/>
+          </a:effectRef>
+          <a:fontRef idx="minor">
+            <a:schemeClr val="lt1"/>
+          </a:fontRef>
+        </p:style>
+        <p:txBody>
+          <a:bodyPr rtlCol="0" anchor="ctr"/>
+          <a:lstStyle/>
+          <a:p>
+            <a:pPr algn="ctr"/>
+          </a:p>
+        </p:txBody>
+      </p:sp>
+      <p:sp>
+        <p:nvSpPr>
+          <p:cNvPr id="20" name="TextBox 19"/>
+          <p:cNvSpPr txBox="1"/>
+          <p:nvPr/>
+        </p:nvSpPr>
+        <p:spPr>
+          <a:xfrm>
+            <a:off x="6473952" y="1828800"/>
+            <a:ext cx="1554480" cy="347472"/>
+          </a:xfrm>
+          <a:prstGeom prst="rect">
+            <a:avLst/>
+          </a:prstGeom>
+          <a:noFill/>
+        </p:spPr>
+        <p:txBody>
+          <a:bodyPr wrap="square" lIns="36576" rIns="36576" tIns="18288" bIns="18288" anchor="ctr">
+            <a:spAutoFit/>
+          </a:bodyPr>
+          <a:lstStyle/>
+          <a:p>
+            <a:pPr algn="ctr">
+              <a:spcAft>
+                <a:spcPts val="200"/>
+              </a:spcAft>
+            </a:pPr>
+            <a:r>
+              <a:rPr sz="1500" b="1">
+                <a:solidFill>
+                  <a:srgbClr val="163247"/>
+                </a:solidFill>
+                <a:latin typeface="Microsoft YaHei"/>
+              </a:rPr>
+              <a:t>检索</a:t>
+            </a:r>
+          </a:p>
+        </p:txBody>
+      </p:sp>
+      <p:sp>
+        <p:nvSpPr>
+          <p:cNvPr id="21" name="TextBox 20"/>
+          <p:cNvSpPr txBox="1"/>
+          <p:nvPr/>
+        </p:nvSpPr>
+        <p:spPr>
+          <a:xfrm>
+            <a:off x="6473952" y="2240280"/>
+            <a:ext cx="1554480" cy="640080"/>
+          </a:xfrm>
+          <a:prstGeom prst="rect">
+            <a:avLst/>
+          </a:prstGeom>
+          <a:noFill/>
+        </p:spPr>
+        <p:txBody>
+          <a:bodyPr wrap="square" lIns="36576" rIns="36576" tIns="18288" bIns="18288" anchor="ctr">
+            <a:spAutoFit/>
+          </a:bodyPr>
+          <a:lstStyle/>
+          <a:p>
+            <a:pPr algn="ctr">
+              <a:spcAft>
+                <a:spcPts val="200"/>
+              </a:spcAft>
+            </a:pPr>
+            <a:r>
+              <a:rPr sz="1200" b="0">
+                <a:solidFill>
+                  <a:srgbClr val="61727D"/>
+                </a:solidFill>
+                <a:latin typeface="Microsoft YaHei"/>
+              </a:rPr>
+              <a:t>默认 Dense</a:t>
+            </a:r>
+          </a:p>
+          <a:p>
+            <a:pPr algn="ctr">
+              <a:spcAft>
+                <a:spcPts val="200"/>
+              </a:spcAft>
+            </a:pPr>
+            <a:r>
+              <a:rPr sz="1200" b="0">
+                <a:solidFill>
+                  <a:srgbClr val="61727D"/>
+                </a:solidFill>
+                <a:latin typeface="Microsoft YaHei"/>
+              </a:rPr>
+              <a:t>可选 Hybrid</a:t>
+            </a:r>
+          </a:p>
+        </p:txBody>
+      </p:sp>
+      <p:cxnSp>
+        <p:nvCxnSpPr>
+          <p:cNvPr id="22" name="Connector 21"/>
+          <p:cNvCxnSpPr/>
+          <p:nvPr/>
+        </p:nvCxnSpPr>
+        <p:spPr>
+          <a:xfrm>
+            <a:off x="8119871" y="2377440"/>
+            <a:ext cx="201169" cy="0"/>
+          </a:xfrm>
+          <a:prstGeom prst="line">
+            <a:avLst/>
+          </a:prstGeom>
+          <a:ln w="22860">
+            <a:solidFill>
+              <a:srgbClr val="D39A37"/>
+            </a:solidFill>
+          </a:ln>
+        </p:spPr>
+        <p:style>
+          <a:lnRef idx="2">
+            <a:schemeClr val="accent1"/>
+          </a:lnRef>
+          <a:fillRef idx="0">
+            <a:schemeClr val="accent1"/>
+          </a:fillRef>
+          <a:effectRef idx="1">
+            <a:schemeClr val="accent1"/>
+          </a:effectRef>
+          <a:fontRef idx="minor">
+            <a:schemeClr val="tx1"/>
+          </a:fontRef>
+        </p:style>
+      </p:cxnSp>
+      <p:sp>
+        <p:nvSpPr>
+          <p:cNvPr id="23" name="Rounded Rectangle 22"/>
+          <p:cNvSpPr/>
+          <p:nvPr/>
+        </p:nvSpPr>
+        <p:spPr>
+          <a:xfrm>
+            <a:off x="8366760" y="1691640"/>
+            <a:ext cx="1691640" cy="1417320"/>
+          </a:xfrm>
+          <a:prstGeom prst="roundRect">
+            <a:avLst/>
+          </a:prstGeom>
+          <a:solidFill>
+            <a:srgbClr val="FBF0D8"/>
+          </a:solidFill>
+          <a:ln w="13970">
+            <a:solidFill>
+              <a:srgbClr val="D39A37"/>
+            </a:solidFill>
+          </a:ln>
+        </p:spPr>
+        <p:style>
+          <a:lnRef idx="1">
+            <a:schemeClr val="accent1"/>
+          </a:lnRef>
+          <a:fillRef idx="3">
+            <a:schemeClr val="accent1"/>
+          </a:fillRef>
+          <a:effectRef idx="2">
+            <a:schemeClr val="accent1"/>
+          </a:effectRef>
+          <a:fontRef idx="minor">
+            <a:schemeClr val="lt1"/>
+          </a:fontRef>
+        </p:style>
+        <p:txBody>
+          <a:bodyPr rtlCol="0" anchor="ctr"/>
+          <a:lstStyle/>
+          <a:p>
+            <a:pPr algn="ctr"/>
+          </a:p>
+        </p:txBody>
+      </p:sp>
+      <p:sp>
+        <p:nvSpPr>
+          <p:cNvPr id="24" name="TextBox 23"/>
+          <p:cNvSpPr txBox="1"/>
+          <p:nvPr/>
+        </p:nvSpPr>
+        <p:spPr>
+          <a:xfrm>
+            <a:off x="8439912" y="1828800"/>
+            <a:ext cx="1554480" cy="347472"/>
+          </a:xfrm>
+          <a:prstGeom prst="rect">
+            <a:avLst/>
+          </a:prstGeom>
+          <a:noFill/>
+        </p:spPr>
+        <p:txBody>
+          <a:bodyPr wrap="square" lIns="36576" rIns="36576" tIns="18288" bIns="18288" anchor="ctr">
+            <a:spAutoFit/>
+          </a:bodyPr>
+          <a:lstStyle/>
+          <a:p>
+            <a:pPr algn="ctr">
+              <a:spcAft>
+                <a:spcPts val="200"/>
+              </a:spcAft>
+            </a:pPr>
+            <a:r>
+              <a:rPr sz="1500" b="1">
+                <a:solidFill>
+                  <a:srgbClr val="163247"/>
+                </a:solidFill>
+                <a:latin typeface="Microsoft YaHei"/>
+              </a:rPr>
+              <a:t>生成</a:t>
+            </a:r>
+          </a:p>
+        </p:txBody>
+      </p:sp>
+      <p:sp>
+        <p:nvSpPr>
+          <p:cNvPr id="25" name="TextBox 24"/>
+          <p:cNvSpPr txBox="1"/>
+          <p:nvPr/>
+        </p:nvSpPr>
+        <p:spPr>
+          <a:xfrm>
+            <a:off x="8439912" y="2240280"/>
+            <a:ext cx="1554480" cy="640080"/>
+          </a:xfrm>
+          <a:prstGeom prst="rect">
+            <a:avLst/>
+          </a:prstGeom>
+          <a:noFill/>
+        </p:spPr>
+        <p:txBody>
+          <a:bodyPr wrap="square" lIns="36576" rIns="36576" tIns="18288" bIns="18288" anchor="ctr">
+            <a:spAutoFit/>
+          </a:bodyPr>
+          <a:lstStyle/>
+          <a:p>
+            <a:pPr algn="ctr">
+              <a:spcAft>
+                <a:spcPts val="200"/>
+              </a:spcAft>
+            </a:pPr>
+            <a:r>
+              <a:rPr sz="1200" b="0">
+                <a:solidFill>
+                  <a:srgbClr val="61727D"/>
+                </a:solidFill>
+                <a:latin typeface="Microsoft YaHei"/>
+              </a:rPr>
+              <a:t>DeepSeek</a:t>
+            </a:r>
+          </a:p>
+          <a:p>
+            <a:pPr algn="ctr">
+              <a:spcAft>
+                <a:spcPts val="200"/>
+              </a:spcAft>
+            </a:pPr>
+            <a:r>
+              <a:rPr sz="1200" b="0">
+                <a:solidFill>
+                  <a:srgbClr val="61727D"/>
+                </a:solidFill>
+                <a:latin typeface="Microsoft YaHei"/>
+              </a:rPr>
+              <a:t>deepseek-flash</a:t>
+            </a:r>
+          </a:p>
+        </p:txBody>
+      </p:sp>
+      <p:cxnSp>
+        <p:nvCxnSpPr>
+          <p:cNvPr id="26" name="Connector 25"/>
+          <p:cNvCxnSpPr/>
+          <p:nvPr/>
+        </p:nvCxnSpPr>
+        <p:spPr>
+          <a:xfrm flipH="1">
+            <a:off x="10058400" y="2377440"/>
+            <a:ext cx="27432" cy="0"/>
+          </a:xfrm>
+          <a:prstGeom prst="line">
+            <a:avLst/>
+          </a:prstGeom>
+          <a:ln w="22860">
+            <a:solidFill>
+              <a:srgbClr val="D39A37"/>
+            </a:solidFill>
+          </a:ln>
+        </p:spPr>
+        <p:style>
+          <a:lnRef idx="2">
+            <a:schemeClr val="accent1"/>
+          </a:lnRef>
+          <a:fillRef idx="0">
+            <a:schemeClr val="accent1"/>
+          </a:fillRef>
+          <a:effectRef idx="1">
+            <a:schemeClr val="accent1"/>
+          </a:effectRef>
+          <a:fontRef idx="minor">
+            <a:schemeClr val="tx1"/>
+          </a:fontRef>
+        </p:style>
+      </p:cxnSp>
+      <p:sp>
+        <p:nvSpPr>
+          <p:cNvPr id="27" name="Rounded Rectangle 26"/>
+          <p:cNvSpPr/>
+          <p:nvPr/>
+        </p:nvSpPr>
+        <p:spPr>
+          <a:xfrm>
+            <a:off x="10104120" y="1691640"/>
+            <a:ext cx="1691640" cy="1417320"/>
+          </a:xfrm>
+          <a:prstGeom prst="roundRect">
+            <a:avLst/>
+          </a:prstGeom>
+          <a:solidFill>
+            <a:srgbClr val="163247"/>
+          </a:solidFill>
+          <a:ln w="13970">
+            <a:solidFill>
+              <a:srgbClr val="163247"/>
+            </a:solidFill>
+          </a:ln>
+        </p:spPr>
+        <p:style>
+          <a:lnRef idx="1">
+            <a:schemeClr val="accent1"/>
+          </a:lnRef>
+          <a:fillRef idx="3">
+            <a:schemeClr val="accent1"/>
+          </a:fillRef>
+          <a:effectRef idx="2">
+            <a:schemeClr val="accent1"/>
+          </a:effectRef>
+          <a:fontRef idx="minor">
+            <a:schemeClr val="lt1"/>
+          </a:fontRef>
+        </p:style>
+        <p:txBody>
+          <a:bodyPr rtlCol="0" anchor="ctr"/>
+          <a:lstStyle/>
+          <a:p>
+            <a:pPr algn="ctr"/>
+          </a:p>
+        </p:txBody>
+      </p:sp>
+      <p:sp>
+        <p:nvSpPr>
+          <p:cNvPr id="28" name="TextBox 27"/>
+          <p:cNvSpPr txBox="1"/>
+          <p:nvPr/>
+        </p:nvSpPr>
+        <p:spPr>
+          <a:xfrm>
+            <a:off x="10177272" y="1828800"/>
+            <a:ext cx="1554480" cy="347472"/>
+          </a:xfrm>
+          <a:prstGeom prst="rect">
+            <a:avLst/>
+          </a:prstGeom>
+          <a:noFill/>
+        </p:spPr>
+        <p:txBody>
+          <a:bodyPr wrap="square" lIns="36576" rIns="36576" tIns="18288" bIns="18288" anchor="ctr">
+            <a:spAutoFit/>
+          </a:bodyPr>
+          <a:lstStyle/>
+          <a:p>
+            <a:pPr algn="ctr">
+              <a:spcAft>
+                <a:spcPts val="200"/>
+              </a:spcAft>
+            </a:pPr>
+            <a:r>
+              <a:rPr sz="1500" b="1">
+                <a:solidFill>
+                  <a:srgbClr val="FFFFFF"/>
+                </a:solidFill>
+                <a:latin typeface="Microsoft YaHei"/>
+              </a:rPr>
+              <a:t>学生答案</a:t>
+            </a:r>
+          </a:p>
+        </p:txBody>
+      </p:sp>
+      <p:sp>
+        <p:nvSpPr>
+          <p:cNvPr id="29" name="TextBox 28"/>
+          <p:cNvSpPr txBox="1"/>
+          <p:nvPr/>
+        </p:nvSpPr>
+        <p:spPr>
+          <a:xfrm>
+            <a:off x="10177272" y="2240280"/>
+            <a:ext cx="1554480" cy="640080"/>
+          </a:xfrm>
+          <a:prstGeom prst="rect">
+            <a:avLst/>
+          </a:prstGeom>
+          <a:noFill/>
+        </p:spPr>
+        <p:txBody>
+          <a:bodyPr wrap="square" lIns="36576" rIns="36576" tIns="18288" bIns="18288" anchor="ctr">
+            <a:spAutoFit/>
+          </a:bodyPr>
+          <a:lstStyle/>
+          <a:p>
+            <a:pPr algn="ctr">
+              <a:spcAft>
+                <a:spcPts val="200"/>
+              </a:spcAft>
+            </a:pPr>
+            <a:r>
+              <a:rPr sz="1200" b="0">
+                <a:solidFill>
+                  <a:srgbClr val="FFFFFF"/>
+                </a:solidFill>
+                <a:latin typeface="Microsoft YaHei"/>
+              </a:rPr>
+              <a:t>回答/引用</a:t>
+            </a:r>
+          </a:p>
+          <a:p>
+            <a:pPr algn="ctr">
+              <a:spcAft>
+                <a:spcPts val="200"/>
+              </a:spcAft>
+            </a:pPr>
+            <a:r>
+              <a:rPr sz="1200" b="0">
+                <a:solidFill>
+                  <a:srgbClr val="FFFFFF"/>
+                </a:solidFill>
+                <a:latin typeface="Microsoft YaHei"/>
+              </a:rPr>
+              <a:t>依据不足</a:t>
+            </a:r>
+          </a:p>
+        </p:txBody>
+      </p:sp>
+      <p:sp>
+        <p:nvSpPr>
+          <p:cNvPr id="30" name="Rounded Rectangle 29"/>
+          <p:cNvSpPr/>
+          <p:nvPr/>
+        </p:nvSpPr>
+        <p:spPr>
+          <a:xfrm>
+            <a:off x="640080" y="3429000"/>
+            <a:ext cx="10881360" cy="2148840"/>
           </a:xfrm>
           <a:prstGeom prst="roundRect">
             <a:avLst/>
@@ -8415,14 +8768,14 @@
       </p:sp>
       <p:sp>
         <p:nvSpPr>
-          <p:cNvPr id="8" name="TextBox 7"/>
+          <p:cNvPr id="31" name="TextBox 30"/>
           <p:cNvSpPr txBox="1"/>
           <p:nvPr/>
         </p:nvSpPr>
         <p:spPr>
           <a:xfrm>
-            <a:off x="786384" y="1792224"/>
-            <a:ext cx="2249424" cy="457200"/>
+            <a:off x="868680" y="3611880"/>
+            <a:ext cx="1828800" cy="310896"/>
           </a:xfrm>
           <a:prstGeom prst="rect">
             <a:avLst/>
@@ -8435,33 +8788,33 @@
           </a:bodyPr>
           <a:lstStyle/>
           <a:p>
-            <a:pPr algn="ctr">
-              <a:spcAft>
-                <a:spcPts val="200"/>
-              </a:spcAft>
-            </a:pPr>
-            <a:r>
-              <a:rPr sz="2700" b="1">
+            <a:pPr algn="l">
+              <a:spcAft>
+                <a:spcPts val="200"/>
+              </a:spcAft>
+            </a:pPr>
+            <a:r>
+              <a:rPr sz="1700" b="1">
                 <a:solidFill>
                   <a:srgbClr val="247D78"/>
                 </a:solidFill>
                 <a:latin typeface="Microsoft YaHei"/>
               </a:rPr>
-              <a:t>4</a:t>
-            </a:r>
-          </a:p>
-        </p:txBody>
-      </p:sp>
-      <p:sp>
-        <p:nvSpPr>
-          <p:cNvPr id="9" name="TextBox 8"/>
+              <a:t>应用层栈</a:t>
+            </a:r>
+          </a:p>
+        </p:txBody>
+      </p:sp>
+      <p:sp>
+        <p:nvSpPr>
+          <p:cNvPr id="32" name="TextBox 31"/>
           <p:cNvSpPr txBox="1"/>
           <p:nvPr/>
         </p:nvSpPr>
         <p:spPr>
           <a:xfrm>
-            <a:off x="786384" y="2286000"/>
-            <a:ext cx="2249424" cy="274320"/>
+            <a:off x="868680" y="4023360"/>
+            <a:ext cx="10332720" cy="329184"/>
           </a:xfrm>
           <a:prstGeom prst="rect">
             <a:avLst/>
@@ -8474,78 +8827,33 @@
           </a:bodyPr>
           <a:lstStyle/>
           <a:p>
-            <a:pPr algn="ctr">
-              <a:spcAft>
-                <a:spcPts val="200"/>
-              </a:spcAft>
-            </a:pPr>
-            <a:r>
-              <a:rPr sz="1300" b="0">
-                <a:solidFill>
-                  <a:srgbClr val="61727D"/>
-                </a:solidFill>
-                <a:latin typeface="Microsoft YaHei"/>
-              </a:rPr>
-              <a:t>门课程</a:t>
-            </a:r>
-          </a:p>
-        </p:txBody>
-      </p:sp>
-      <p:sp>
-        <p:nvSpPr>
-          <p:cNvPr id="10" name="Rounded Rectangle 9"/>
-          <p:cNvSpPr/>
-          <p:nvPr/>
-        </p:nvSpPr>
-        <p:spPr>
-          <a:xfrm>
-            <a:off x="3291840" y="1700784"/>
-            <a:ext cx="2395728" cy="1024128"/>
-          </a:xfrm>
-          <a:prstGeom prst="roundRect">
-            <a:avLst/>
-          </a:prstGeom>
-          <a:solidFill>
-            <a:srgbClr val="FFFFFF"/>
-          </a:solidFill>
-          <a:ln w="13970">
-            <a:solidFill>
-              <a:srgbClr val="D6E0E5"/>
-            </a:solidFill>
-          </a:ln>
-        </p:spPr>
-        <p:style>
-          <a:lnRef idx="1">
-            <a:schemeClr val="accent1"/>
-          </a:lnRef>
-          <a:fillRef idx="3">
-            <a:schemeClr val="accent1"/>
-          </a:fillRef>
-          <a:effectRef idx="2">
-            <a:schemeClr val="accent1"/>
-          </a:effectRef>
-          <a:fontRef idx="minor">
-            <a:schemeClr val="lt1"/>
-          </a:fontRef>
-        </p:style>
-        <p:txBody>
-          <a:bodyPr rtlCol="0" anchor="ctr"/>
-          <a:lstStyle/>
-          <a:p>
-            <a:pPr algn="ctr"/>
-          </a:p>
-        </p:txBody>
-      </p:sp>
-      <p:sp>
-        <p:nvSpPr>
-          <p:cNvPr id="11" name="TextBox 10"/>
+            <a:pPr algn="l">
+              <a:spcAft>
+                <a:spcPts val="200"/>
+              </a:spcAft>
+            </a:pPr>
+            <a:r>
+              <a:rPr sz="1500" b="0">
+                <a:solidFill>
+                  <a:srgbClr val="263642"/>
+                </a:solidFill>
+                <a:latin typeface="Microsoft YaHei"/>
+              </a:rPr>
+              <a:t>FastAPI + PostgreSQL/pgvector + Vue 3 · Cookie Session · admin / teacher / student</a:t>
+            </a:r>
+          </a:p>
+        </p:txBody>
+      </p:sp>
+      <p:sp>
+        <p:nvSpPr>
+          <p:cNvPr id="33" name="TextBox 32"/>
           <p:cNvSpPr txBox="1"/>
           <p:nvPr/>
         </p:nvSpPr>
         <p:spPr>
           <a:xfrm>
-            <a:off x="3364992" y="1792224"/>
-            <a:ext cx="2249424" cy="457200"/>
+            <a:off x="868680" y="4434840"/>
+            <a:ext cx="10332720" cy="329184"/>
           </a:xfrm>
           <a:prstGeom prst="rect">
             <a:avLst/>
@@ -8558,33 +8866,33 @@
           </a:bodyPr>
           <a:lstStyle/>
           <a:p>
-            <a:pPr algn="ctr">
-              <a:spcAft>
-                <a:spcPts val="200"/>
-              </a:spcAft>
-            </a:pPr>
-            <a:r>
-              <a:rPr sz="2700" b="1">
-                <a:solidFill>
-                  <a:srgbClr val="D39A37"/>
-                </a:solidFill>
-                <a:latin typeface="Microsoft YaHei"/>
-              </a:rPr>
-              <a:t>27</a:t>
-            </a:r>
-          </a:p>
-        </p:txBody>
-      </p:sp>
-      <p:sp>
-        <p:nvSpPr>
-          <p:cNvPr id="12" name="TextBox 11"/>
+            <a:pPr algn="l">
+              <a:spcAft>
+                <a:spcPts val="200"/>
+              </a:spcAft>
+            </a:pPr>
+            <a:r>
+              <a:rPr sz="1500" b="0">
+                <a:solidFill>
+                  <a:srgbClr val="263642"/>
+                </a:solidFill>
+                <a:latin typeface="Microsoft YaHei"/>
+              </a:rPr>
+              <a:t>Embedding：SiliconFlow BAAI/bge-m3　｜　生成：DeepSeek（deepseek-flash，关闭 thinking）</a:t>
+            </a:r>
+          </a:p>
+        </p:txBody>
+      </p:sp>
+      <p:sp>
+        <p:nvSpPr>
+          <p:cNvPr id="34" name="TextBox 33"/>
           <p:cNvSpPr txBox="1"/>
           <p:nvPr/>
         </p:nvSpPr>
         <p:spPr>
           <a:xfrm>
-            <a:off x="3364992" y="2286000"/>
-            <a:ext cx="2249424" cy="274320"/>
+            <a:off x="868680" y="4892040"/>
+            <a:ext cx="10332720" cy="365760"/>
           </a:xfrm>
           <a:prstGeom prst="rect">
             <a:avLst/>
@@ -8597,516 +8905,19 @@
           </a:bodyPr>
           <a:lstStyle/>
           <a:p>
-            <a:pPr algn="ctr">
-              <a:spcAft>
-                <a:spcPts val="200"/>
-              </a:spcAft>
-            </a:pPr>
-            <a:r>
-              <a:rPr sz="1300" b="0">
-                <a:solidFill>
-                  <a:srgbClr val="61727D"/>
-                </a:solidFill>
-                <a:latin typeface="Microsoft YaHei"/>
-              </a:rPr>
-              <a:t>份 PDF</a:t>
-            </a:r>
-          </a:p>
-        </p:txBody>
-      </p:sp>
-      <p:sp>
-        <p:nvSpPr>
-          <p:cNvPr id="13" name="Rounded Rectangle 12"/>
-          <p:cNvSpPr/>
-          <p:nvPr/>
-        </p:nvSpPr>
-        <p:spPr>
-          <a:xfrm>
-            <a:off x="5870448" y="1700784"/>
-            <a:ext cx="2395728" cy="1024128"/>
-          </a:xfrm>
-          <a:prstGeom prst="roundRect">
-            <a:avLst/>
-          </a:prstGeom>
-          <a:solidFill>
-            <a:srgbClr val="FFFFFF"/>
-          </a:solidFill>
-          <a:ln w="13970">
-            <a:solidFill>
-              <a:srgbClr val="D6E0E5"/>
-            </a:solidFill>
-          </a:ln>
-        </p:spPr>
-        <p:style>
-          <a:lnRef idx="1">
-            <a:schemeClr val="accent1"/>
-          </a:lnRef>
-          <a:fillRef idx="3">
-            <a:schemeClr val="accent1"/>
-          </a:fillRef>
-          <a:effectRef idx="2">
-            <a:schemeClr val="accent1"/>
-          </a:effectRef>
-          <a:fontRef idx="minor">
-            <a:schemeClr val="lt1"/>
-          </a:fontRef>
-        </p:style>
-        <p:txBody>
-          <a:bodyPr rtlCol="0" anchor="ctr"/>
-          <a:lstStyle/>
-          <a:p>
-            <a:pPr algn="ctr"/>
-          </a:p>
-        </p:txBody>
-      </p:sp>
-      <p:sp>
-        <p:nvSpPr>
-          <p:cNvPr id="14" name="TextBox 13"/>
-          <p:cNvSpPr txBox="1"/>
-          <p:nvPr/>
-        </p:nvSpPr>
-        <p:spPr>
-          <a:xfrm>
-            <a:off x="5943600" y="1792224"/>
-            <a:ext cx="2249424" cy="457200"/>
-          </a:xfrm>
-          <a:prstGeom prst="rect">
-            <a:avLst/>
-          </a:prstGeom>
-          <a:noFill/>
-        </p:spPr>
-        <p:txBody>
-          <a:bodyPr wrap="square" lIns="36576" rIns="36576" tIns="18288" bIns="18288" anchor="ctr">
-            <a:spAutoFit/>
-          </a:bodyPr>
-          <a:lstStyle/>
-          <a:p>
-            <a:pPr algn="ctr">
-              <a:spcAft>
-                <a:spcPts val="200"/>
-              </a:spcAft>
-            </a:pPr>
-            <a:r>
-              <a:rPr sz="2700" b="1">
-                <a:solidFill>
-                  <a:srgbClr val="26734E"/>
-                </a:solidFill>
-                <a:latin typeface="Microsoft YaHei"/>
-              </a:rPr>
-              <a:t>2501</a:t>
-            </a:r>
-          </a:p>
-        </p:txBody>
-      </p:sp>
-      <p:sp>
-        <p:nvSpPr>
-          <p:cNvPr id="15" name="TextBox 14"/>
-          <p:cNvSpPr txBox="1"/>
-          <p:nvPr/>
-        </p:nvSpPr>
-        <p:spPr>
-          <a:xfrm>
-            <a:off x="5943600" y="2286000"/>
-            <a:ext cx="2249424" cy="274320"/>
-          </a:xfrm>
-          <a:prstGeom prst="rect">
-            <a:avLst/>
-          </a:prstGeom>
-          <a:noFill/>
-        </p:spPr>
-        <p:txBody>
-          <a:bodyPr wrap="square" lIns="36576" rIns="36576" tIns="18288" bIns="18288" anchor="ctr">
-            <a:spAutoFit/>
-          </a:bodyPr>
-          <a:lstStyle/>
-          <a:p>
-            <a:pPr algn="ctr">
-              <a:spcAft>
-                <a:spcPts val="200"/>
-              </a:spcAft>
-            </a:pPr>
-            <a:r>
-              <a:rPr sz="1300" b="0">
-                <a:solidFill>
-                  <a:srgbClr val="61727D"/>
-                </a:solidFill>
-                <a:latin typeface="Microsoft YaHei"/>
-              </a:rPr>
-              <a:t>chunks</a:t>
-            </a:r>
-          </a:p>
-        </p:txBody>
-      </p:sp>
-      <p:sp>
-        <p:nvSpPr>
-          <p:cNvPr id="16" name="Rounded Rectangle 15"/>
-          <p:cNvSpPr/>
-          <p:nvPr/>
-        </p:nvSpPr>
-        <p:spPr>
-          <a:xfrm>
-            <a:off x="8449056" y="1700784"/>
-            <a:ext cx="2670048" cy="1024128"/>
-          </a:xfrm>
-          <a:prstGeom prst="roundRect">
-            <a:avLst/>
-          </a:prstGeom>
-          <a:solidFill>
-            <a:srgbClr val="FFFFFF"/>
-          </a:solidFill>
-          <a:ln w="13970">
-            <a:solidFill>
-              <a:srgbClr val="D6E0E5"/>
-            </a:solidFill>
-          </a:ln>
-        </p:spPr>
-        <p:style>
-          <a:lnRef idx="1">
-            <a:schemeClr val="accent1"/>
-          </a:lnRef>
-          <a:fillRef idx="3">
-            <a:schemeClr val="accent1"/>
-          </a:fillRef>
-          <a:effectRef idx="2">
-            <a:schemeClr val="accent1"/>
-          </a:effectRef>
-          <a:fontRef idx="minor">
-            <a:schemeClr val="lt1"/>
-          </a:fontRef>
-        </p:style>
-        <p:txBody>
-          <a:bodyPr rtlCol="0" anchor="ctr"/>
-          <a:lstStyle/>
-          <a:p>
-            <a:pPr algn="ctr"/>
-          </a:p>
-        </p:txBody>
-      </p:sp>
-      <p:sp>
-        <p:nvSpPr>
-          <p:cNvPr id="17" name="TextBox 16"/>
-          <p:cNvSpPr txBox="1"/>
-          <p:nvPr/>
-        </p:nvSpPr>
-        <p:spPr>
-          <a:xfrm>
-            <a:off x="8522208" y="1792224"/>
-            <a:ext cx="2523744" cy="457200"/>
-          </a:xfrm>
-          <a:prstGeom prst="rect">
-            <a:avLst/>
-          </a:prstGeom>
-          <a:noFill/>
-        </p:spPr>
-        <p:txBody>
-          <a:bodyPr wrap="square" lIns="36576" rIns="36576" tIns="18288" bIns="18288" anchor="ctr">
-            <a:spAutoFit/>
-          </a:bodyPr>
-          <a:lstStyle/>
-          <a:p>
-            <a:pPr algn="ctr">
-              <a:spcAft>
-                <a:spcPts val="200"/>
-              </a:spcAft>
-            </a:pPr>
-            <a:r>
-              <a:rPr sz="2700" b="1">
-                <a:solidFill>
-                  <a:srgbClr val="163247"/>
-                </a:solidFill>
-                <a:latin typeface="Microsoft YaHei"/>
-              </a:rPr>
-              <a:t>cn_v2</a:t>
-            </a:r>
-          </a:p>
-        </p:txBody>
-      </p:sp>
-      <p:sp>
-        <p:nvSpPr>
-          <p:cNvPr id="18" name="TextBox 17"/>
-          <p:cNvSpPr txBox="1"/>
-          <p:nvPr/>
-        </p:nvSpPr>
-        <p:spPr>
-          <a:xfrm>
-            <a:off x="8522208" y="2286000"/>
-            <a:ext cx="2523744" cy="274320"/>
-          </a:xfrm>
-          <a:prstGeom prst="rect">
-            <a:avLst/>
-          </a:prstGeom>
-          <a:noFill/>
-        </p:spPr>
-        <p:txBody>
-          <a:bodyPr wrap="square" lIns="36576" rIns="36576" tIns="18288" bIns="18288" anchor="ctr">
-            <a:spAutoFit/>
-          </a:bodyPr>
-          <a:lstStyle/>
-          <a:p>
-            <a:pPr algn="ctr">
-              <a:spcAft>
-                <a:spcPts val="200"/>
-              </a:spcAft>
-            </a:pPr>
-            <a:r>
-              <a:rPr sz="1300" b="0">
-                <a:solidFill>
-                  <a:srgbClr val="61727D"/>
-                </a:solidFill>
-                <a:latin typeface="Microsoft YaHei"/>
-              </a:rPr>
-              <a:t>演示库身份</a:t>
-            </a:r>
-          </a:p>
-        </p:txBody>
-      </p:sp>
-      <p:sp>
-        <p:nvSpPr>
-          <p:cNvPr id="19" name="Rounded Rectangle 18"/>
-          <p:cNvSpPr/>
-          <p:nvPr/>
-        </p:nvSpPr>
-        <p:spPr>
-          <a:xfrm>
-            <a:off x="731520" y="3035808"/>
-            <a:ext cx="5138928" cy="1719072"/>
-          </a:xfrm>
-          <a:prstGeom prst="roundRect">
-            <a:avLst/>
-          </a:prstGeom>
-          <a:solidFill>
-            <a:srgbClr val="E4F2F0"/>
-          </a:solidFill>
-          <a:ln w="13970">
-            <a:solidFill>
-              <a:srgbClr val="247D78"/>
-            </a:solidFill>
-          </a:ln>
-        </p:spPr>
-        <p:style>
-          <a:lnRef idx="1">
-            <a:schemeClr val="accent1"/>
-          </a:lnRef>
-          <a:fillRef idx="3">
-            <a:schemeClr val="accent1"/>
-          </a:fillRef>
-          <a:effectRef idx="2">
-            <a:schemeClr val="accent1"/>
-          </a:effectRef>
-          <a:fontRef idx="minor">
-            <a:schemeClr val="lt1"/>
-          </a:fontRef>
-        </p:style>
-        <p:txBody>
-          <a:bodyPr rtlCol="0" anchor="ctr" wrap="square" lIns="146304" rIns="146304" tIns="91440" bIns="73152"/>
-          <a:lstStyle/>
-          <a:p>
-            <a:pPr algn="l">
-              <a:spcAft>
-                <a:spcPts val="600"/>
-              </a:spcAft>
-            </a:pPr>
-            <a:r>
-              <a:rPr sz="1900" b="1">
-                <a:solidFill>
-                  <a:srgbClr val="247D78"/>
-                </a:solidFill>
-                <a:latin typeface="Microsoft YaHei"/>
-              </a:rPr>
-              <a:t>当前路径</a:t>
-            </a:r>
-          </a:p>
-          <a:p>
-            <a:pPr algn="l">
-              <a:spcAft>
-                <a:spcPts val="200"/>
-              </a:spcAft>
-            </a:pPr>
-            <a:r>
-              <a:rPr sz="1500">
-                <a:solidFill>
-                  <a:srgbClr val="263642"/>
-                </a:solidFill>
-                <a:latin typeface="Microsoft YaHei"/>
-              </a:rPr>
-              <a:t>PyMuPDF 原生文字提取</a:t>
-            </a:r>
-          </a:p>
-          <a:p>
-            <a:pPr algn="l">
-              <a:spcAft>
-                <a:spcPts val="200"/>
-              </a:spcAft>
-            </a:pPr>
-            <a:r>
-              <a:rPr sz="1500">
-                <a:solidFill>
-                  <a:srgbClr val="263642"/>
-                </a:solidFill>
-                <a:latin typeface="Microsoft YaHei"/>
-              </a:rPr>
-              <a:t>逐页记录文字量、空页/稀疏页与异常字符</a:t>
-            </a:r>
-          </a:p>
-          <a:p>
-            <a:pPr algn="l">
-              <a:spcAft>
-                <a:spcPts val="200"/>
-              </a:spcAft>
-            </a:pPr>
-            <a:r>
-              <a:rPr sz="1500">
-                <a:solidFill>
-                  <a:srgbClr val="263642"/>
-                </a:solidFill>
-                <a:latin typeface="Microsoft YaHei"/>
-              </a:rPr>
-              <a:t>来源页码、文件哈希与切分版本可追溯</a:t>
-            </a:r>
-          </a:p>
-        </p:txBody>
-      </p:sp>
-      <p:sp>
-        <p:nvSpPr>
-          <p:cNvPr id="20" name="Rounded Rectangle 19"/>
-          <p:cNvSpPr/>
-          <p:nvPr/>
-        </p:nvSpPr>
-        <p:spPr>
-          <a:xfrm>
-            <a:off x="6199632" y="3035808"/>
-            <a:ext cx="5138928" cy="1719072"/>
-          </a:xfrm>
-          <a:prstGeom prst="roundRect">
-            <a:avLst/>
-          </a:prstGeom>
-          <a:solidFill>
-            <a:srgbClr val="F9E7E5"/>
-          </a:solidFill>
-          <a:ln w="13970">
-            <a:solidFill>
-              <a:srgbClr val="B84242"/>
-            </a:solidFill>
-          </a:ln>
-        </p:spPr>
-        <p:style>
-          <a:lnRef idx="1">
-            <a:schemeClr val="accent1"/>
-          </a:lnRef>
-          <a:fillRef idx="3">
-            <a:schemeClr val="accent1"/>
-          </a:fillRef>
-          <a:effectRef idx="2">
-            <a:schemeClr val="accent1"/>
-          </a:effectRef>
-          <a:fontRef idx="minor">
-            <a:schemeClr val="lt1"/>
-          </a:fontRef>
-        </p:style>
-        <p:txBody>
-          <a:bodyPr rtlCol="0" anchor="ctr" wrap="square" lIns="146304" rIns="146304" tIns="91440" bIns="73152"/>
-          <a:lstStyle/>
-          <a:p>
-            <a:pPr algn="l">
-              <a:spcAft>
-                <a:spcPts val="600"/>
-              </a:spcAft>
-            </a:pPr>
-            <a:r>
-              <a:rPr sz="1900" b="1">
-                <a:solidFill>
-                  <a:srgbClr val="B84242"/>
-                </a:solidFill>
-                <a:latin typeface="Microsoft YaHei"/>
-              </a:rPr>
-              <a:t>已停止的路线</a:t>
-            </a:r>
-          </a:p>
-          <a:p>
-            <a:pPr algn="l">
-              <a:spcAft>
-                <a:spcPts val="200"/>
-              </a:spcAft>
-            </a:pPr>
-            <a:r>
-              <a:rPr sz="1500">
-                <a:solidFill>
-                  <a:srgbClr val="263642"/>
-                </a:solidFill>
-                <a:latin typeface="Microsoft YaHei"/>
-              </a:rPr>
-              <a:t>Docling 全量冻结在 8/17</a:t>
-            </a:r>
-          </a:p>
-          <a:p>
-            <a:pPr algn="l">
-              <a:spcAft>
-                <a:spcPts val="200"/>
-              </a:spcAft>
-            </a:pPr>
-            <a:r>
-              <a:rPr sz="1500">
-                <a:solidFill>
-                  <a:srgbClr val="263642"/>
-                </a:solidFill>
-                <a:latin typeface="Microsoft YaHei"/>
-              </a:rPr>
-              <a:t>约 4.13 小时；公式密集文件耗时不可接受</a:t>
-            </a:r>
-          </a:p>
-          <a:p>
-            <a:pPr algn="l">
-              <a:spcAft>
-                <a:spcPts val="200"/>
-              </a:spcAft>
-            </a:pPr>
-            <a:r>
-              <a:rPr sz="1500">
-                <a:solidFill>
-                  <a:srgbClr val="263642"/>
-                </a:solidFill>
-                <a:latin typeface="Microsoft YaHei"/>
-              </a:rPr>
-              <a:t>不续跑旧任务，特殊页面以后按需专项处理</a:t>
-            </a:r>
-          </a:p>
-        </p:txBody>
-      </p:sp>
-      <p:sp>
-        <p:nvSpPr>
-          <p:cNvPr id="21" name="TextBox 20"/>
-          <p:cNvSpPr txBox="1"/>
-          <p:nvPr/>
-        </p:nvSpPr>
-        <p:spPr>
-          <a:xfrm>
-            <a:off x="804672" y="5257800"/>
-            <a:ext cx="10698480" cy="512064"/>
-          </a:xfrm>
-          <a:prstGeom prst="rect">
-            <a:avLst/>
-          </a:prstGeom>
-          <a:noFill/>
-        </p:spPr>
-        <p:txBody>
-          <a:bodyPr wrap="square" lIns="36576" rIns="36576" tIns="18288" bIns="18288" anchor="ctr">
-            <a:spAutoFit/>
-          </a:bodyPr>
-          <a:lstStyle/>
-          <a:p>
-            <a:pPr algn="ctr">
-              <a:spcAft>
-                <a:spcPts val="200"/>
-              </a:spcAft>
-            </a:pPr>
-            <a:r>
-              <a:rPr sz="1800" b="1">
-                <a:solidFill>
-                  <a:srgbClr val="B84242"/>
-                </a:solidFill>
-                <a:latin typeface="Microsoft YaHei"/>
-              </a:rPr>
-              <a:t>拒答/依据不足是风险提示，不证明内容完整；当前未覆盖 OCR、纯图片页、可靠公式恢复与图表理解。</a:t>
+            <a:pPr algn="l">
+              <a:spcAft>
+                <a:spcPts val="200"/>
+              </a:spcAft>
+            </a:pPr>
+            <a:r>
+              <a:rPr sz="1500" b="1">
+                <a:solidFill>
+                  <a:srgbClr val="D39A37"/>
+                </a:solidFill>
+                <a:latin typeface="Microsoft YaHei"/>
+              </a:rPr>
+              <a:t>中期演示默认 Dense；Hybrid/BM25/rerank 已实现可开关，不作中期主结论。</a:t>
             </a:r>
           </a:p>
         </p:txBody>
@@ -9171,7 +8982,7 @@
                 </a:solidFill>
                 <a:latin typeface="Microsoft YaHei"/>
               </a:rPr>
-              <a:t>中文四课验收口径（cn_v2）</a:t>
+              <a:t>中文四课中期证据</a:t>
             </a:r>
           </a:p>
         </p:txBody>
@@ -9210,7 +9021,7 @@
                 </a:solidFill>
                 <a:latin typeface="Microsoft YaHei"/>
               </a:rPr>
-              <a:t>SiliconFlow BGE-M3 + DeepSeek；16 题弱规则验收 + 中期彩排；不是人工事实正确率</a:t>
+              <a:t>正式演示库 univ_course_rag_cn_v2；弱规则验收 + 彩排 PASS，不是人工事实正确率</a:t>
             </a:r>
           </a:p>
         </p:txBody>
@@ -9269,7 +9080,7 @@
         <p:spPr>
           <a:xfrm>
             <a:off x="566928" y="6510528"/>
-            <a:ext cx="7315200" cy="182880"/>
+            <a:ext cx="8686800" cy="182880"/>
           </a:xfrm>
           <a:prstGeom prst="rect">
             <a:avLst/>
@@ -9294,7 +9105,7 @@
                 </a:solidFill>
                 <a:latin typeface="Microsoft YaHei"/>
               </a:rPr>
-              <a:t>高校课程知识库智能问答 · 中期进展</a:t>
+              <a:t>高校课程知识库智能问答 · 中期进展（参考稿）</a:t>
             </a:r>
           </a:p>
         </p:txBody>
@@ -9346,8 +9157,8 @@
         </p:nvSpPr>
         <p:spPr>
           <a:xfrm>
-            <a:off x="713232" y="1719072"/>
-            <a:ext cx="2359152" cy="1024128"/>
+            <a:off x="640080" y="1600200"/>
+            <a:ext cx="2468880" cy="1024128"/>
           </a:xfrm>
           <a:prstGeom prst="roundRect">
             <a:avLst/>
@@ -9391,8 +9202,8 @@
         </p:nvSpPr>
         <p:spPr>
           <a:xfrm>
-            <a:off x="786384" y="1810512"/>
-            <a:ext cx="2212848" cy="457200"/>
+            <a:off x="713231" y="1691640"/>
+            <a:ext cx="2322576" cy="457200"/>
           </a:xfrm>
           <a:prstGeom prst="rect">
             <a:avLst/>
@@ -9411,13 +9222,13 @@
               </a:spcAft>
             </a:pPr>
             <a:r>
-              <a:rPr sz="2700" b="1">
+              <a:rPr sz="2600" b="1">
                 <a:solidFill>
                   <a:srgbClr val="247D78"/>
                 </a:solidFill>
                 <a:latin typeface="Microsoft YaHei"/>
               </a:rPr>
-              <a:t>12/12</a:t>
+              <a:t>4</a:t>
             </a:r>
           </a:p>
         </p:txBody>
@@ -9430,8 +9241,8 @@
         </p:nvSpPr>
         <p:spPr>
           <a:xfrm>
-            <a:off x="786384" y="2304288"/>
-            <a:ext cx="2212848" cy="274320"/>
+            <a:off x="713231" y="2185416"/>
+            <a:ext cx="2322576" cy="274320"/>
           </a:xfrm>
           <a:prstGeom prst="rect">
             <a:avLst/>
@@ -9456,7 +9267,7 @@
                 </a:solidFill>
                 <a:latin typeface="Microsoft YaHei"/>
               </a:rPr>
-              <a:t>可答题命中预期文档/页</a:t>
+              <a:t>门课程</a:t>
             </a:r>
           </a:p>
         </p:txBody>
@@ -9469,8 +9280,8 @@
         </p:nvSpPr>
         <p:spPr>
           <a:xfrm>
-            <a:off x="3246120" y="1719072"/>
-            <a:ext cx="2359152" cy="1024128"/>
+            <a:off x="3291840" y="1600200"/>
+            <a:ext cx="2468880" cy="1024128"/>
           </a:xfrm>
           <a:prstGeom prst="roundRect">
             <a:avLst/>
@@ -9514,8 +9325,8 @@
         </p:nvSpPr>
         <p:spPr>
           <a:xfrm>
-            <a:off x="3319272" y="1810512"/>
-            <a:ext cx="2212848" cy="457200"/>
+            <a:off x="3364992" y="1691640"/>
+            <a:ext cx="2322576" cy="457200"/>
           </a:xfrm>
           <a:prstGeom prst="rect">
             <a:avLst/>
@@ -9534,13 +9345,13 @@
               </a:spcAft>
             </a:pPr>
             <a:r>
-              <a:rPr sz="2700" b="1">
+              <a:rPr sz="2600" b="1">
                 <a:solidFill>
                   <a:srgbClr val="D39A37"/>
                 </a:solidFill>
                 <a:latin typeface="Microsoft YaHei"/>
               </a:rPr>
-              <a:t>4/4</a:t>
+              <a:t>27</a:t>
             </a:r>
           </a:p>
         </p:txBody>
@@ -9553,8 +9364,8 @@
         </p:nvSpPr>
         <p:spPr>
           <a:xfrm>
-            <a:off x="3319272" y="2304288"/>
-            <a:ext cx="2212848" cy="274320"/>
+            <a:off x="3364992" y="2185416"/>
+            <a:ext cx="2322576" cy="274320"/>
           </a:xfrm>
           <a:prstGeom prst="rect">
             <a:avLst/>
@@ -9579,7 +9390,7 @@
                 </a:solidFill>
                 <a:latin typeface="Microsoft YaHei"/>
               </a:rPr>
-              <a:t>预期拒答判定</a:t>
+              <a:t>份 PDF</a:t>
             </a:r>
           </a:p>
         </p:txBody>
@@ -9592,8 +9403,8 @@
         </p:nvSpPr>
         <p:spPr>
           <a:xfrm>
-            <a:off x="5779008" y="1719072"/>
-            <a:ext cx="2359152" cy="1024128"/>
+            <a:off x="5943600" y="1600200"/>
+            <a:ext cx="2468880" cy="1024128"/>
           </a:xfrm>
           <a:prstGeom prst="roundRect">
             <a:avLst/>
@@ -9637,8 +9448,8 @@
         </p:nvSpPr>
         <p:spPr>
           <a:xfrm>
-            <a:off x="5852160" y="1810512"/>
-            <a:ext cx="2212848" cy="457200"/>
+            <a:off x="6016752" y="1691640"/>
+            <a:ext cx="2322576" cy="457200"/>
           </a:xfrm>
           <a:prstGeom prst="rect">
             <a:avLst/>
@@ -9657,13 +9468,13 @@
               </a:spcAft>
             </a:pPr>
             <a:r>
-              <a:rPr sz="2700" b="1">
+              <a:rPr sz="2600" b="1">
                 <a:solidFill>
                   <a:srgbClr val="26734E"/>
                 </a:solidFill>
                 <a:latin typeface="Microsoft YaHei"/>
               </a:rPr>
-              <a:t>4/27/2501</a:t>
+              <a:t>2501</a:t>
             </a:r>
           </a:p>
         </p:txBody>
@@ -9676,8 +9487,8 @@
         </p:nvSpPr>
         <p:spPr>
           <a:xfrm>
-            <a:off x="5852160" y="2304288"/>
-            <a:ext cx="2212848" cy="274320"/>
+            <a:off x="6016752" y="2185416"/>
+            <a:ext cx="2322576" cy="274320"/>
           </a:xfrm>
           <a:prstGeom prst="rect">
             <a:avLst/>
@@ -9702,7 +9513,7 @@
                 </a:solidFill>
                 <a:latin typeface="Microsoft YaHei"/>
               </a:rPr>
-              <a:t>课/PDF/chunks</a:t>
+              <a:t>chunks</a:t>
             </a:r>
           </a:p>
         </p:txBody>
@@ -9715,8 +9526,8 @@
         </p:nvSpPr>
         <p:spPr>
           <a:xfrm>
-            <a:off x="8311896" y="1719072"/>
-            <a:ext cx="2761488" cy="1024128"/>
+            <a:off x="8595360" y="1600200"/>
+            <a:ext cx="2651760" cy="1024128"/>
           </a:xfrm>
           <a:prstGeom prst="roundRect">
             <a:avLst/>
@@ -9760,8 +9571,8 @@
         </p:nvSpPr>
         <p:spPr>
           <a:xfrm>
-            <a:off x="8385048" y="1810512"/>
-            <a:ext cx="2615184" cy="457200"/>
+            <a:off x="8668512" y="1691640"/>
+            <a:ext cx="2505456" cy="457200"/>
           </a:xfrm>
           <a:prstGeom prst="rect">
             <a:avLst/>
@@ -9780,13 +9591,13 @@
               </a:spcAft>
             </a:pPr>
             <a:r>
-              <a:rPr sz="2700" b="1">
-                <a:solidFill>
-                  <a:srgbClr val="B84242"/>
-                </a:solidFill>
-                <a:latin typeface="Microsoft YaHei"/>
-              </a:rPr>
-              <a:t>0.45</a:t>
+              <a:rPr sz="2600" b="1">
+                <a:solidFill>
+                  <a:srgbClr val="163247"/>
+                </a:solidFill>
+                <a:latin typeface="Microsoft YaHei"/>
+              </a:rPr>
+              <a:t>cn_v2</a:t>
             </a:r>
           </a:p>
         </p:txBody>
@@ -9799,8 +9610,8 @@
         </p:nvSpPr>
         <p:spPr>
           <a:xfrm>
-            <a:off x="8385048" y="2304288"/>
-            <a:ext cx="2615184" cy="274320"/>
+            <a:off x="8668512" y="2185416"/>
+            <a:ext cx="2505456" cy="274320"/>
           </a:xfrm>
           <a:prstGeom prst="rect">
             <a:avLst/>
@@ -9825,7 +9636,7 @@
                 </a:solidFill>
                 <a:latin typeface="Microsoft YaHei"/>
               </a:rPr>
-              <a:t>余弦阈值（未校准）</a:t>
+              <a:t>演示库</a:t>
             </a:r>
           </a:p>
         </p:txBody>
@@ -9838,8 +9649,8 @@
         </p:nvSpPr>
         <p:spPr>
           <a:xfrm>
-            <a:off x="731520" y="3108960"/>
-            <a:ext cx="5138928" cy="1499616"/>
+            <a:off x="640080" y="2926080"/>
+            <a:ext cx="5394960" cy="2331720"/>
           </a:xfrm>
           <a:prstGeom prst="roundRect">
             <a:avLst/>
@@ -9868,7 +9679,7 @@
           </a:fontRef>
         </p:style>
         <p:txBody>
-          <a:bodyPr rtlCol="0" anchor="ctr" wrap="square" lIns="146304" rIns="146304" tIns="91440" bIns="73152"/>
+          <a:bodyPr rtlCol="0" anchor="t" wrap="square" lIns="146304" rIns="146304" tIns="91440" bIns="73152"/>
           <a:lstStyle/>
           <a:p>
             <a:pPr algn="l">
@@ -9877,61 +9688,93 @@
               </a:spcAft>
             </a:pPr>
             <a:r>
-              <a:rPr sz="1900" b="1">
+              <a:rPr sz="1800" b="1">
                 <a:solidFill>
                   <a:srgbClr val="247D78"/>
                 </a:solidFill>
                 <a:latin typeface="Microsoft YaHei"/>
               </a:rPr>
-              <a:t>当前演示检索</a:t>
-            </a:r>
-          </a:p>
-          <a:p>
-            <a:pPr algn="l">
-              <a:spcAft>
-                <a:spcPts val="200"/>
-              </a:spcAft>
-            </a:pPr>
-            <a:r>
-              <a:rPr sz="1500">
+              <a:t>课程与验收口径</a:t>
+            </a:r>
+          </a:p>
+          <a:p>
+            <a:pPr algn="l">
+              <a:spcAft>
+                <a:spcPts val="200"/>
+              </a:spcAft>
+            </a:pPr>
+            <a:r>
+              <a:rPr sz="1400">
                 <a:solidFill>
                   <a:srgbClr val="263642"/>
                 </a:solidFill>
                 <a:latin typeface="Microsoft YaHei"/>
               </a:rPr>
-              <a:t>Dense + 可选 LLM 查询扩展</a:t>
-            </a:r>
-          </a:p>
-          <a:p>
-            <a:pPr algn="l">
-              <a:spcAft>
-                <a:spcPts val="200"/>
-              </a:spcAft>
-            </a:pPr>
-            <a:r>
-              <a:rPr sz="1500">
+              <a:t>线性代数 · 概率论与统计学</a:t>
+            </a:r>
+          </a:p>
+          <a:p>
+            <a:pPr algn="l">
+              <a:spcAft>
+                <a:spcPts val="200"/>
+              </a:spcAft>
+            </a:pPr>
+            <a:r>
+              <a:rPr sz="1400">
                 <a:solidFill>
                   <a:srgbClr val="263642"/>
                 </a:solidFill>
                 <a:latin typeface="Microsoft YaHei"/>
               </a:rPr>
-              <a:t>RERANKER 关闭（残留已归档）</a:t>
-            </a:r>
-          </a:p>
-          <a:p>
-            <a:pPr algn="l">
-              <a:spcAft>
-                <a:spcPts val="200"/>
-              </a:spcAft>
-            </a:pPr>
-            <a:r>
-              <a:rPr sz="1500">
+              <a:t>人力资源管理 · 教育学原理</a:t>
+            </a:r>
+          </a:p>
+          <a:p>
+            <a:pPr algn="l">
+              <a:spcAft>
+                <a:spcPts val="200"/>
+              </a:spcAft>
+            </a:pPr>
+            <a:r>
+              <a:rPr sz="1400">
                 <a:solidFill>
                   <a:srgbClr val="263642"/>
                 </a:solidFill>
                 <a:latin typeface="Microsoft YaHei"/>
               </a:rPr>
-              <a:t>模型：DeepSeek · Embedding：BGE-M3</a:t>
+              <a:t>弱规则：可答题预期文档/页 12/12</a:t>
+            </a:r>
+          </a:p>
+          <a:p>
+            <a:pPr algn="l">
+              <a:spcAft>
+                <a:spcPts val="200"/>
+              </a:spcAft>
+            </a:pPr>
+            <a:r>
+              <a:rPr sz="1400">
+                <a:solidFill>
+                  <a:srgbClr val="263642"/>
+                </a:solidFill>
+                <a:latin typeface="Microsoft YaHei"/>
+              </a:rPr>
+              <a:t>预期拒答 4/4 · 阈值 0.45（未校准）</a:t>
+            </a:r>
+          </a:p>
+          <a:p>
+            <a:pPr algn="l">
+              <a:spcAft>
+                <a:spcPts val="200"/>
+              </a:spcAft>
+            </a:pPr>
+            <a:r>
+              <a:rPr sz="1400">
+                <a:solidFill>
+                  <a:srgbClr val="263642"/>
+                </a:solidFill>
+                <a:latin typeface="Microsoft YaHei"/>
+              </a:rPr>
+              <a:t>题集 AI 预标，未经独立人工复核</a:t>
             </a:r>
           </a:p>
         </p:txBody>
@@ -9944,18 +9787,18 @@
         </p:nvSpPr>
         <p:spPr>
           <a:xfrm>
-            <a:off x="6199632" y="3108960"/>
-            <a:ext cx="5138928" cy="1499616"/>
+            <a:off x="6263640" y="2926080"/>
+            <a:ext cx="5257800" cy="2331720"/>
           </a:xfrm>
           <a:prstGeom prst="roundRect">
             <a:avLst/>
           </a:prstGeom>
           <a:solidFill>
-            <a:srgbClr val="FFFFFF"/>
+            <a:srgbClr val="FBF0D8"/>
           </a:solidFill>
           <a:ln w="13970">
             <a:solidFill>
-              <a:srgbClr val="D6E0E5"/>
+              <a:srgbClr val="D39A37"/>
             </a:solidFill>
           </a:ln>
         </p:spPr>
@@ -9974,7 +9817,7 @@
           </a:fontRef>
         </p:style>
         <p:txBody>
-          <a:bodyPr rtlCol="0" anchor="ctr" wrap="square" lIns="146304" rIns="146304" tIns="91440" bIns="73152"/>
+          <a:bodyPr rtlCol="0" anchor="t" wrap="square" lIns="146304" rIns="146304" tIns="91440" bIns="73152"/>
           <a:lstStyle/>
           <a:p>
             <a:pPr algn="l">
@@ -9983,184 +9826,93 @@
               </a:spcAft>
             </a:pPr>
             <a:r>
-              <a:rPr sz="1900" b="1">
+              <a:rPr sz="1800" b="1">
                 <a:solidFill>
                   <a:srgbClr val="D39A37"/>
                 </a:solidFill>
                 <a:latin typeface="Microsoft YaHei"/>
               </a:rPr>
-              <a:t>课程范围</a:t>
-            </a:r>
-          </a:p>
-          <a:p>
-            <a:pPr algn="l">
-              <a:spcAft>
-                <a:spcPts val="200"/>
-              </a:spcAft>
-            </a:pPr>
-            <a:r>
-              <a:rPr sz="1500">
+              <a:t>演示检索与模型</a:t>
+            </a:r>
+          </a:p>
+          <a:p>
+            <a:pPr algn="l">
+              <a:spcAft>
+                <a:spcPts val="200"/>
+              </a:spcAft>
+            </a:pPr>
+            <a:r>
+              <a:rPr sz="1400">
                 <a:solidFill>
                   <a:srgbClr val="263642"/>
                 </a:solidFill>
                 <a:latin typeface="Microsoft YaHei"/>
               </a:rPr>
-              <a:t>线性代数 · 概率论与统计学</a:t>
-            </a:r>
-          </a:p>
-          <a:p>
-            <a:pPr algn="l">
-              <a:spcAft>
-                <a:spcPts val="200"/>
-              </a:spcAft>
-            </a:pPr>
-            <a:r>
-              <a:rPr sz="1500">
+              <a:t>默认 Dense + 可选查询扩展</a:t>
+            </a:r>
+          </a:p>
+          <a:p>
+            <a:pPr algn="l">
+              <a:spcAft>
+                <a:spcPts val="200"/>
+              </a:spcAft>
+            </a:pPr>
+            <a:r>
+              <a:rPr sz="1400">
                 <a:solidFill>
                   <a:srgbClr val="263642"/>
                 </a:solidFill>
                 <a:latin typeface="Microsoft YaHei"/>
               </a:rPr>
-              <a:t>人力资源管理 · 教育学原理</a:t>
-            </a:r>
-          </a:p>
-          <a:p>
-            <a:pPr algn="l">
-              <a:spcAft>
-                <a:spcPts val="200"/>
-              </a:spcAft>
-            </a:pPr>
-            <a:r>
-              <a:rPr sz="1500">
+              <a:t>rerank 演示关闭</a:t>
+            </a:r>
+          </a:p>
+          <a:p>
+            <a:pPr algn="l">
+              <a:spcAft>
+                <a:spcPts val="200"/>
+              </a:spcAft>
+            </a:pPr>
+            <a:r>
+              <a:rPr sz="1400">
                 <a:solidFill>
                   <a:srgbClr val="263642"/>
                 </a:solidFill>
                 <a:latin typeface="Microsoft YaHei"/>
               </a:rPr>
-              <a:t>库：univ_course_rag_cn_v2</a:t>
-            </a:r>
-          </a:p>
-        </p:txBody>
-      </p:sp>
-      <p:sp>
-        <p:nvSpPr>
-          <p:cNvPr id="21" name="Rounded Rectangle 20"/>
-          <p:cNvSpPr/>
-          <p:nvPr/>
-        </p:nvSpPr>
-        <p:spPr>
-          <a:xfrm>
-            <a:off x="731520" y="4956048"/>
-            <a:ext cx="10607040" cy="786384"/>
-          </a:xfrm>
-          <a:prstGeom prst="roundRect">
-            <a:avLst/>
-          </a:prstGeom>
-          <a:solidFill>
-            <a:srgbClr val="F9E7E5"/>
-          </a:solidFill>
-          <a:ln w="13970">
-            <a:solidFill>
-              <a:srgbClr val="F9E7E5"/>
-            </a:solidFill>
-          </a:ln>
-        </p:spPr>
-        <p:style>
-          <a:lnRef idx="1">
-            <a:schemeClr val="accent1"/>
-          </a:lnRef>
-          <a:fillRef idx="3">
-            <a:schemeClr val="accent1"/>
-          </a:fillRef>
-          <a:effectRef idx="2">
-            <a:schemeClr val="accent1"/>
-          </a:effectRef>
-          <a:fontRef idx="minor">
-            <a:schemeClr val="lt1"/>
-          </a:fontRef>
-        </p:style>
-        <p:txBody>
-          <a:bodyPr rtlCol="0" anchor="ctr"/>
-          <a:lstStyle/>
-          <a:p>
-            <a:pPr algn="ctr"/>
-          </a:p>
-        </p:txBody>
-      </p:sp>
-      <p:sp>
-        <p:nvSpPr>
-          <p:cNvPr id="22" name="TextBox 21"/>
-          <p:cNvSpPr txBox="1"/>
-          <p:nvPr/>
-        </p:nvSpPr>
-        <p:spPr>
-          <a:xfrm>
-            <a:off x="932688" y="5138928"/>
-            <a:ext cx="10195560" cy="384048"/>
-          </a:xfrm>
-          <a:prstGeom prst="rect">
-            <a:avLst/>
-          </a:prstGeom>
-          <a:noFill/>
-        </p:spPr>
-        <p:txBody>
-          <a:bodyPr wrap="square" lIns="36576" rIns="36576" tIns="18288" bIns="18288" anchor="ctr">
-            <a:spAutoFit/>
-          </a:bodyPr>
-          <a:lstStyle/>
-          <a:p>
-            <a:pPr algn="ctr">
-              <a:spcAft>
-                <a:spcPts val="200"/>
-              </a:spcAft>
-            </a:pPr>
-            <a:r>
-              <a:rPr sz="1700" b="1">
-                <a:solidFill>
-                  <a:srgbClr val="B84242"/>
-                </a:solidFill>
-                <a:latin typeface="Microsoft YaHei"/>
-              </a:rPr>
-              <a:t>限制：题集为 AI 预标，未经独立人工复核；12/12 与 4/4 是弱自动化规则，不是人工事实正确率。</a:t>
-            </a:r>
-          </a:p>
-        </p:txBody>
-      </p:sp>
-      <p:sp>
-        <p:nvSpPr>
-          <p:cNvPr id="23" name="TextBox 22"/>
-          <p:cNvSpPr txBox="1"/>
-          <p:nvPr/>
-        </p:nvSpPr>
-        <p:spPr>
-          <a:xfrm>
-            <a:off x="822960" y="5879592"/>
-            <a:ext cx="10424160" cy="274320"/>
-          </a:xfrm>
-          <a:prstGeom prst="rect">
-            <a:avLst/>
-          </a:prstGeom>
-          <a:noFill/>
-        </p:spPr>
-        <p:txBody>
-          <a:bodyPr wrap="square" lIns="36576" rIns="36576" tIns="18288" bIns="18288" anchor="ctr">
-            <a:spAutoFit/>
-          </a:bodyPr>
-          <a:lstStyle/>
-          <a:p>
-            <a:pPr algn="ctr">
-              <a:spcAft>
-                <a:spcPts val="200"/>
-              </a:spcAft>
-            </a:pPr>
-            <a:r>
-              <a:rPr sz="1500" b="0">
-                <a:solidFill>
-                  <a:srgbClr val="61727D"/>
-                </a:solidFill>
-                <a:latin typeface="Microsoft YaHei"/>
-              </a:rPr>
-              <a:t>观察：宽泛问法依赖查询扩展，偶发波动；命中 ≠ 答案正确。</a:t>
+              <a:t>生成：DeepSeek（deepseek-flash）</a:t>
+            </a:r>
+          </a:p>
+          <a:p>
+            <a:pPr algn="l">
+              <a:spcAft>
+                <a:spcPts val="200"/>
+              </a:spcAft>
+            </a:pPr>
+            <a:r>
+              <a:rPr sz="1400">
+                <a:solidFill>
+                  <a:srgbClr val="263642"/>
+                </a:solidFill>
+                <a:latin typeface="Microsoft YaHei"/>
+              </a:rPr>
+              <a:t>Embedding：BGE-M3</a:t>
+            </a:r>
+          </a:p>
+          <a:p>
+            <a:pPr algn="l">
+              <a:spcAft>
+                <a:spcPts val="200"/>
+              </a:spcAft>
+            </a:pPr>
+            <a:r>
+              <a:rPr sz="1400">
+                <a:solidFill>
+                  <a:srgbClr val="263642"/>
+                </a:solidFill>
+                <a:latin typeface="Microsoft YaHei"/>
+              </a:rPr>
+              <a:t>证据目录：中期答辩材料/彩排截图</a:t>
             </a:r>
           </a:p>
         </p:txBody>
@@ -10225,7 +9977,7 @@
                 </a:solidFill>
                 <a:latin typeface="Microsoft YaHei"/>
               </a:rPr>
-              <a:t>中期彩排：学生书架与引用闭环</a:t>
+              <a:t>演示路径：固定问句与引用回页</a:t>
             </a:r>
           </a:p>
         </p:txBody>
@@ -10264,7 +10016,7 @@
                 </a:solidFill>
                 <a:latin typeface="Microsoft YaHei"/>
               </a:rPr>
-              <a:t>2026-10-19 彩排 PASS：LA-01 有引用、LA-R 拒答、教师资料/反馈、Admin 三行状态</a:t>
+              <a:t>线性代数 LA-01 有引用；LA-R 依据不足；截图见中期答辩材料/彩排截图</a:t>
             </a:r>
           </a:p>
         </p:txBody>
@@ -10323,7 +10075,7 @@
         <p:spPr>
           <a:xfrm>
             <a:off x="566928" y="6510528"/>
-            <a:ext cx="7315200" cy="182880"/>
+            <a:ext cx="8686800" cy="182880"/>
           </a:xfrm>
           <a:prstGeom prst="rect">
             <a:avLst/>
@@ -10348,7 +10100,7 @@
                 </a:solidFill>
                 <a:latin typeface="Microsoft YaHei"/>
               </a:rPr>
-              <a:t>高校课程知识库智能问答 · 中期进展</a:t>
+              <a:t>高校课程知识库智能问答 · 中期进展（参考稿）</a:t>
             </a:r>
           </a:p>
         </p:txBody>
@@ -10400,8 +10152,8 @@
         </p:nvSpPr>
         <p:spPr>
           <a:xfrm>
-            <a:off x="685800" y="1627632"/>
-            <a:ext cx="5230368" cy="3127248"/>
+            <a:off x="594360" y="1554480"/>
+            <a:ext cx="5074920" cy="3063240"/>
           </a:xfrm>
           <a:prstGeom prst="roundRect">
             <a:avLst/>
@@ -10453,8 +10205,8 @@
         </p:blipFill>
         <p:spPr>
           <a:xfrm>
-            <a:off x="1378549" y="1719072"/>
-            <a:ext cx="3844869" cy="2670048"/>
+            <a:off x="1260043" y="1645920"/>
+            <a:ext cx="3752697" cy="2606040"/>
           </a:xfrm>
           <a:prstGeom prst="rect">
             <a:avLst/>
@@ -10469,8 +10221,8 @@
         </p:nvSpPr>
         <p:spPr>
           <a:xfrm>
-            <a:off x="868680" y="4407408"/>
-            <a:ext cx="4846320" cy="228600"/>
+            <a:off x="731520" y="4297680"/>
+            <a:ext cx="4754880" cy="228600"/>
           </a:xfrm>
           <a:prstGeom prst="rect">
             <a:avLst/>
@@ -10489,13 +10241,13 @@
               </a:spcAft>
             </a:pPr>
             <a:r>
-              <a:rPr sz="1400" b="1">
+              <a:rPr sz="1300" b="1">
                 <a:solidFill>
                   <a:srgbClr val="163247"/>
                 </a:solidFill>
                 <a:latin typeface="Microsoft YaHei"/>
               </a:rPr>
-              <a:t>学生提问：LA-01 回答与引用</a:t>
+              <a:t>LA-01：回答与引用</a:t>
             </a:r>
           </a:p>
         </p:txBody>
@@ -10508,8 +10260,8 @@
         </p:nvSpPr>
         <p:spPr>
           <a:xfrm>
-            <a:off x="6263640" y="1627632"/>
-            <a:ext cx="5230368" cy="3127248"/>
+            <a:off x="6355080" y="1554480"/>
+            <a:ext cx="5074920" cy="3063240"/>
           </a:xfrm>
           <a:prstGeom prst="roundRect">
             <a:avLst/>
@@ -10561,8 +10313,8 @@
         </p:blipFill>
         <p:spPr>
           <a:xfrm>
-            <a:off x="6956389" y="1719072"/>
-            <a:ext cx="3844869" cy="2670048"/>
+            <a:off x="7020763" y="1645920"/>
+            <a:ext cx="3752697" cy="2606040"/>
           </a:xfrm>
           <a:prstGeom prst="rect">
             <a:avLst/>
@@ -10577,8 +10329,8 @@
         </p:nvSpPr>
         <p:spPr>
           <a:xfrm>
-            <a:off x="6446520" y="4407408"/>
-            <a:ext cx="4846320" cy="228600"/>
+            <a:off x="6492240" y="4297680"/>
+            <a:ext cx="4754880" cy="228600"/>
           </a:xfrm>
           <a:prstGeom prst="rect">
             <a:avLst/>
@@ -10597,13 +10349,13 @@
               </a:spcAft>
             </a:pPr>
             <a:r>
-              <a:rPr sz="1400" b="1">
+              <a:rPr sz="1300" b="1">
                 <a:solidFill>
                   <a:srgbClr val="163247"/>
                 </a:solidFill>
                 <a:latin typeface="Microsoft YaHei"/>
               </a:rPr>
-              <a:t>学生书架：中文四课书册入口</a:t>
+              <a:t>学生书架：中文四课入口</a:t>
             </a:r>
           </a:p>
         </p:txBody>
@@ -10616,8 +10368,8 @@
         </p:nvSpPr>
         <p:spPr>
           <a:xfrm>
-            <a:off x="731520" y="5074920"/>
-            <a:ext cx="2450592" cy="347472"/>
+            <a:off x="640080" y="4754880"/>
+            <a:ext cx="2651760" cy="347472"/>
           </a:xfrm>
           <a:prstGeom prst="roundRect">
             <a:avLst/>
@@ -10661,8 +10413,8 @@
         </p:nvSpPr>
         <p:spPr>
           <a:xfrm>
-            <a:off x="777240" y="5088636"/>
-            <a:ext cx="2359152" cy="310896"/>
+            <a:off x="685800" y="4768596"/>
+            <a:ext cx="2560320" cy="310896"/>
           </a:xfrm>
           <a:prstGeom prst="rect">
             <a:avLst/>
@@ -10687,7 +10439,7 @@
                 </a:solidFill>
                 <a:latin typeface="Microsoft YaHei"/>
               </a:rPr>
-              <a:t>三角色导航</a:t>
+              <a:t>LA-01 有引用</a:t>
             </a:r>
           </a:p>
         </p:txBody>
@@ -10700,8 +10452,176 @@
         </p:nvSpPr>
         <p:spPr>
           <a:xfrm>
-            <a:off x="3493008" y="5074920"/>
-            <a:ext cx="2450592" cy="347472"/>
+            <a:off x="3474720" y="4754880"/>
+            <a:ext cx="2651760" cy="347472"/>
+          </a:xfrm>
+          <a:prstGeom prst="roundRect">
+            <a:avLst/>
+          </a:prstGeom>
+          <a:solidFill>
+            <a:srgbClr val="FBF0D8"/>
+          </a:solidFill>
+          <a:ln w="6350">
+            <a:solidFill>
+              <a:srgbClr val="FBF0D8"/>
+            </a:solidFill>
+          </a:ln>
+        </p:spPr>
+        <p:style>
+          <a:lnRef idx="1">
+            <a:schemeClr val="accent1"/>
+          </a:lnRef>
+          <a:fillRef idx="3">
+            <a:schemeClr val="accent1"/>
+          </a:fillRef>
+          <a:effectRef idx="2">
+            <a:schemeClr val="accent1"/>
+          </a:effectRef>
+          <a:fontRef idx="minor">
+            <a:schemeClr val="lt1"/>
+          </a:fontRef>
+        </p:style>
+        <p:txBody>
+          <a:bodyPr rtlCol="0" anchor="ctr"/>
+          <a:lstStyle/>
+          <a:p>
+            <a:pPr algn="ctr"/>
+          </a:p>
+        </p:txBody>
+      </p:sp>
+      <p:sp>
+        <p:nvSpPr>
+          <p:cNvPr id="16" name="TextBox 15"/>
+          <p:cNvSpPr txBox="1"/>
+          <p:nvPr/>
+        </p:nvSpPr>
+        <p:spPr>
+          <a:xfrm>
+            <a:off x="3520439" y="4768596"/>
+            <a:ext cx="2560320" cy="310896"/>
+          </a:xfrm>
+          <a:prstGeom prst="rect">
+            <a:avLst/>
+          </a:prstGeom>
+          <a:noFill/>
+        </p:spPr>
+        <p:txBody>
+          <a:bodyPr wrap="square" lIns="36576" rIns="36576" tIns="18288" bIns="18288" anchor="ctr">
+            <a:spAutoFit/>
+          </a:bodyPr>
+          <a:lstStyle/>
+          <a:p>
+            <a:pPr algn="ctr">
+              <a:spcAft>
+                <a:spcPts val="200"/>
+              </a:spcAft>
+            </a:pPr>
+            <a:r>
+              <a:rPr sz="1400" b="1">
+                <a:solidFill>
+                  <a:srgbClr val="D39A37"/>
+                </a:solidFill>
+                <a:latin typeface="Microsoft YaHei"/>
+              </a:rPr>
+              <a:t>LA-R 依据不足</a:t>
+            </a:r>
+          </a:p>
+        </p:txBody>
+      </p:sp>
+      <p:sp>
+        <p:nvSpPr>
+          <p:cNvPr id="17" name="Rounded Rectangle 16"/>
+          <p:cNvSpPr/>
+          <p:nvPr/>
+        </p:nvSpPr>
+        <p:spPr>
+          <a:xfrm>
+            <a:off x="6309360" y="4754880"/>
+            <a:ext cx="2468880" cy="347472"/>
+          </a:xfrm>
+          <a:prstGeom prst="roundRect">
+            <a:avLst/>
+          </a:prstGeom>
+          <a:solidFill>
+            <a:srgbClr val="E4F2F0"/>
+          </a:solidFill>
+          <a:ln w="6350">
+            <a:solidFill>
+              <a:srgbClr val="E4F2F0"/>
+            </a:solidFill>
+          </a:ln>
+        </p:spPr>
+        <p:style>
+          <a:lnRef idx="1">
+            <a:schemeClr val="accent1"/>
+          </a:lnRef>
+          <a:fillRef idx="3">
+            <a:schemeClr val="accent1"/>
+          </a:fillRef>
+          <a:effectRef idx="2">
+            <a:schemeClr val="accent1"/>
+          </a:effectRef>
+          <a:fontRef idx="minor">
+            <a:schemeClr val="lt1"/>
+          </a:fontRef>
+        </p:style>
+        <p:txBody>
+          <a:bodyPr rtlCol="0" anchor="ctr"/>
+          <a:lstStyle/>
+          <a:p>
+            <a:pPr algn="ctr"/>
+          </a:p>
+        </p:txBody>
+      </p:sp>
+      <p:sp>
+        <p:nvSpPr>
+          <p:cNvPr id="18" name="TextBox 17"/>
+          <p:cNvSpPr txBox="1"/>
+          <p:nvPr/>
+        </p:nvSpPr>
+        <p:spPr>
+          <a:xfrm>
+            <a:off x="6355080" y="4768596"/>
+            <a:ext cx="2377440" cy="310896"/>
+          </a:xfrm>
+          <a:prstGeom prst="rect">
+            <a:avLst/>
+          </a:prstGeom>
+          <a:noFill/>
+        </p:spPr>
+        <p:txBody>
+          <a:bodyPr wrap="square" lIns="36576" rIns="36576" tIns="18288" bIns="18288" anchor="ctr">
+            <a:spAutoFit/>
+          </a:bodyPr>
+          <a:lstStyle/>
+          <a:p>
+            <a:pPr algn="ctr">
+              <a:spcAft>
+                <a:spcPts val="200"/>
+              </a:spcAft>
+            </a:pPr>
+            <a:r>
+              <a:rPr sz="1400" b="1">
+                <a:solidFill>
+                  <a:srgbClr val="247D78"/>
+                </a:solidFill>
+                <a:latin typeface="Microsoft YaHei"/>
+              </a:rPr>
+              <a:t>打开 #page=</a:t>
+            </a:r>
+          </a:p>
+        </p:txBody>
+      </p:sp>
+      <p:sp>
+        <p:nvSpPr>
+          <p:cNvPr id="19" name="Rounded Rectangle 18"/>
+          <p:cNvSpPr/>
+          <p:nvPr/>
+        </p:nvSpPr>
+        <p:spPr>
+          <a:xfrm>
+            <a:off x="8961120" y="4754880"/>
+            <a:ext cx="2468880" cy="347472"/>
           </a:xfrm>
           <a:prstGeom prst="roundRect">
             <a:avLst/>
@@ -10739,14 +10659,14 @@
       </p:sp>
       <p:sp>
         <p:nvSpPr>
-          <p:cNvPr id="16" name="TextBox 15"/>
+          <p:cNvPr id="20" name="TextBox 19"/>
           <p:cNvSpPr txBox="1"/>
           <p:nvPr/>
         </p:nvSpPr>
         <p:spPr>
           <a:xfrm>
-            <a:off x="3538727" y="5088636"/>
-            <a:ext cx="2359152" cy="310896"/>
+            <a:off x="9006840" y="4768596"/>
+            <a:ext cx="2377440" cy="310896"/>
           </a:xfrm>
           <a:prstGeom prst="rect">
             <a:avLst/>
@@ -10771,66 +10691,21 @@
                 </a:solidFill>
                 <a:latin typeface="Microsoft YaHei"/>
               </a:rPr>
-              <a:t>原资料 #page=</a:t>
-            </a:r>
-          </a:p>
-        </p:txBody>
-      </p:sp>
-      <p:sp>
-        <p:nvSpPr>
-          <p:cNvPr id="17" name="Rounded Rectangle 16"/>
-          <p:cNvSpPr/>
-          <p:nvPr/>
-        </p:nvSpPr>
-        <p:spPr>
-          <a:xfrm>
-            <a:off x="6254496" y="5074920"/>
-            <a:ext cx="2450592" cy="347472"/>
-          </a:xfrm>
-          <a:prstGeom prst="roundRect">
-            <a:avLst/>
-          </a:prstGeom>
-          <a:solidFill>
-            <a:srgbClr val="E4F1E9"/>
-          </a:solidFill>
-          <a:ln w="6350">
-            <a:solidFill>
-              <a:srgbClr val="E4F1E9"/>
-            </a:solidFill>
-          </a:ln>
-        </p:spPr>
-        <p:style>
-          <a:lnRef idx="1">
-            <a:schemeClr val="accent1"/>
-          </a:lnRef>
-          <a:fillRef idx="3">
-            <a:schemeClr val="accent1"/>
-          </a:fillRef>
-          <a:effectRef idx="2">
-            <a:schemeClr val="accent1"/>
-          </a:effectRef>
-          <a:fontRef idx="minor">
-            <a:schemeClr val="lt1"/>
-          </a:fontRef>
-        </p:style>
-        <p:txBody>
-          <a:bodyPr rtlCol="0" anchor="ctr"/>
-          <a:lstStyle/>
-          <a:p>
-            <a:pPr algn="ctr"/>
-          </a:p>
-        </p:txBody>
-      </p:sp>
-      <p:sp>
-        <p:nvSpPr>
-          <p:cNvPr id="18" name="TextBox 17"/>
+              <a:t>三角色可走通</a:t>
+            </a:r>
+          </a:p>
+        </p:txBody>
+      </p:sp>
+      <p:sp>
+        <p:nvSpPr>
+          <p:cNvPr id="21" name="TextBox 20"/>
           <p:cNvSpPr txBox="1"/>
           <p:nvPr/>
         </p:nvSpPr>
         <p:spPr>
           <a:xfrm>
-            <a:off x="6300216" y="5088636"/>
-            <a:ext cx="2359152" cy="310896"/>
+            <a:off x="731520" y="5394960"/>
+            <a:ext cx="10515600" cy="292608"/>
           </a:xfrm>
           <a:prstGeom prst="rect">
             <a:avLst/>
@@ -10849,136 +10724,13 @@
               </a:spcAft>
             </a:pPr>
             <a:r>
-              <a:rPr sz="1400" b="1">
-                <a:solidFill>
-                  <a:srgbClr val="26734E"/>
-                </a:solidFill>
-                <a:latin typeface="Microsoft YaHei"/>
-              </a:rPr>
-              <a:t>拒答/依据不足</a:t>
-            </a:r>
-          </a:p>
-        </p:txBody>
-      </p:sp>
-      <p:sp>
-        <p:nvSpPr>
-          <p:cNvPr id="19" name="Rounded Rectangle 18"/>
-          <p:cNvSpPr/>
-          <p:nvPr/>
-        </p:nvSpPr>
-        <p:spPr>
-          <a:xfrm>
-            <a:off x="9015984" y="5074920"/>
-            <a:ext cx="2450592" cy="347472"/>
-          </a:xfrm>
-          <a:prstGeom prst="roundRect">
-            <a:avLst/>
-          </a:prstGeom>
-          <a:solidFill>
-            <a:srgbClr val="E4F1E9"/>
-          </a:solidFill>
-          <a:ln w="6350">
-            <a:solidFill>
-              <a:srgbClr val="E4F1E9"/>
-            </a:solidFill>
-          </a:ln>
-        </p:spPr>
-        <p:style>
-          <a:lnRef idx="1">
-            <a:schemeClr val="accent1"/>
-          </a:lnRef>
-          <a:fillRef idx="3">
-            <a:schemeClr val="accent1"/>
-          </a:fillRef>
-          <a:effectRef idx="2">
-            <a:schemeClr val="accent1"/>
-          </a:effectRef>
-          <a:fontRef idx="minor">
-            <a:schemeClr val="lt1"/>
-          </a:fontRef>
-        </p:style>
-        <p:txBody>
-          <a:bodyPr rtlCol="0" anchor="ctr"/>
-          <a:lstStyle/>
-          <a:p>
-            <a:pPr algn="ctr"/>
-          </a:p>
-        </p:txBody>
-      </p:sp>
-      <p:sp>
-        <p:nvSpPr>
-          <p:cNvPr id="20" name="TextBox 19"/>
-          <p:cNvSpPr txBox="1"/>
-          <p:nvPr/>
-        </p:nvSpPr>
-        <p:spPr>
-          <a:xfrm>
-            <a:off x="9061704" y="5088636"/>
-            <a:ext cx="2359152" cy="310896"/>
-          </a:xfrm>
-          <a:prstGeom prst="rect">
-            <a:avLst/>
-          </a:prstGeom>
-          <a:noFill/>
-        </p:spPr>
-        <p:txBody>
-          <a:bodyPr wrap="square" lIns="36576" rIns="36576" tIns="18288" bIns="18288" anchor="ctr">
-            <a:spAutoFit/>
-          </a:bodyPr>
-          <a:lstStyle/>
-          <a:p>
-            <a:pPr algn="ctr">
-              <a:spcAft>
-                <a:spcPts val="200"/>
-              </a:spcAft>
-            </a:pPr>
-            <a:r>
-              <a:rPr sz="1400" b="1">
-                <a:solidFill>
-                  <a:srgbClr val="26734E"/>
-                </a:solidFill>
-                <a:latin typeface="Microsoft YaHei"/>
-              </a:rPr>
-              <a:t>Admin 三行状态</a:t>
-            </a:r>
-          </a:p>
-        </p:txBody>
-      </p:sp>
-      <p:sp>
-        <p:nvSpPr>
-          <p:cNvPr id="21" name="TextBox 20"/>
-          <p:cNvSpPr txBox="1"/>
-          <p:nvPr/>
-        </p:nvSpPr>
-        <p:spPr>
-          <a:xfrm>
-            <a:off x="822960" y="5806440"/>
-            <a:ext cx="10515600" cy="292608"/>
-          </a:xfrm>
-          <a:prstGeom prst="rect">
-            <a:avLst/>
-          </a:prstGeom>
-          <a:noFill/>
-        </p:spPr>
-        <p:txBody>
-          <a:bodyPr wrap="square" lIns="36576" rIns="36576" tIns="18288" bIns="18288" anchor="ctr">
-            <a:spAutoFit/>
-          </a:bodyPr>
-          <a:lstStyle/>
-          <a:p>
-            <a:pPr algn="ctr">
-              <a:spcAft>
-                <a:spcPts val="200"/>
-              </a:spcAft>
-            </a:pPr>
-            <a:r>
-              <a:rPr sz="1500" b="0">
+              <a:rPr sz="1400" b="0">
                 <a:solidFill>
                   <a:srgbClr val="61727D"/>
                 </a:solidFill>
                 <a:latin typeface="Microsoft YaHei"/>
               </a:rPr>
-              <a:t>中期彩排 PASS（2026-10-19）· 证据：corpus/local/midterm-rehearsal-2026-10-19/</a:t>
+              <a:t>固定问句与顺序见 docs/中期演示运行卡.md；证据截图：中期答辩材料/彩排截图/</a:t>
             </a:r>
           </a:p>
         </p:txBody>
@@ -11043,7 +10795,7 @@
                 </a:solidFill>
                 <a:latin typeface="Microsoft YaHei"/>
               </a:rPr>
-              <a:t>P7-3 恢复演练通过</a:t>
+              <a:t>教学反馈：辅助闭环</a:t>
             </a:r>
           </a:p>
         </p:txBody>
@@ -11082,7 +10834,7 @@
                 </a:solidFill>
                 <a:latin typeface="Microsoft YaHei"/>
               </a:rPr>
-              <a:t>数据库 dump 与上传资料/解析产物恢复到独立目标，原演示库未被改写</a:t>
+              <a:t>把重复提问与依据不足整理成教师可核对的线索，不直接推断学生能力</a:t>
             </a:r>
           </a:p>
         </p:txBody>
@@ -11141,7 +10893,7 @@
         <p:spPr>
           <a:xfrm>
             <a:off x="566928" y="6510528"/>
-            <a:ext cx="7315200" cy="182880"/>
+            <a:ext cx="8686800" cy="182880"/>
           </a:xfrm>
           <a:prstGeom prst="rect">
             <a:avLst/>
@@ -11166,7 +10918,7 @@
                 </a:solidFill>
                 <a:latin typeface="Microsoft YaHei"/>
               </a:rPr>
-              <a:t>高校课程知识库智能问答 · 中期进展</a:t>
+              <a:t>高校课程知识库智能问答 · 中期进展（参考稿）</a:t>
             </a:r>
           </a:p>
         </p:txBody>
@@ -11218,8 +10970,8 @@
         </p:nvSpPr>
         <p:spPr>
           <a:xfrm>
-            <a:off x="713232" y="1737360"/>
-            <a:ext cx="3072384" cy="1325880"/>
+            <a:off x="640080" y="1645920"/>
+            <a:ext cx="5394960" cy="3794760"/>
           </a:xfrm>
           <a:prstGeom prst="roundRect">
             <a:avLst/>
@@ -11248,7 +11000,7 @@
           </a:fontRef>
         </p:style>
         <p:txBody>
-          <a:bodyPr rtlCol="0" anchor="ctr" wrap="square" lIns="146304" rIns="146304" tIns="91440" bIns="73152"/>
+          <a:bodyPr rtlCol="0" anchor="t" wrap="square" lIns="146304" rIns="146304" tIns="91440" bIns="73152"/>
           <a:lstStyle/>
           <a:p>
             <a:pPr algn="l">
@@ -11257,45 +11009,93 @@
               </a:spcAft>
             </a:pPr>
             <a:r>
-              <a:rPr sz="1800" b="1">
+              <a:rPr sz="1900" b="1">
                 <a:solidFill>
                   <a:srgbClr val="247D78"/>
                 </a:solidFill>
                 <a:latin typeface="Microsoft YaHei"/>
               </a:rPr>
-              <a:t>历史恢复源</a:t>
-            </a:r>
-          </a:p>
-          <a:p>
-            <a:pPr algn="l">
-              <a:spcAft>
-                <a:spcPts val="200"/>
-              </a:spcAft>
-            </a:pPr>
-            <a:r>
-              <a:rPr sz="1400">
+              <a:t>中期已交付</a:t>
+            </a:r>
+          </a:p>
+          <a:p>
+            <a:pPr algn="l">
+              <a:spcAft>
+                <a:spcPts val="200"/>
+              </a:spcAft>
+            </a:pPr>
+            <a:r>
+              <a:rPr sz="1600">
                 <a:solidFill>
                   <a:srgbClr val="263642"/>
                 </a:solidFill>
                 <a:latin typeface="Microsoft YaHei"/>
               </a:rPr>
-              <a:t>univ_course_rag_r7b6_real</a:t>
-            </a:r>
-          </a:p>
-          <a:p>
-            <a:pPr algn="l">
-              <a:spcAft>
-                <a:spcPts val="200"/>
-              </a:spcAft>
-            </a:pPr>
-            <a:r>
-              <a:rPr sz="1400">
+              <a:t>• 规范化问句统计（本课高频）</a:t>
+            </a:r>
+          </a:p>
+          <a:p>
+            <a:pPr algn="l">
+              <a:spcAft>
+                <a:spcPts val="200"/>
+              </a:spcAft>
+            </a:pPr>
+            <a:r>
+              <a:rPr sz="1600">
                 <a:solidFill>
                   <a:srgbClr val="263642"/>
                 </a:solidFill>
                 <a:latin typeface="Microsoft YaHei"/>
               </a:rPr>
-              <a:t>0011 · 4 课 / 17 份 / 385 chunks</a:t>
+              <a:t>• 依据不足问题列表</a:t>
+            </a:r>
+          </a:p>
+          <a:p>
+            <a:pPr algn="l">
+              <a:spcAft>
+                <a:spcPts val="200"/>
+              </a:spcAft>
+            </a:pPr>
+            <a:r>
+              <a:rPr sz="1600">
+                <a:solidFill>
+                  <a:srgbClr val="263642"/>
+                </a:solidFill>
+                <a:latin typeface="Microsoft YaHei"/>
+              </a:rPr>
+              <a:t>• 提问留存窗口</a:t>
+            </a:r>
+          </a:p>
+          <a:p>
+            <a:pPr algn="l">
+              <a:spcAft>
+                <a:spcPts val="200"/>
+              </a:spcAft>
+            </a:pPr>
+            <a:r>
+              <a:rPr sz="1600">
+                <a:solidFill>
+                  <a:srgbClr val="263642"/>
+                </a:solidFill>
+                <a:latin typeface="Microsoft YaHei"/>
+              </a:rPr>
+              <a:t>• 教师视图不展示学生身份</a:t>
+            </a:r>
+          </a:p>
+          <a:p>
+            <a:pPr algn="l">
+              <a:spcAft>
+                <a:spcPts val="200"/>
+              </a:spcAft>
+            </a:pPr>
+            <a:r>
+              <a:rPr sz="1600">
+                <a:solidFill>
+                  <a:srgbClr val="263642"/>
+                </a:solidFill>
+                <a:latin typeface="Microsoft YaHei"/>
+              </a:rPr>
+              <a:t>• 反馈是「待核对线索」，不是成绩画像</a:t>
             </a:r>
           </a:p>
         </p:txBody>
@@ -11308,8 +11108,8 @@
         </p:nvSpPr>
         <p:spPr>
           <a:xfrm>
-            <a:off x="4553712" y="1737360"/>
-            <a:ext cx="3072384" cy="1325880"/>
+            <a:off x="6263640" y="1645920"/>
+            <a:ext cx="5257800" cy="3794760"/>
           </a:xfrm>
           <a:prstGeom prst="roundRect">
             <a:avLst/>
@@ -11338,7 +11138,7 @@
           </a:fontRef>
         </p:style>
         <p:txBody>
-          <a:bodyPr rtlCol="0" anchor="ctr" wrap="square" lIns="146304" rIns="146304" tIns="91440" bIns="73152"/>
+          <a:bodyPr rtlCol="0" anchor="t" wrap="square" lIns="146304" rIns="146304" tIns="91440" bIns="73152"/>
           <a:lstStyle/>
           <a:p>
             <a:pPr algn="l">
@@ -11347,658 +11147,93 @@
               </a:spcAft>
             </a:pPr>
             <a:r>
-              <a:rPr sz="1800" b="1">
+              <a:rPr sz="1900" b="1">
                 <a:solidFill>
                   <a:srgbClr val="D39A37"/>
                 </a:solidFill>
                 <a:latin typeface="Microsoft YaHei"/>
               </a:rPr>
-              <a:t>备份包</a:t>
-            </a:r>
-          </a:p>
-          <a:p>
-            <a:pPr algn="l">
-              <a:spcAft>
-                <a:spcPts val="200"/>
-              </a:spcAft>
-            </a:pPr>
-            <a:r>
-              <a:rPr sz="1400">
+              <a:t>后续争取 / 诚实边界</a:t>
+            </a:r>
+          </a:p>
+          <a:p>
+            <a:pPr algn="l">
+              <a:spcAft>
+                <a:spcPts val="200"/>
+              </a:spcAft>
+            </a:pPr>
+            <a:r>
+              <a:rPr sz="1600">
                 <a:solidFill>
                   <a:srgbClr val="263642"/>
                 </a:solidFill>
                 <a:latin typeface="Microsoft YaHei"/>
               </a:rPr>
-              <a:t>custom-format pg_dump</a:t>
-            </a:r>
-          </a:p>
-          <a:p>
-            <a:pPr algn="l">
-              <a:spcAft>
-                <a:spcPts val="200"/>
-              </a:spcAft>
-            </a:pPr>
-            <a:r>
-              <a:rPr sz="1400">
+              <a:t>• 小规模同义问题组（默认关闭）</a:t>
+            </a:r>
+          </a:p>
+          <a:p>
+            <a:pPr algn="l">
+              <a:spcAft>
+                <a:spcPts val="200"/>
+              </a:spcAft>
+            </a:pPr>
+            <a:r>
+              <a:rPr sz="1600">
                 <a:solidFill>
                   <a:srgbClr val="263642"/>
                 </a:solidFill>
                 <a:latin typeface="Microsoft YaHei"/>
               </a:rPr>
-              <a:t>SHA-256 与归档目录已登记</a:t>
-            </a:r>
-          </a:p>
-        </p:txBody>
-      </p:sp>
-      <p:sp>
-        <p:nvSpPr>
-          <p:cNvPr id="9" name="Rounded Rectangle 8"/>
-          <p:cNvSpPr/>
-          <p:nvPr/>
-        </p:nvSpPr>
-        <p:spPr>
-          <a:xfrm>
-            <a:off x="8394192" y="1737360"/>
-            <a:ext cx="3072384" cy="1325880"/>
-          </a:xfrm>
-          <a:prstGeom prst="roundRect">
-            <a:avLst/>
-          </a:prstGeom>
-          <a:solidFill>
-            <a:srgbClr val="163247"/>
-          </a:solidFill>
-          <a:ln w="13970">
-            <a:solidFill>
-              <a:srgbClr val="163247"/>
-            </a:solidFill>
-          </a:ln>
-        </p:spPr>
-        <p:style>
-          <a:lnRef idx="1">
-            <a:schemeClr val="accent1"/>
-          </a:lnRef>
-          <a:fillRef idx="3">
-            <a:schemeClr val="accent1"/>
-          </a:fillRef>
-          <a:effectRef idx="2">
-            <a:schemeClr val="accent1"/>
-          </a:effectRef>
-          <a:fontRef idx="minor">
-            <a:schemeClr val="lt1"/>
-          </a:fontRef>
-        </p:style>
-        <p:txBody>
-          <a:bodyPr rtlCol="0" anchor="ctr" wrap="square" lIns="146304" rIns="146304" tIns="91440" bIns="73152"/>
-          <a:lstStyle/>
-          <a:p>
-            <a:pPr algn="l">
-              <a:spcAft>
-                <a:spcPts val="600"/>
-              </a:spcAft>
-            </a:pPr>
-            <a:r>
-              <a:rPr sz="1800" b="1">
-                <a:solidFill>
-                  <a:srgbClr val="FFFFFF"/>
-                </a:solidFill>
-                <a:latin typeface="Microsoft YaHei"/>
-              </a:rPr>
-              <a:t>隔离恢复库</a:t>
-            </a:r>
-          </a:p>
-          <a:p>
-            <a:pPr algn="l">
-              <a:spcAft>
-                <a:spcPts val="200"/>
-              </a:spcAft>
-            </a:pPr>
-            <a:r>
-              <a:rPr sz="1300">
-                <a:solidFill>
-                  <a:srgbClr val="FFFFFF"/>
-                </a:solidFill>
-                <a:latin typeface="Microsoft YaHei"/>
-              </a:rPr>
-              <a:t>univ_course_rag_r9_restore_20261018</a:t>
-            </a:r>
-          </a:p>
-          <a:p>
-            <a:pPr algn="l">
-              <a:spcAft>
-                <a:spcPts val="200"/>
-              </a:spcAft>
-            </a:pPr>
-            <a:r>
-              <a:rPr sz="1300">
-                <a:solidFill>
-                  <a:srgbClr val="FFFFFF"/>
-                </a:solidFill>
-                <a:latin typeface="Microsoft YaHei"/>
-              </a:rPr>
-              <a:t>pgvector 0.8.7</a:t>
-            </a:r>
-          </a:p>
-        </p:txBody>
-      </p:sp>
-      <p:cxnSp>
-        <p:nvCxnSpPr>
-          <p:cNvPr id="10" name="Connector 9"/>
-          <p:cNvCxnSpPr/>
-          <p:nvPr/>
-        </p:nvCxnSpPr>
-        <p:spPr>
-          <a:xfrm>
-            <a:off x="3785615" y="2395728"/>
-            <a:ext cx="676657" cy="0"/>
-          </a:xfrm>
-          <a:prstGeom prst="line">
-            <a:avLst/>
-          </a:prstGeom>
-          <a:ln w="27940">
-            <a:solidFill>
-              <a:srgbClr val="247D78"/>
-            </a:solidFill>
-          </a:ln>
-        </p:spPr>
-        <p:style>
-          <a:lnRef idx="2">
-            <a:schemeClr val="accent1"/>
-          </a:lnRef>
-          <a:fillRef idx="0">
-            <a:schemeClr val="accent1"/>
-          </a:fillRef>
-          <a:effectRef idx="1">
-            <a:schemeClr val="accent1"/>
-          </a:effectRef>
-          <a:fontRef idx="minor">
-            <a:schemeClr val="tx1"/>
-          </a:fontRef>
-        </p:style>
-      </p:cxnSp>
-      <p:cxnSp>
-        <p:nvCxnSpPr>
-          <p:cNvPr id="11" name="Connector 10"/>
-          <p:cNvCxnSpPr/>
-          <p:nvPr/>
-        </p:nvCxnSpPr>
-        <p:spPr>
-          <a:xfrm>
-            <a:off x="7626096" y="2395728"/>
-            <a:ext cx="676656" cy="0"/>
-          </a:xfrm>
-          <a:prstGeom prst="line">
-            <a:avLst/>
-          </a:prstGeom>
-          <a:ln w="27940">
-            <a:solidFill>
-              <a:srgbClr val="D39A37"/>
-            </a:solidFill>
-          </a:ln>
-        </p:spPr>
-        <p:style>
-          <a:lnRef idx="2">
-            <a:schemeClr val="accent1"/>
-          </a:lnRef>
-          <a:fillRef idx="0">
-            <a:schemeClr val="accent1"/>
-          </a:fillRef>
-          <a:effectRef idx="1">
-            <a:schemeClr val="accent1"/>
-          </a:effectRef>
-          <a:fontRef idx="minor">
-            <a:schemeClr val="tx1"/>
-          </a:fontRef>
-        </p:style>
-      </p:cxnSp>
-      <p:sp>
-        <p:nvSpPr>
-          <p:cNvPr id="12" name="Rounded Rectangle 11"/>
-          <p:cNvSpPr/>
-          <p:nvPr/>
-        </p:nvSpPr>
-        <p:spPr>
-          <a:xfrm>
-            <a:off x="777240" y="3584448"/>
-            <a:ext cx="3154680" cy="1024128"/>
-          </a:xfrm>
-          <a:prstGeom prst="roundRect">
-            <a:avLst/>
-          </a:prstGeom>
-          <a:solidFill>
-            <a:srgbClr val="FFFFFF"/>
-          </a:solidFill>
-          <a:ln w="13970">
-            <a:solidFill>
-              <a:srgbClr val="D6E0E5"/>
-            </a:solidFill>
-          </a:ln>
-        </p:spPr>
-        <p:style>
-          <a:lnRef idx="1">
-            <a:schemeClr val="accent1"/>
-          </a:lnRef>
-          <a:fillRef idx="3">
-            <a:schemeClr val="accent1"/>
-          </a:fillRef>
-          <a:effectRef idx="2">
-            <a:schemeClr val="accent1"/>
-          </a:effectRef>
-          <a:fontRef idx="minor">
-            <a:schemeClr val="lt1"/>
-          </a:fontRef>
-        </p:style>
-        <p:txBody>
-          <a:bodyPr rtlCol="0" anchor="ctr"/>
-          <a:lstStyle/>
-          <a:p>
-            <a:pPr algn="ctr"/>
-          </a:p>
-        </p:txBody>
-      </p:sp>
-      <p:sp>
-        <p:nvSpPr>
-          <p:cNvPr id="13" name="TextBox 12"/>
-          <p:cNvSpPr txBox="1"/>
-          <p:nvPr/>
-        </p:nvSpPr>
-        <p:spPr>
-          <a:xfrm>
-            <a:off x="850392" y="3675887"/>
-            <a:ext cx="3008376" cy="457200"/>
-          </a:xfrm>
-          <a:prstGeom prst="rect">
-            <a:avLst/>
-          </a:prstGeom>
-          <a:noFill/>
-        </p:spPr>
-        <p:txBody>
-          <a:bodyPr wrap="square" lIns="36576" rIns="36576" tIns="18288" bIns="18288" anchor="ctr">
-            <a:spAutoFit/>
-          </a:bodyPr>
-          <a:lstStyle/>
-          <a:p>
-            <a:pPr algn="ctr">
-              <a:spcAft>
-                <a:spcPts val="200"/>
-              </a:spcAft>
-            </a:pPr>
-            <a:r>
-              <a:rPr sz="2700" b="1">
-                <a:solidFill>
-                  <a:srgbClr val="26734E"/>
-                </a:solidFill>
-                <a:latin typeface="Microsoft YaHei"/>
-              </a:rPr>
-              <a:t>17/17</a:t>
-            </a:r>
-          </a:p>
-        </p:txBody>
-      </p:sp>
-      <p:sp>
-        <p:nvSpPr>
-          <p:cNvPr id="14" name="TextBox 13"/>
-          <p:cNvSpPr txBox="1"/>
-          <p:nvPr/>
-        </p:nvSpPr>
-        <p:spPr>
-          <a:xfrm>
-            <a:off x="850392" y="4169663"/>
-            <a:ext cx="3008376" cy="274320"/>
-          </a:xfrm>
-          <a:prstGeom prst="rect">
-            <a:avLst/>
-          </a:prstGeom>
-          <a:noFill/>
-        </p:spPr>
-        <p:txBody>
-          <a:bodyPr wrap="square" lIns="36576" rIns="36576" tIns="18288" bIns="18288" anchor="ctr">
-            <a:spAutoFit/>
-          </a:bodyPr>
-          <a:lstStyle/>
-          <a:p>
-            <a:pPr algn="ctr">
-              <a:spcAft>
-                <a:spcPts val="200"/>
-              </a:spcAft>
-            </a:pPr>
-            <a:r>
-              <a:rPr sz="1300" b="0">
-                <a:solidFill>
-                  <a:srgbClr val="61727D"/>
-                </a:solidFill>
-                <a:latin typeface="Microsoft YaHei"/>
-              </a:rPr>
-              <a:t>上传 PDF 哈希/页数/存储边界通过</a:t>
-            </a:r>
-          </a:p>
-        </p:txBody>
-      </p:sp>
-      <p:sp>
-        <p:nvSpPr>
-          <p:cNvPr id="15" name="Rounded Rectangle 14"/>
-          <p:cNvSpPr/>
-          <p:nvPr/>
-        </p:nvSpPr>
-        <p:spPr>
-          <a:xfrm>
-            <a:off x="4517136" y="3584448"/>
-            <a:ext cx="3154680" cy="1024128"/>
-          </a:xfrm>
-          <a:prstGeom prst="roundRect">
-            <a:avLst/>
-          </a:prstGeom>
-          <a:solidFill>
-            <a:srgbClr val="FFFFFF"/>
-          </a:solidFill>
-          <a:ln w="13970">
-            <a:solidFill>
-              <a:srgbClr val="D6E0E5"/>
-            </a:solidFill>
-          </a:ln>
-        </p:spPr>
-        <p:style>
-          <a:lnRef idx="1">
-            <a:schemeClr val="accent1"/>
-          </a:lnRef>
-          <a:fillRef idx="3">
-            <a:schemeClr val="accent1"/>
-          </a:fillRef>
-          <a:effectRef idx="2">
-            <a:schemeClr val="accent1"/>
-          </a:effectRef>
-          <a:fontRef idx="minor">
-            <a:schemeClr val="lt1"/>
-          </a:fontRef>
-        </p:style>
-        <p:txBody>
-          <a:bodyPr rtlCol="0" anchor="ctr"/>
-          <a:lstStyle/>
-          <a:p>
-            <a:pPr algn="ctr"/>
-          </a:p>
-        </p:txBody>
-      </p:sp>
-      <p:sp>
-        <p:nvSpPr>
-          <p:cNvPr id="16" name="TextBox 15"/>
-          <p:cNvSpPr txBox="1"/>
-          <p:nvPr/>
-        </p:nvSpPr>
-        <p:spPr>
-          <a:xfrm>
-            <a:off x="4590288" y="3675887"/>
-            <a:ext cx="3008376" cy="457200"/>
-          </a:xfrm>
-          <a:prstGeom prst="rect">
-            <a:avLst/>
-          </a:prstGeom>
-          <a:noFill/>
-        </p:spPr>
-        <p:txBody>
-          <a:bodyPr wrap="square" lIns="36576" rIns="36576" tIns="18288" bIns="18288" anchor="ctr">
-            <a:spAutoFit/>
-          </a:bodyPr>
-          <a:lstStyle/>
-          <a:p>
-            <a:pPr algn="ctr">
-              <a:spcAft>
-                <a:spcPts val="200"/>
-              </a:spcAft>
-            </a:pPr>
-            <a:r>
-              <a:rPr sz="2700" b="1">
-                <a:solidFill>
-                  <a:srgbClr val="247D78"/>
-                </a:solidFill>
-                <a:latin typeface="Microsoft YaHei"/>
-              </a:rPr>
-              <a:t>17/17</a:t>
-            </a:r>
-          </a:p>
-        </p:txBody>
-      </p:sp>
-      <p:sp>
-        <p:nvSpPr>
-          <p:cNvPr id="17" name="TextBox 16"/>
-          <p:cNvSpPr txBox="1"/>
-          <p:nvPr/>
-        </p:nvSpPr>
-        <p:spPr>
-          <a:xfrm>
-            <a:off x="4590288" y="4169663"/>
-            <a:ext cx="3008376" cy="274320"/>
-          </a:xfrm>
-          <a:prstGeom prst="rect">
-            <a:avLst/>
-          </a:prstGeom>
-          <a:noFill/>
-        </p:spPr>
-        <p:txBody>
-          <a:bodyPr wrap="square" lIns="36576" rIns="36576" tIns="18288" bIns="18288" anchor="ctr">
-            <a:spAutoFit/>
-          </a:bodyPr>
-          <a:lstStyle/>
-          <a:p>
-            <a:pPr algn="ctr">
-              <a:spcAft>
-                <a:spcPts val="200"/>
-              </a:spcAft>
-            </a:pPr>
-            <a:r>
-              <a:rPr sz="1300" b="0">
-                <a:solidFill>
-                  <a:srgbClr val="61727D"/>
-                </a:solidFill>
-                <a:latin typeface="Microsoft YaHei"/>
-              </a:rPr>
-              <a:t>解析来源身份核验通过</a:t>
-            </a:r>
-          </a:p>
-        </p:txBody>
-      </p:sp>
-      <p:sp>
-        <p:nvSpPr>
-          <p:cNvPr id="18" name="Rounded Rectangle 17"/>
-          <p:cNvSpPr/>
-          <p:nvPr/>
-        </p:nvSpPr>
-        <p:spPr>
-          <a:xfrm>
-            <a:off x="8257031" y="3584448"/>
-            <a:ext cx="3154680" cy="1024128"/>
-          </a:xfrm>
-          <a:prstGeom prst="roundRect">
-            <a:avLst/>
-          </a:prstGeom>
-          <a:solidFill>
-            <a:srgbClr val="FFFFFF"/>
-          </a:solidFill>
-          <a:ln w="13970">
-            <a:solidFill>
-              <a:srgbClr val="D6E0E5"/>
-            </a:solidFill>
-          </a:ln>
-        </p:spPr>
-        <p:style>
-          <a:lnRef idx="1">
-            <a:schemeClr val="accent1"/>
-          </a:lnRef>
-          <a:fillRef idx="3">
-            <a:schemeClr val="accent1"/>
-          </a:fillRef>
-          <a:effectRef idx="2">
-            <a:schemeClr val="accent1"/>
-          </a:effectRef>
-          <a:fontRef idx="minor">
-            <a:schemeClr val="lt1"/>
-          </a:fontRef>
-        </p:style>
-        <p:txBody>
-          <a:bodyPr rtlCol="0" anchor="ctr"/>
-          <a:lstStyle/>
-          <a:p>
-            <a:pPr algn="ctr"/>
-          </a:p>
-        </p:txBody>
-      </p:sp>
-      <p:sp>
-        <p:nvSpPr>
-          <p:cNvPr id="19" name="TextBox 18"/>
-          <p:cNvSpPr txBox="1"/>
-          <p:nvPr/>
-        </p:nvSpPr>
-        <p:spPr>
-          <a:xfrm>
-            <a:off x="8330183" y="3675887"/>
-            <a:ext cx="3008376" cy="457200"/>
-          </a:xfrm>
-          <a:prstGeom prst="rect">
-            <a:avLst/>
-          </a:prstGeom>
-          <a:noFill/>
-        </p:spPr>
-        <p:txBody>
-          <a:bodyPr wrap="square" lIns="36576" rIns="36576" tIns="18288" bIns="18288" anchor="ctr">
-            <a:spAutoFit/>
-          </a:bodyPr>
-          <a:lstStyle/>
-          <a:p>
-            <a:pPr algn="ctr">
-              <a:spcAft>
-                <a:spcPts val="200"/>
-              </a:spcAft>
-            </a:pPr>
-            <a:r>
-              <a:rPr sz="2700" b="1">
-                <a:solidFill>
-                  <a:srgbClr val="163247"/>
-                </a:solidFill>
-                <a:latin typeface="Microsoft YaHei"/>
-              </a:rPr>
-              <a:t>100%</a:t>
-            </a:r>
-          </a:p>
-        </p:txBody>
-      </p:sp>
-      <p:sp>
-        <p:nvSpPr>
-          <p:cNvPr id="20" name="TextBox 19"/>
-          <p:cNvSpPr txBox="1"/>
-          <p:nvPr/>
-        </p:nvSpPr>
-        <p:spPr>
-          <a:xfrm>
-            <a:off x="8330183" y="4169663"/>
-            <a:ext cx="3008376" cy="274320"/>
-          </a:xfrm>
-          <a:prstGeom prst="rect">
-            <a:avLst/>
-          </a:prstGeom>
-          <a:noFill/>
-        </p:spPr>
-        <p:txBody>
-          <a:bodyPr wrap="square" lIns="36576" rIns="36576" tIns="18288" bIns="18288" anchor="ctr">
-            <a:spAutoFit/>
-          </a:bodyPr>
-          <a:lstStyle/>
-          <a:p>
-            <a:pPr algn="ctr">
-              <a:spcAft>
-                <a:spcPts val="200"/>
-              </a:spcAft>
-            </a:pPr>
-            <a:r>
-              <a:rPr sz="1300" b="0">
-                <a:solidFill>
-                  <a:srgbClr val="61727D"/>
-                </a:solidFill>
-                <a:latin typeface="Microsoft YaHei"/>
-              </a:rPr>
-              <a:t>全部 public 表行数匹配</a:t>
-            </a:r>
-          </a:p>
-        </p:txBody>
-      </p:sp>
-      <p:sp>
-        <p:nvSpPr>
-          <p:cNvPr id="21" name="Rounded Rectangle 20"/>
-          <p:cNvSpPr/>
-          <p:nvPr/>
-        </p:nvSpPr>
-        <p:spPr>
-          <a:xfrm>
-            <a:off x="749808" y="4983480"/>
-            <a:ext cx="10661904" cy="731520"/>
-          </a:xfrm>
-          <a:prstGeom prst="roundRect">
-            <a:avLst/>
-          </a:prstGeom>
-          <a:solidFill>
-            <a:srgbClr val="FBF0D8"/>
-          </a:solidFill>
-          <a:ln w="13970">
-            <a:solidFill>
-              <a:srgbClr val="FBF0D8"/>
-            </a:solidFill>
-          </a:ln>
-        </p:spPr>
-        <p:style>
-          <a:lnRef idx="1">
-            <a:schemeClr val="accent1"/>
-          </a:lnRef>
-          <a:fillRef idx="3">
-            <a:schemeClr val="accent1"/>
-          </a:fillRef>
-          <a:effectRef idx="2">
-            <a:schemeClr val="accent1"/>
-          </a:effectRef>
-          <a:fontRef idx="minor">
-            <a:schemeClr val="lt1"/>
-          </a:fontRef>
-        </p:style>
-        <p:txBody>
-          <a:bodyPr rtlCol="0" anchor="ctr"/>
-          <a:lstStyle/>
-          <a:p>
-            <a:pPr algn="ctr"/>
-          </a:p>
-        </p:txBody>
-      </p:sp>
-      <p:sp>
-        <p:nvSpPr>
-          <p:cNvPr id="22" name="TextBox 21"/>
-          <p:cNvSpPr txBox="1"/>
-          <p:nvPr/>
-        </p:nvSpPr>
-        <p:spPr>
-          <a:xfrm>
-            <a:off x="932688" y="5138928"/>
-            <a:ext cx="10287000" cy="384048"/>
-          </a:xfrm>
-          <a:prstGeom prst="rect">
-            <a:avLst/>
-          </a:prstGeom>
-          <a:noFill/>
-        </p:spPr>
-        <p:txBody>
-          <a:bodyPr wrap="square" lIns="36576" rIns="36576" tIns="18288" bIns="18288" anchor="ctr">
-            <a:spAutoFit/>
-          </a:bodyPr>
-          <a:lstStyle/>
-          <a:p>
-            <a:pPr algn="ctr">
-              <a:spcAft>
-                <a:spcPts val="200"/>
-              </a:spcAft>
-            </a:pPr>
-            <a:r>
-              <a:rPr sz="1700" b="1">
-                <a:solidFill>
-                  <a:srgbClr val="163247"/>
-                </a:solidFill>
-                <a:latin typeface="Microsoft YaHei"/>
-              </a:rPr>
-              <a:t>源库、旧库、Fake 库规模未变；无云调用、无全量重入库。Demo Reset 与成本/资源专项仍待验。</a:t>
+              <a:t>• 阈值未校准，效果待真实条件验证</a:t>
+            </a:r>
+          </a:p>
+          <a:p>
+            <a:pPr algn="l">
+              <a:spcAft>
+                <a:spcPts val="200"/>
+              </a:spcAft>
+            </a:pPr>
+            <a:r>
+              <a:rPr sz="1600">
+                <a:solidFill>
+                  <a:srgbClr val="263642"/>
+                </a:solidFill>
+                <a:latin typeface="Microsoft YaHei"/>
+              </a:rPr>
+              <a:t>• 不据此宣称教学质量提升</a:t>
+            </a:r>
+          </a:p>
+          <a:p>
+            <a:pPr algn="l">
+              <a:spcAft>
+                <a:spcPts val="200"/>
+              </a:spcAft>
+            </a:pPr>
+            <a:r>
+              <a:rPr sz="1600">
+                <a:solidFill>
+                  <a:srgbClr val="263642"/>
+                </a:solidFill>
+                <a:latin typeface="Microsoft YaHei"/>
+              </a:rPr>
+              <a:t>• 与学生问答共用课程边界与留存策略</a:t>
+            </a:r>
+          </a:p>
+          <a:p>
+            <a:pPr algn="l">
+              <a:spcAft>
+                <a:spcPts val="200"/>
+              </a:spcAft>
+            </a:pPr>
+            <a:r>
+              <a:rPr sz="1600">
+                <a:solidFill>
+                  <a:srgbClr val="263642"/>
+                </a:solidFill>
+                <a:latin typeface="Microsoft YaHei"/>
+              </a:rPr>
+              <a:t>• 演示时可打开教师侧反馈入口一眼带过</a:t>
             </a:r>
           </a:p>
         </p:txBody>
@@ -12063,7 +11298,7 @@
                 </a:solidFill>
                 <a:latin typeface="Microsoft YaHei"/>
               </a:rPr>
-              <a:t>已知限制：不把原型能力夸大</a:t>
+              <a:t>诚实限制</a:t>
             </a:r>
           </a:p>
         </p:txBody>
@@ -12102,7 +11337,7 @@
                 </a:solidFill>
                 <a:latin typeface="Microsoft YaHei"/>
               </a:rPr>
-              <a:t>当前工程闭环与通用 RAG 质量是两回事，汇报时明确区分</a:t>
+              <a:t>工程闭环与通用 RAG 质量是两回事；只陈述有证据的能力</a:t>
             </a:r>
           </a:p>
         </p:txBody>
@@ -12161,7 +11396,7 @@
         <p:spPr>
           <a:xfrm>
             <a:off x="566928" y="6510528"/>
-            <a:ext cx="7315200" cy="182880"/>
+            <a:ext cx="8686800" cy="182880"/>
           </a:xfrm>
           <a:prstGeom prst="rect">
             <a:avLst/>
@@ -12186,7 +11421,7 @@
                 </a:solidFill>
                 <a:latin typeface="Microsoft YaHei"/>
               </a:rPr>
-              <a:t>高校课程知识库智能问答 · 中期进展</a:t>
+              <a:t>高校课程知识库智能问答 · 中期进展（参考稿）</a:t>
             </a:r>
           </a:p>
         </p:txBody>
@@ -12238,18 +11473,18 @@
         </p:nvSpPr>
         <p:spPr>
           <a:xfrm>
-            <a:off x="731520" y="1737360"/>
-            <a:ext cx="5138928" cy="3493008"/>
+            <a:off x="640080" y="1645920"/>
+            <a:ext cx="5394960" cy="3794760"/>
           </a:xfrm>
           <a:prstGeom prst="roundRect">
             <a:avLst/>
           </a:prstGeom>
           <a:solidFill>
-            <a:srgbClr val="FFFFFF"/>
+            <a:srgbClr val="F9E7E5"/>
           </a:solidFill>
           <a:ln w="13970">
             <a:solidFill>
-              <a:srgbClr val="D6E0E5"/>
+              <a:srgbClr val="B84242"/>
             </a:solidFill>
           </a:ln>
         </p:spPr>
@@ -12268,7 +11503,7 @@
           </a:fontRef>
         </p:style>
         <p:txBody>
-          <a:bodyPr rtlCol="0" anchor="ctr" wrap="square" lIns="146304" rIns="146304" tIns="91440" bIns="73152"/>
+          <a:bodyPr rtlCol="0" anchor="t" wrap="square" lIns="146304" rIns="146304" tIns="91440" bIns="73152"/>
           <a:lstStyle/>
           <a:p>
             <a:pPr algn="l">
@@ -12277,93 +11512,93 @@
               </a:spcAft>
             </a:pPr>
             <a:r>
-              <a:rPr sz="2000" b="1">
+              <a:rPr sz="1900" b="1">
                 <a:solidFill>
                   <a:srgbClr val="B84242"/>
                 </a:solidFill>
                 <a:latin typeface="Microsoft YaHei"/>
               </a:rPr>
-              <a:t>评测与答案质量</a:t>
-            </a:r>
-          </a:p>
-          <a:p>
-            <a:pPr algn="l">
-              <a:spcAft>
-                <a:spcPts val="200"/>
-              </a:spcAft>
-            </a:pPr>
-            <a:r>
-              <a:rPr sz="1700">
+              <a:t>评价口径</a:t>
+            </a:r>
+          </a:p>
+          <a:p>
+            <a:pPr algn="l">
+              <a:spcAft>
+                <a:spcPts val="200"/>
+              </a:spcAft>
+            </a:pPr>
+            <a:r>
+              <a:rPr sz="1600">
                 <a:solidFill>
                   <a:srgbClr val="263642"/>
                 </a:solidFill>
                 <a:latin typeface="Microsoft YaHei"/>
               </a:rPr>
-              <a:t>• AI 预标未独立人工复核</a:t>
-            </a:r>
-          </a:p>
-          <a:p>
-            <a:pPr algn="l">
-              <a:spcAft>
-                <a:spcPts val="200"/>
-              </a:spcAft>
-            </a:pPr>
-            <a:r>
-              <a:rPr sz="1700">
+              <a:t>• 事实正确 ≠ 引用支持</a:t>
+            </a:r>
+          </a:p>
+          <a:p>
+            <a:pPr algn="l">
+              <a:spcAft>
+                <a:spcPts val="200"/>
+              </a:spcAft>
+            </a:pPr>
+            <a:r>
+              <a:rPr sz="1600">
                 <a:solidFill>
                   <a:srgbClr val="263642"/>
                 </a:solidFill>
                 <a:latin typeface="Microsoft YaHei"/>
               </a:rPr>
-              <a:t>• 0.45 阈值未校准</a:t>
-            </a:r>
-          </a:p>
-          <a:p>
-            <a:pPr algn="l">
-              <a:spcAft>
-                <a:spcPts val="200"/>
-              </a:spcAft>
-            </a:pPr>
-            <a:r>
-              <a:rPr sz="1700">
+              <a:t>• 12/12 与 4/4 是弱自动化规则</a:t>
+            </a:r>
+          </a:p>
+          <a:p>
+            <a:pPr algn="l">
+              <a:spcAft>
+                <a:spcPts val="200"/>
+              </a:spcAft>
+            </a:pPr>
+            <a:r>
+              <a:rPr sz="1600">
                 <a:solidFill>
                   <a:srgbClr val="263642"/>
                 </a:solidFill>
                 <a:latin typeface="Microsoft YaHei"/>
               </a:rPr>
-              <a:t>• Hybrid 未运行生成</a:t>
-            </a:r>
-          </a:p>
-          <a:p>
-            <a:pPr algn="l">
-              <a:spcAft>
-                <a:spcPts val="200"/>
-              </a:spcAft>
-            </a:pPr>
-            <a:r>
-              <a:rPr sz="1700">
+              <a:t>• AI 预标题集未经独立人工复核</a:t>
+            </a:r>
+          </a:p>
+          <a:p>
+            <a:pPr algn="l">
+              <a:spcAft>
+                <a:spcPts val="200"/>
+              </a:spcAft>
+            </a:pPr>
+            <a:r>
+              <a:rPr sz="1600">
                 <a:solidFill>
                   <a:srgbClr val="263642"/>
                 </a:solidFill>
                 <a:latin typeface="Microsoft YaHei"/>
               </a:rPr>
-              <a:t>• 合法引用不等于事实主张被支持</a:t>
-            </a:r>
-          </a:p>
-          <a:p>
-            <a:pPr algn="l">
-              <a:spcAft>
-                <a:spcPts val="200"/>
-              </a:spcAft>
-            </a:pPr>
-            <a:r>
-              <a:rPr sz="1700">
+              <a:t>• 余弦阈值 0.45 未校准</a:t>
+            </a:r>
+          </a:p>
+          <a:p>
+            <a:pPr algn="l">
+              <a:spcAft>
+                <a:spcPts val="200"/>
+              </a:spcAft>
+            </a:pPr>
+            <a:r>
+              <a:rPr sz="1600">
                 <a:solidFill>
                   <a:srgbClr val="263642"/>
                 </a:solidFill>
                 <a:latin typeface="Microsoft YaHei"/>
               </a:rPr>
-              <a:t>• PHIL-T02 体现命中与回答质量的差别</a:t>
+              <a:t>• Hybrid/rerank 不作中期主结论</a:t>
             </a:r>
           </a:p>
         </p:txBody>
@@ -12376,18 +11611,18 @@
         </p:nvSpPr>
         <p:spPr>
           <a:xfrm>
-            <a:off x="6199632" y="1737360"/>
-            <a:ext cx="5138928" cy="3493008"/>
+            <a:off x="6263640" y="1645920"/>
+            <a:ext cx="5257800" cy="3794760"/>
           </a:xfrm>
           <a:prstGeom prst="roundRect">
             <a:avLst/>
           </a:prstGeom>
           <a:solidFill>
-            <a:srgbClr val="FFFFFF"/>
+            <a:srgbClr val="FBF0D8"/>
           </a:solidFill>
           <a:ln w="13970">
             <a:solidFill>
-              <a:srgbClr val="D6E0E5"/>
+              <a:srgbClr val="D39A37"/>
             </a:solidFill>
           </a:ln>
         </p:spPr>
@@ -12406,7 +11641,7 @@
           </a:fontRef>
         </p:style>
         <p:txBody>
-          <a:bodyPr rtlCol="0" anchor="ctr" wrap="square" lIns="146304" rIns="146304" tIns="91440" bIns="73152"/>
+          <a:bodyPr rtlCol="0" anchor="t" wrap="square" lIns="146304" rIns="146304" tIns="91440" bIns="73152"/>
           <a:lstStyle/>
           <a:p>
             <a:pPr algn="l">
@@ -12415,132 +11650,93 @@
               </a:spcAft>
             </a:pPr>
             <a:r>
-              <a:rPr sz="2000" b="1">
+              <a:rPr sz="1900" b="1">
                 <a:solidFill>
                   <a:srgbClr val="D39A37"/>
                 </a:solidFill>
                 <a:latin typeface="Microsoft YaHei"/>
               </a:rPr>
-              <a:t>运行与交付边界</a:t>
-            </a:r>
-          </a:p>
-          <a:p>
-            <a:pPr algn="l">
-              <a:spcAft>
-                <a:spcPts val="200"/>
-              </a:spcAft>
-            </a:pPr>
-            <a:r>
-              <a:rPr sz="1700">
+              <a:t>能力与交付边界</a:t>
+            </a:r>
+          </a:p>
+          <a:p>
+            <a:pPr algn="l">
+              <a:spcAft>
+                <a:spcPts val="200"/>
+              </a:spcAft>
+            </a:pPr>
+            <a:r>
+              <a:rPr sz="1600">
                 <a:solidFill>
                   <a:srgbClr val="263642"/>
                 </a:solidFill>
                 <a:latin typeface="Microsoft YaHei"/>
               </a:rPr>
-              <a:t>• 供应商实际人民币账单未核对</a:t>
-            </a:r>
-          </a:p>
-          <a:p>
-            <a:pPr algn="l">
-              <a:spcAft>
-                <a:spcPts val="200"/>
-              </a:spcAft>
-            </a:pPr>
-            <a:r>
-              <a:rPr sz="1700">
+              <a:t>• 非 OCR / 公式 / 图表理解主线</a:t>
+            </a:r>
+          </a:p>
+          <a:p>
+            <a:pPr algn="l">
+              <a:spcAft>
+                <a:spcPts val="200"/>
+              </a:spcAft>
+            </a:pPr>
+            <a:r>
+              <a:rPr sz="1600">
                 <a:solidFill>
                   <a:srgbClr val="263642"/>
                 </a:solidFill>
                 <a:latin typeface="Microsoft YaHei"/>
               </a:rPr>
-              <a:t>• Python 依赖声明未完全锁定</a:t>
-            </a:r>
-          </a:p>
-          <a:p>
-            <a:pPr algn="l">
-              <a:spcAft>
-                <a:spcPts val="200"/>
-              </a:spcAft>
-            </a:pPr>
-            <a:r>
-              <a:rPr sz="1700">
+              <a:t>• 非校园网生产部署</a:t>
+            </a:r>
+          </a:p>
+          <a:p>
+            <a:pPr algn="l">
+              <a:spcAft>
+                <a:spcPts val="200"/>
+              </a:spcAft>
+            </a:pPr>
+            <a:r>
+              <a:rPr sz="1600">
                 <a:solidFill>
                   <a:srgbClr val="263642"/>
                 </a:solidFill>
                 <a:latin typeface="Microsoft YaHei"/>
               </a:rPr>
-              <a:t>• OCR/视觉/公式图表理解未纳入主线</a:t>
-            </a:r>
-          </a:p>
-          <a:p>
-            <a:pPr algn="l">
-              <a:spcAft>
-                <a:spcPts val="200"/>
-              </a:spcAft>
-            </a:pPr>
-            <a:r>
-              <a:rPr sz="1700">
+              <a:t>• 供应商账单、依赖锁定待验</a:t>
+            </a:r>
+          </a:p>
+          <a:p>
+            <a:pPr algn="l">
+              <a:spcAft>
+                <a:spcPts val="200"/>
+              </a:spcAft>
+            </a:pPr>
+            <a:r>
+              <a:rPr sz="1600">
                 <a:solidFill>
                   <a:srgbClr val="263642"/>
                 </a:solidFill>
                 <a:latin typeface="Microsoft YaHei"/>
               </a:rPr>
-              <a:t>• Demo Reset 与成本/资源专项待验</a:t>
-            </a:r>
-          </a:p>
-          <a:p>
-            <a:pPr algn="l">
-              <a:spcAft>
-                <a:spcPts val="200"/>
-              </a:spcAft>
-            </a:pPr>
-            <a:r>
-              <a:rPr sz="1700">
+              <a:t>• Demo Reset / 成本专项待验</a:t>
+            </a:r>
+          </a:p>
+          <a:p>
+            <a:pPr algn="l">
+              <a:spcAft>
+                <a:spcPts val="200"/>
+              </a:spcAft>
+            </a:pPr>
+            <a:r>
+              <a:rPr sz="1600">
                 <a:solidFill>
                   <a:srgbClr val="263642"/>
                 </a:solidFill>
                 <a:latin typeface="Microsoft YaHei"/>
               </a:rPr>
               <a:t>• 非开发者独立试用尚未完成</a:t>
-            </a:r>
-          </a:p>
-        </p:txBody>
-      </p:sp>
-      <p:sp>
-        <p:nvSpPr>
-          <p:cNvPr id="9" name="TextBox 8"/>
-          <p:cNvSpPr txBox="1"/>
-          <p:nvPr/>
-        </p:nvSpPr>
-        <p:spPr>
-          <a:xfrm>
-            <a:off x="868680" y="5669280"/>
-            <a:ext cx="10469880" cy="329184"/>
-          </a:xfrm>
-          <a:prstGeom prst="rect">
-            <a:avLst/>
-          </a:prstGeom>
-          <a:noFill/>
-        </p:spPr>
-        <p:txBody>
-          <a:bodyPr wrap="square" lIns="36576" rIns="36576" tIns="18288" bIns="18288" anchor="ctr">
-            <a:spAutoFit/>
-          </a:bodyPr>
-          <a:lstStyle/>
-          <a:p>
-            <a:pPr algn="ctr">
-              <a:spcAft>
-                <a:spcPts val="200"/>
-              </a:spcAft>
-            </a:pPr>
-            <a:r>
-              <a:rPr sz="1800" b="1">
-                <a:solidFill>
-                  <a:srgbClr val="163247"/>
-                </a:solidFill>
-                <a:latin typeface="Microsoft YaHei"/>
-              </a:rPr>
-              <a:t>这些是当前限制，不是隐藏缺陷；只陈述已运行并有证据的能力。</a:t>
             </a:r>
           </a:p>
         </p:txBody>

--- a/中期答辩材料/汇报PPT/中期汇报-v5.pptx
+++ b/中期答辩材料/汇报PPT/中期汇报-v5.pptx
@@ -3971,7 +3971,7 @@
                 </a:solidFill>
                 <a:latin typeface="Microsoft YaHei"/>
               </a:rPr>
-              <a:t>中期结论与下一步</a:t>
+              <a:t>后期计划与中期结论</a:t>
             </a:r>
           </a:p>
         </p:txBody>
@@ -4010,7 +4010,7 @@
                 </a:solidFill>
                 <a:latin typeface="Microsoft YaHei"/>
               </a:rPr>
-              <a:t>可演示、可追溯、可核对；不宣称通用多模态或人工事实准确率</a:t>
+              <a:t>四条可汇报的下一步；不承诺公网生产部署</a:t>
             </a:r>
           </a:p>
         </p:txBody>
@@ -4140,63 +4140,24 @@
       </p:sp>
       <p:sp>
         <p:nvSpPr>
-          <p:cNvPr id="7" name="TextBox 6"/>
-          <p:cNvSpPr txBox="1"/>
-          <p:nvPr/>
-        </p:nvSpPr>
-        <p:spPr>
-          <a:xfrm>
-            <a:off x="749808" y="1600200"/>
-            <a:ext cx="1828800" cy="365760"/>
-          </a:xfrm>
-          <a:prstGeom prst="rect">
-            <a:avLst/>
-          </a:prstGeom>
-          <a:noFill/>
-        </p:spPr>
-        <p:txBody>
-          <a:bodyPr wrap="square" lIns="36576" rIns="36576" tIns="18288" bIns="18288" anchor="ctr">
-            <a:spAutoFit/>
-          </a:bodyPr>
-          <a:lstStyle/>
-          <a:p>
-            <a:pPr algn="l">
-              <a:spcAft>
-                <a:spcPts val="200"/>
-              </a:spcAft>
-            </a:pPr>
-            <a:r>
-              <a:rPr sz="2100" b="1">
-                <a:solidFill>
-                  <a:srgbClr val="26734E"/>
-                </a:solidFill>
-                <a:latin typeface="Microsoft YaHei"/>
-              </a:rPr>
-              <a:t>已完成</a:t>
-            </a:r>
-          </a:p>
-        </p:txBody>
-      </p:sp>
-      <p:sp>
-        <p:nvSpPr>
-          <p:cNvPr id="8" name="Rounded Rectangle 7"/>
+          <p:cNvPr id="7" name="Rounded Rectangle 6"/>
           <p:cNvSpPr/>
           <p:nvPr/>
         </p:nvSpPr>
         <p:spPr>
           <a:xfrm>
-            <a:off x="749808" y="2057400"/>
-            <a:ext cx="5074920" cy="530352"/>
+            <a:off x="502920" y="1600200"/>
+            <a:ext cx="5532120" cy="1371600"/>
           </a:xfrm>
           <a:prstGeom prst="roundRect">
             <a:avLst/>
           </a:prstGeom>
           <a:solidFill>
-            <a:srgbClr val="E4F1E9"/>
+            <a:srgbClr val="E4F2F0"/>
           </a:solidFill>
           <a:ln w="13970">
             <a:solidFill>
-              <a:srgbClr val="E4F1E9"/>
+              <a:srgbClr val="247D78"/>
             </a:solidFill>
           </a:ln>
         </p:spPr>
@@ -4215,111 +4176,62 @@
           </a:fontRef>
         </p:style>
         <p:txBody>
-          <a:bodyPr rtlCol="0" anchor="ctr"/>
-          <a:lstStyle/>
-          <a:p>
-            <a:pPr algn="ctr"/>
-          </a:p>
-        </p:txBody>
-      </p:sp>
-      <p:sp>
-        <p:nvSpPr>
-          <p:cNvPr id="9" name="TextBox 8"/>
-          <p:cNvSpPr txBox="1"/>
-          <p:nvPr/>
-        </p:nvSpPr>
-        <p:spPr>
-          <a:xfrm>
-            <a:off x="859536" y="2130552"/>
-            <a:ext cx="411480" cy="365760"/>
-          </a:xfrm>
-          <a:prstGeom prst="rect">
-            <a:avLst/>
-          </a:prstGeom>
-          <a:noFill/>
-        </p:spPr>
-        <p:txBody>
-          <a:bodyPr wrap="square" lIns="36576" rIns="36576" tIns="18288" bIns="18288" anchor="ctr">
-            <a:spAutoFit/>
-          </a:bodyPr>
-          <a:lstStyle/>
-          <a:p>
-            <a:pPr algn="ctr">
-              <a:spcAft>
-                <a:spcPts val="200"/>
-              </a:spcAft>
-            </a:pPr>
-            <a:r>
-              <a:rPr sz="1400" b="1">
-                <a:solidFill>
-                  <a:srgbClr val="26734E"/>
-                </a:solidFill>
-                <a:latin typeface="Microsoft YaHei"/>
-              </a:rPr>
-              <a:t>01</a:t>
-            </a:r>
-          </a:p>
-        </p:txBody>
-      </p:sp>
-      <p:sp>
-        <p:nvSpPr>
-          <p:cNvPr id="10" name="TextBox 9"/>
-          <p:cNvSpPr txBox="1"/>
-          <p:nvPr/>
-        </p:nvSpPr>
-        <p:spPr>
-          <a:xfrm>
-            <a:off x="1353312" y="2130552"/>
-            <a:ext cx="4315968" cy="384048"/>
-          </a:xfrm>
-          <a:prstGeom prst="rect">
-            <a:avLst/>
-          </a:prstGeom>
-          <a:noFill/>
-        </p:spPr>
-        <p:txBody>
-          <a:bodyPr wrap="square" lIns="36576" rIns="36576" tIns="18288" bIns="18288" anchor="ctr">
-            <a:spAutoFit/>
-          </a:bodyPr>
-          <a:lstStyle/>
-          <a:p>
-            <a:pPr algn="l">
-              <a:spcAft>
-                <a:spcPts val="200"/>
-              </a:spcAft>
-            </a:pPr>
-            <a:r>
-              <a:rPr sz="1400" b="1">
+          <a:bodyPr rtlCol="0" anchor="t" wrap="square" lIns="146304" rIns="146304" tIns="91440" bIns="73152"/>
+          <a:lstStyle/>
+          <a:p>
+            <a:pPr algn="l">
+              <a:spcAft>
+                <a:spcPts val="600"/>
+              </a:spcAft>
+            </a:pPr>
+            <a:r>
+              <a:rPr sz="1700" b="1">
+                <a:solidFill>
+                  <a:srgbClr val="247D78"/>
+                </a:solidFill>
+                <a:latin typeface="Microsoft YaHei"/>
+              </a:rPr>
+              <a:t>01 人工复核</a:t>
+            </a:r>
+          </a:p>
+          <a:p>
+            <a:pPr algn="l">
+              <a:spcAft>
+                <a:spcPts val="200"/>
+              </a:spcAft>
+            </a:pPr>
+            <a:r>
+              <a:rPr sz="1400">
                 <a:solidFill>
                   <a:srgbClr val="263642"/>
                 </a:solidFill>
                 <a:latin typeface="Microsoft YaHei"/>
               </a:rPr>
-              <a:t>中文四课演示库 4 / 27 / 2,501（cn_v2）</a:t>
-            </a:r>
-          </a:p>
-        </p:txBody>
-      </p:sp>
-      <p:sp>
-        <p:nvSpPr>
-          <p:cNvPr id="11" name="Rounded Rectangle 10"/>
+              <a:t>小样本抽检事实正确与引用支持是否一致</a:t>
+            </a:r>
+          </a:p>
+        </p:txBody>
+      </p:sp>
+      <p:sp>
+        <p:nvSpPr>
+          <p:cNvPr id="8" name="Rounded Rectangle 7"/>
           <p:cNvSpPr/>
           <p:nvPr/>
         </p:nvSpPr>
         <p:spPr>
           <a:xfrm>
-            <a:off x="749808" y="2715768"/>
-            <a:ext cx="5074920" cy="530352"/>
+            <a:off x="6309359" y="1600200"/>
+            <a:ext cx="5532120" cy="1371600"/>
           </a:xfrm>
           <a:prstGeom prst="roundRect">
             <a:avLst/>
           </a:prstGeom>
           <a:solidFill>
-            <a:srgbClr val="E4F1E9"/>
+            <a:srgbClr val="FBF0D8"/>
           </a:solidFill>
           <a:ln w="13970">
             <a:solidFill>
-              <a:srgbClr val="E4F1E9"/>
+              <a:srgbClr val="D39A37"/>
             </a:solidFill>
           </a:ln>
         </p:spPr>
@@ -4338,111 +4250,62 @@
           </a:fontRef>
         </p:style>
         <p:txBody>
-          <a:bodyPr rtlCol="0" anchor="ctr"/>
-          <a:lstStyle/>
-          <a:p>
-            <a:pPr algn="ctr"/>
-          </a:p>
-        </p:txBody>
-      </p:sp>
-      <p:sp>
-        <p:nvSpPr>
-          <p:cNvPr id="12" name="TextBox 11"/>
-          <p:cNvSpPr txBox="1"/>
-          <p:nvPr/>
-        </p:nvSpPr>
-        <p:spPr>
-          <a:xfrm>
-            <a:off x="859536" y="2788920"/>
-            <a:ext cx="411480" cy="365760"/>
-          </a:xfrm>
-          <a:prstGeom prst="rect">
-            <a:avLst/>
-          </a:prstGeom>
-          <a:noFill/>
-        </p:spPr>
-        <p:txBody>
-          <a:bodyPr wrap="square" lIns="36576" rIns="36576" tIns="18288" bIns="18288" anchor="ctr">
-            <a:spAutoFit/>
-          </a:bodyPr>
-          <a:lstStyle/>
-          <a:p>
-            <a:pPr algn="ctr">
-              <a:spcAft>
-                <a:spcPts val="200"/>
-              </a:spcAft>
-            </a:pPr>
-            <a:r>
-              <a:rPr sz="1400" b="1">
-                <a:solidFill>
-                  <a:srgbClr val="26734E"/>
-                </a:solidFill>
-                <a:latin typeface="Microsoft YaHei"/>
-              </a:rPr>
-              <a:t>02</a:t>
-            </a:r>
-          </a:p>
-        </p:txBody>
-      </p:sp>
-      <p:sp>
-        <p:nvSpPr>
-          <p:cNvPr id="13" name="TextBox 12"/>
-          <p:cNvSpPr txBox="1"/>
-          <p:nvPr/>
-        </p:nvSpPr>
-        <p:spPr>
-          <a:xfrm>
-            <a:off x="1353312" y="2788920"/>
-            <a:ext cx="4315968" cy="384048"/>
-          </a:xfrm>
-          <a:prstGeom prst="rect">
-            <a:avLst/>
-          </a:prstGeom>
-          <a:noFill/>
-        </p:spPr>
-        <p:txBody>
-          <a:bodyPr wrap="square" lIns="36576" rIns="36576" tIns="18288" bIns="18288" anchor="ctr">
-            <a:spAutoFit/>
-          </a:bodyPr>
-          <a:lstStyle/>
-          <a:p>
-            <a:pPr algn="l">
-              <a:spcAft>
-                <a:spcPts val="200"/>
-              </a:spcAft>
-            </a:pPr>
-            <a:r>
-              <a:rPr sz="1400" b="1">
+          <a:bodyPr rtlCol="0" anchor="t" wrap="square" lIns="146304" rIns="146304" tIns="91440" bIns="73152"/>
+          <a:lstStyle/>
+          <a:p>
+            <a:pPr algn="l">
+              <a:spcAft>
+                <a:spcPts val="600"/>
+              </a:spcAft>
+            </a:pPr>
+            <a:r>
+              <a:rPr sz="1700" b="1">
+                <a:solidFill>
+                  <a:srgbClr val="D39A37"/>
+                </a:solidFill>
+                <a:latin typeface="Microsoft YaHei"/>
+              </a:rPr>
+              <a:t>02 检索对照</a:t>
+            </a:r>
+          </a:p>
+          <a:p>
+            <a:pPr algn="l">
+              <a:spcAft>
+                <a:spcPts val="200"/>
+              </a:spcAft>
+            </a:pPr>
+            <a:r>
+              <a:rPr sz="1400">
                 <a:solidFill>
                   <a:srgbClr val="263642"/>
                 </a:solidFill>
                 <a:latin typeface="Microsoft YaHei"/>
               </a:rPr>
-              <a:t>业务闭环可走：提问 → 引用 → 回原页</a:t>
-            </a:r>
-          </a:p>
-        </p:txBody>
-      </p:sp>
-      <p:sp>
-        <p:nvSpPr>
-          <p:cNvPr id="14" name="Rounded Rectangle 13"/>
+              <a:t>Hybrid / rerank 与 dense 对照，有无收益都如实报</a:t>
+            </a:r>
+          </a:p>
+        </p:txBody>
+      </p:sp>
+      <p:sp>
+        <p:nvSpPr>
+          <p:cNvPr id="9" name="Rounded Rectangle 8"/>
           <p:cNvSpPr/>
           <p:nvPr/>
         </p:nvSpPr>
         <p:spPr>
           <a:xfrm>
-            <a:off x="749808" y="3374136"/>
-            <a:ext cx="5074920" cy="530352"/>
+            <a:off x="502920" y="3154680"/>
+            <a:ext cx="5532120" cy="1371600"/>
           </a:xfrm>
           <a:prstGeom prst="roundRect">
             <a:avLst/>
           </a:prstGeom>
           <a:solidFill>
-            <a:srgbClr val="E4F1E9"/>
+            <a:srgbClr val="E4F2F0"/>
           </a:solidFill>
           <a:ln w="13970">
             <a:solidFill>
-              <a:srgbClr val="E4F1E9"/>
+              <a:srgbClr val="247D78"/>
             </a:solidFill>
           </a:ln>
         </p:spPr>
@@ -4461,111 +4324,62 @@
           </a:fontRef>
         </p:style>
         <p:txBody>
-          <a:bodyPr rtlCol="0" anchor="ctr"/>
-          <a:lstStyle/>
-          <a:p>
-            <a:pPr algn="ctr"/>
-          </a:p>
-        </p:txBody>
-      </p:sp>
-      <p:sp>
-        <p:nvSpPr>
-          <p:cNvPr id="15" name="TextBox 14"/>
-          <p:cNvSpPr txBox="1"/>
-          <p:nvPr/>
-        </p:nvSpPr>
-        <p:spPr>
-          <a:xfrm>
-            <a:off x="859536" y="3447288"/>
-            <a:ext cx="411480" cy="365760"/>
-          </a:xfrm>
-          <a:prstGeom prst="rect">
-            <a:avLst/>
-          </a:prstGeom>
-          <a:noFill/>
-        </p:spPr>
-        <p:txBody>
-          <a:bodyPr wrap="square" lIns="36576" rIns="36576" tIns="18288" bIns="18288" anchor="ctr">
-            <a:spAutoFit/>
-          </a:bodyPr>
-          <a:lstStyle/>
-          <a:p>
-            <a:pPr algn="ctr">
-              <a:spcAft>
-                <a:spcPts val="200"/>
-              </a:spcAft>
-            </a:pPr>
-            <a:r>
-              <a:rPr sz="1400" b="1">
-                <a:solidFill>
-                  <a:srgbClr val="26734E"/>
-                </a:solidFill>
-                <a:latin typeface="Microsoft YaHei"/>
-              </a:rPr>
-              <a:t>03</a:t>
-            </a:r>
-          </a:p>
-        </p:txBody>
-      </p:sp>
-      <p:sp>
-        <p:nvSpPr>
-          <p:cNvPr id="16" name="TextBox 15"/>
-          <p:cNvSpPr txBox="1"/>
-          <p:nvPr/>
-        </p:nvSpPr>
-        <p:spPr>
-          <a:xfrm>
-            <a:off x="1353312" y="3447288"/>
-            <a:ext cx="4315968" cy="384048"/>
-          </a:xfrm>
-          <a:prstGeom prst="rect">
-            <a:avLst/>
-          </a:prstGeom>
-          <a:noFill/>
-        </p:spPr>
-        <p:txBody>
-          <a:bodyPr wrap="square" lIns="36576" rIns="36576" tIns="18288" bIns="18288" anchor="ctr">
-            <a:spAutoFit/>
-          </a:bodyPr>
-          <a:lstStyle/>
-          <a:p>
-            <a:pPr algn="l">
-              <a:spcAft>
-                <a:spcPts val="200"/>
-              </a:spcAft>
-            </a:pPr>
-            <a:r>
-              <a:rPr sz="1400" b="1">
+          <a:bodyPr rtlCol="0" anchor="t" wrap="square" lIns="146304" rIns="146304" tIns="91440" bIns="73152"/>
+          <a:lstStyle/>
+          <a:p>
+            <a:pPr algn="l">
+              <a:spcAft>
+                <a:spcPts val="600"/>
+              </a:spcAft>
+            </a:pPr>
+            <a:r>
+              <a:rPr sz="1700" b="1">
+                <a:solidFill>
+                  <a:srgbClr val="247D78"/>
+                </a:solidFill>
+                <a:latin typeface="Microsoft YaHei"/>
+              </a:rPr>
+              <a:t>03 同义问题组</a:t>
+            </a:r>
+          </a:p>
+          <a:p>
+            <a:pPr algn="l">
+              <a:spcAft>
+                <a:spcPts val="200"/>
+              </a:spcAft>
+            </a:pPr>
+            <a:r>
+              <a:rPr sz="1400">
                 <a:solidFill>
                   <a:srgbClr val="263642"/>
                 </a:solidFill>
                 <a:latin typeface="Microsoft YaHei"/>
               </a:rPr>
-              <a:t>拒答与有据回答可区分演示</a:t>
-            </a:r>
-          </a:p>
-        </p:txBody>
-      </p:sp>
-      <p:sp>
-        <p:nvSpPr>
-          <p:cNvPr id="17" name="Rounded Rectangle 16"/>
+              <a:t>教师侧校准后再开，服务备课线索</a:t>
+            </a:r>
+          </a:p>
+        </p:txBody>
+      </p:sp>
+      <p:sp>
+        <p:nvSpPr>
+          <p:cNvPr id="10" name="Rounded Rectangle 9"/>
           <p:cNvSpPr/>
           <p:nvPr/>
         </p:nvSpPr>
         <p:spPr>
           <a:xfrm>
-            <a:off x="749808" y="4032504"/>
-            <a:ext cx="5074920" cy="530352"/>
+            <a:off x="6309359" y="3154680"/>
+            <a:ext cx="5532120" cy="1371600"/>
           </a:xfrm>
           <a:prstGeom prst="roundRect">
             <a:avLst/>
           </a:prstGeom>
           <a:solidFill>
-            <a:srgbClr val="E4F1E9"/>
+            <a:srgbClr val="FBF0D8"/>
           </a:solidFill>
           <a:ln w="13970">
             <a:solidFill>
-              <a:srgbClr val="E4F1E9"/>
+              <a:srgbClr val="D39A37"/>
             </a:solidFill>
           </a:ln>
         </p:spPr>
@@ -4584,632 +4398,52 @@
           </a:fontRef>
         </p:style>
         <p:txBody>
-          <a:bodyPr rtlCol="0" anchor="ctr"/>
-          <a:lstStyle/>
-          <a:p>
-            <a:pPr algn="ctr"/>
-          </a:p>
-        </p:txBody>
-      </p:sp>
-      <p:sp>
-        <p:nvSpPr>
-          <p:cNvPr id="18" name="TextBox 17"/>
-          <p:cNvSpPr txBox="1"/>
-          <p:nvPr/>
-        </p:nvSpPr>
-        <p:spPr>
-          <a:xfrm>
-            <a:off x="859536" y="4105656"/>
-            <a:ext cx="411480" cy="365760"/>
-          </a:xfrm>
-          <a:prstGeom prst="rect">
-            <a:avLst/>
-          </a:prstGeom>
-          <a:noFill/>
-        </p:spPr>
-        <p:txBody>
-          <a:bodyPr wrap="square" lIns="36576" rIns="36576" tIns="18288" bIns="18288" anchor="ctr">
-            <a:spAutoFit/>
-          </a:bodyPr>
-          <a:lstStyle/>
-          <a:p>
-            <a:pPr algn="ctr">
-              <a:spcAft>
-                <a:spcPts val="200"/>
-              </a:spcAft>
-            </a:pPr>
-            <a:r>
-              <a:rPr sz="1400" b="1">
-                <a:solidFill>
-                  <a:srgbClr val="26734E"/>
-                </a:solidFill>
-                <a:latin typeface="Microsoft YaHei"/>
-              </a:rPr>
-              <a:t>04</a:t>
-            </a:r>
-          </a:p>
-        </p:txBody>
-      </p:sp>
-      <p:sp>
-        <p:nvSpPr>
-          <p:cNvPr id="19" name="TextBox 18"/>
-          <p:cNvSpPr txBox="1"/>
-          <p:nvPr/>
-        </p:nvSpPr>
-        <p:spPr>
-          <a:xfrm>
-            <a:off x="1353312" y="4105656"/>
-            <a:ext cx="4315968" cy="384048"/>
-          </a:xfrm>
-          <a:prstGeom prst="rect">
-            <a:avLst/>
-          </a:prstGeom>
-          <a:noFill/>
-        </p:spPr>
-        <p:txBody>
-          <a:bodyPr wrap="square" lIns="36576" rIns="36576" tIns="18288" bIns="18288" anchor="ctr">
-            <a:spAutoFit/>
-          </a:bodyPr>
-          <a:lstStyle/>
-          <a:p>
-            <a:pPr algn="l">
-              <a:spcAft>
-                <a:spcPts val="200"/>
-              </a:spcAft>
-            </a:pPr>
-            <a:r>
-              <a:rPr sz="1400" b="1">
+          <a:bodyPr rtlCol="0" anchor="t" wrap="square" lIns="146304" rIns="146304" tIns="91440" bIns="73152"/>
+          <a:lstStyle/>
+          <a:p>
+            <a:pPr algn="l">
+              <a:spcAft>
+                <a:spcPts val="600"/>
+              </a:spcAft>
+            </a:pPr>
+            <a:r>
+              <a:rPr sz="1700" b="1">
+                <a:solidFill>
+                  <a:srgbClr val="D39A37"/>
+                </a:solidFill>
+                <a:latin typeface="Microsoft YaHei"/>
+              </a:rPr>
+              <a:t>04 试用与成本</a:t>
+            </a:r>
+          </a:p>
+          <a:p>
+            <a:pPr algn="l">
+              <a:spcAft>
+                <a:spcPts val="200"/>
+              </a:spcAft>
+            </a:pPr>
+            <a:r>
+              <a:rPr sz="1400">
                 <a:solidFill>
                   <a:srgbClr val="263642"/>
                 </a:solidFill>
                 <a:latin typeface="Microsoft YaHei"/>
               </a:rPr>
-              <a:t>教师基础反馈与三角色入口可用</a:t>
-            </a:r>
-          </a:p>
-        </p:txBody>
-      </p:sp>
-      <p:sp>
-        <p:nvSpPr>
-          <p:cNvPr id="20" name="TextBox 19"/>
-          <p:cNvSpPr txBox="1"/>
-          <p:nvPr/>
-        </p:nvSpPr>
-        <p:spPr>
-          <a:xfrm>
-            <a:off x="6236208" y="1600200"/>
-            <a:ext cx="1828800" cy="365760"/>
-          </a:xfrm>
-          <a:prstGeom prst="rect">
-            <a:avLst/>
-          </a:prstGeom>
-          <a:noFill/>
-        </p:spPr>
-        <p:txBody>
-          <a:bodyPr wrap="square" lIns="36576" rIns="36576" tIns="18288" bIns="18288" anchor="ctr">
-            <a:spAutoFit/>
-          </a:bodyPr>
-          <a:lstStyle/>
-          <a:p>
-            <a:pPr algn="l">
-              <a:spcAft>
-                <a:spcPts val="200"/>
-              </a:spcAft>
-            </a:pPr>
-            <a:r>
-              <a:rPr sz="2100" b="1">
-                <a:solidFill>
-                  <a:srgbClr val="D39A37"/>
-                </a:solidFill>
-                <a:latin typeface="Microsoft YaHei"/>
-              </a:rPr>
-              <a:t>下一步</a:t>
-            </a:r>
-          </a:p>
-        </p:txBody>
-      </p:sp>
-      <p:sp>
-        <p:nvSpPr>
-          <p:cNvPr id="21" name="Rounded Rectangle 20"/>
+              <a:t>结题非开发者试用 + 资源账单；不承诺公网</a:t>
+            </a:r>
+          </a:p>
+        </p:txBody>
+      </p:sp>
+      <p:sp>
+        <p:nvSpPr>
+          <p:cNvPr id="11" name="Rounded Rectangle 10"/>
           <p:cNvSpPr/>
           <p:nvPr/>
         </p:nvSpPr>
         <p:spPr>
           <a:xfrm>
-            <a:off x="6236208" y="2057400"/>
-            <a:ext cx="5074920" cy="530352"/>
-          </a:xfrm>
-          <a:prstGeom prst="roundRect">
-            <a:avLst/>
-          </a:prstGeom>
-          <a:solidFill>
-            <a:srgbClr val="FBF0D8"/>
-          </a:solidFill>
-          <a:ln w="13970">
-            <a:solidFill>
-              <a:srgbClr val="FBF0D8"/>
-            </a:solidFill>
-          </a:ln>
-        </p:spPr>
-        <p:style>
-          <a:lnRef idx="1">
-            <a:schemeClr val="accent1"/>
-          </a:lnRef>
-          <a:fillRef idx="3">
-            <a:schemeClr val="accent1"/>
-          </a:fillRef>
-          <a:effectRef idx="2">
-            <a:schemeClr val="accent1"/>
-          </a:effectRef>
-          <a:fontRef idx="minor">
-            <a:schemeClr val="lt1"/>
-          </a:fontRef>
-        </p:style>
-        <p:txBody>
-          <a:bodyPr rtlCol="0" anchor="ctr"/>
-          <a:lstStyle/>
-          <a:p>
-            <a:pPr algn="ctr"/>
-          </a:p>
-        </p:txBody>
-      </p:sp>
-      <p:sp>
-        <p:nvSpPr>
-          <p:cNvPr id="22" name="TextBox 21"/>
-          <p:cNvSpPr txBox="1"/>
-          <p:nvPr/>
-        </p:nvSpPr>
-        <p:spPr>
-          <a:xfrm>
-            <a:off x="6345936" y="2130552"/>
-            <a:ext cx="411480" cy="365760"/>
-          </a:xfrm>
-          <a:prstGeom prst="rect">
-            <a:avLst/>
-          </a:prstGeom>
-          <a:noFill/>
-        </p:spPr>
-        <p:txBody>
-          <a:bodyPr wrap="square" lIns="36576" rIns="36576" tIns="18288" bIns="18288" anchor="ctr">
-            <a:spAutoFit/>
-          </a:bodyPr>
-          <a:lstStyle/>
-          <a:p>
-            <a:pPr algn="ctr">
-              <a:spcAft>
-                <a:spcPts val="200"/>
-              </a:spcAft>
-            </a:pPr>
-            <a:r>
-              <a:rPr sz="1400" b="1">
-                <a:solidFill>
-                  <a:srgbClr val="D39A37"/>
-                </a:solidFill>
-                <a:latin typeface="Microsoft YaHei"/>
-              </a:rPr>
-              <a:t>01</a:t>
-            </a:r>
-          </a:p>
-        </p:txBody>
-      </p:sp>
-      <p:sp>
-        <p:nvSpPr>
-          <p:cNvPr id="23" name="TextBox 22"/>
-          <p:cNvSpPr txBox="1"/>
-          <p:nvPr/>
-        </p:nvSpPr>
-        <p:spPr>
-          <a:xfrm>
-            <a:off x="6839712" y="2130552"/>
-            <a:ext cx="4315968" cy="384048"/>
-          </a:xfrm>
-          <a:prstGeom prst="rect">
-            <a:avLst/>
-          </a:prstGeom>
-          <a:noFill/>
-        </p:spPr>
-        <p:txBody>
-          <a:bodyPr wrap="square" lIns="36576" rIns="36576" tIns="18288" bIns="18288" anchor="ctr">
-            <a:spAutoFit/>
-          </a:bodyPr>
-          <a:lstStyle/>
-          <a:p>
-            <a:pPr algn="l">
-              <a:spcAft>
-                <a:spcPts val="200"/>
-              </a:spcAft>
-            </a:pPr>
-            <a:r>
-              <a:rPr sz="1400" b="1">
-                <a:solidFill>
-                  <a:srgbClr val="263642"/>
-                </a:solidFill>
-                <a:latin typeface="Microsoft YaHei"/>
-              </a:rPr>
-              <a:t>答辩同学可按提纲重做 PPT 终稿</a:t>
-            </a:r>
-          </a:p>
-        </p:txBody>
-      </p:sp>
-      <p:sp>
-        <p:nvSpPr>
-          <p:cNvPr id="24" name="Rounded Rectangle 23"/>
-          <p:cNvSpPr/>
-          <p:nvPr/>
-        </p:nvSpPr>
-        <p:spPr>
-          <a:xfrm>
-            <a:off x="6236208" y="2715768"/>
-            <a:ext cx="5074920" cy="530352"/>
-          </a:xfrm>
-          <a:prstGeom prst="roundRect">
-            <a:avLst/>
-          </a:prstGeom>
-          <a:solidFill>
-            <a:srgbClr val="FBF0D8"/>
-          </a:solidFill>
-          <a:ln w="13970">
-            <a:solidFill>
-              <a:srgbClr val="FBF0D8"/>
-            </a:solidFill>
-          </a:ln>
-        </p:spPr>
-        <p:style>
-          <a:lnRef idx="1">
-            <a:schemeClr val="accent1"/>
-          </a:lnRef>
-          <a:fillRef idx="3">
-            <a:schemeClr val="accent1"/>
-          </a:fillRef>
-          <a:effectRef idx="2">
-            <a:schemeClr val="accent1"/>
-          </a:effectRef>
-          <a:fontRef idx="minor">
-            <a:schemeClr val="lt1"/>
-          </a:fontRef>
-        </p:style>
-        <p:txBody>
-          <a:bodyPr rtlCol="0" anchor="ctr"/>
-          <a:lstStyle/>
-          <a:p>
-            <a:pPr algn="ctr"/>
-          </a:p>
-        </p:txBody>
-      </p:sp>
-      <p:sp>
-        <p:nvSpPr>
-          <p:cNvPr id="25" name="TextBox 24"/>
-          <p:cNvSpPr txBox="1"/>
-          <p:nvPr/>
-        </p:nvSpPr>
-        <p:spPr>
-          <a:xfrm>
-            <a:off x="6345936" y="2788920"/>
-            <a:ext cx="411480" cy="365760"/>
-          </a:xfrm>
-          <a:prstGeom prst="rect">
-            <a:avLst/>
-          </a:prstGeom>
-          <a:noFill/>
-        </p:spPr>
-        <p:txBody>
-          <a:bodyPr wrap="square" lIns="36576" rIns="36576" tIns="18288" bIns="18288" anchor="ctr">
-            <a:spAutoFit/>
-          </a:bodyPr>
-          <a:lstStyle/>
-          <a:p>
-            <a:pPr algn="ctr">
-              <a:spcAft>
-                <a:spcPts val="200"/>
-              </a:spcAft>
-            </a:pPr>
-            <a:r>
-              <a:rPr sz="1400" b="1">
-                <a:solidFill>
-                  <a:srgbClr val="D39A37"/>
-                </a:solidFill>
-                <a:latin typeface="Microsoft YaHei"/>
-              </a:rPr>
-              <a:t>02</a:t>
-            </a:r>
-          </a:p>
-        </p:txBody>
-      </p:sp>
-      <p:sp>
-        <p:nvSpPr>
-          <p:cNvPr id="26" name="TextBox 25"/>
-          <p:cNvSpPr txBox="1"/>
-          <p:nvPr/>
-        </p:nvSpPr>
-        <p:spPr>
-          <a:xfrm>
-            <a:off x="6839712" y="2788920"/>
-            <a:ext cx="4315968" cy="384048"/>
-          </a:xfrm>
-          <a:prstGeom prst="rect">
-            <a:avLst/>
-          </a:prstGeom>
-          <a:noFill/>
-        </p:spPr>
-        <p:txBody>
-          <a:bodyPr wrap="square" lIns="36576" rIns="36576" tIns="18288" bIns="18288" anchor="ctr">
-            <a:spAutoFit/>
-          </a:bodyPr>
-          <a:lstStyle/>
-          <a:p>
-            <a:pPr algn="l">
-              <a:spcAft>
-                <a:spcPts val="200"/>
-              </a:spcAft>
-            </a:pPr>
-            <a:r>
-              <a:rPr sz="1400" b="1">
-                <a:solidFill>
-                  <a:srgbClr val="263642"/>
-                </a:solidFill>
-                <a:latin typeface="Microsoft YaHei"/>
-              </a:rPr>
-              <a:t>固定问句再彩排（模型已对齐 flash）</a:t>
-            </a:r>
-          </a:p>
-        </p:txBody>
-      </p:sp>
-      <p:sp>
-        <p:nvSpPr>
-          <p:cNvPr id="27" name="Rounded Rectangle 26"/>
-          <p:cNvSpPr/>
-          <p:nvPr/>
-        </p:nvSpPr>
-        <p:spPr>
-          <a:xfrm>
-            <a:off x="6236208" y="3374136"/>
-            <a:ext cx="5074920" cy="530352"/>
-          </a:xfrm>
-          <a:prstGeom prst="roundRect">
-            <a:avLst/>
-          </a:prstGeom>
-          <a:solidFill>
-            <a:srgbClr val="FBF0D8"/>
-          </a:solidFill>
-          <a:ln w="13970">
-            <a:solidFill>
-              <a:srgbClr val="FBF0D8"/>
-            </a:solidFill>
-          </a:ln>
-        </p:spPr>
-        <p:style>
-          <a:lnRef idx="1">
-            <a:schemeClr val="accent1"/>
-          </a:lnRef>
-          <a:fillRef idx="3">
-            <a:schemeClr val="accent1"/>
-          </a:fillRef>
-          <a:effectRef idx="2">
-            <a:schemeClr val="accent1"/>
-          </a:effectRef>
-          <a:fontRef idx="minor">
-            <a:schemeClr val="lt1"/>
-          </a:fontRef>
-        </p:style>
-        <p:txBody>
-          <a:bodyPr rtlCol="0" anchor="ctr"/>
-          <a:lstStyle/>
-          <a:p>
-            <a:pPr algn="ctr"/>
-          </a:p>
-        </p:txBody>
-      </p:sp>
-      <p:sp>
-        <p:nvSpPr>
-          <p:cNvPr id="28" name="TextBox 27"/>
-          <p:cNvSpPr txBox="1"/>
-          <p:nvPr/>
-        </p:nvSpPr>
-        <p:spPr>
-          <a:xfrm>
-            <a:off x="6345936" y="3447288"/>
-            <a:ext cx="411480" cy="365760"/>
-          </a:xfrm>
-          <a:prstGeom prst="rect">
-            <a:avLst/>
-          </a:prstGeom>
-          <a:noFill/>
-        </p:spPr>
-        <p:txBody>
-          <a:bodyPr wrap="square" lIns="36576" rIns="36576" tIns="18288" bIns="18288" anchor="ctr">
-            <a:spAutoFit/>
-          </a:bodyPr>
-          <a:lstStyle/>
-          <a:p>
-            <a:pPr algn="ctr">
-              <a:spcAft>
-                <a:spcPts val="200"/>
-              </a:spcAft>
-            </a:pPr>
-            <a:r>
-              <a:rPr sz="1400" b="1">
-                <a:solidFill>
-                  <a:srgbClr val="D39A37"/>
-                </a:solidFill>
-                <a:latin typeface="Microsoft YaHei"/>
-              </a:rPr>
-              <a:t>03</a:t>
-            </a:r>
-          </a:p>
-        </p:txBody>
-      </p:sp>
-      <p:sp>
-        <p:nvSpPr>
-          <p:cNvPr id="29" name="TextBox 28"/>
-          <p:cNvSpPr txBox="1"/>
-          <p:nvPr/>
-        </p:nvSpPr>
-        <p:spPr>
-          <a:xfrm>
-            <a:off x="6839712" y="3447288"/>
-            <a:ext cx="4315968" cy="384048"/>
-          </a:xfrm>
-          <a:prstGeom prst="rect">
-            <a:avLst/>
-          </a:prstGeom>
-          <a:noFill/>
-        </p:spPr>
-        <p:txBody>
-          <a:bodyPr wrap="square" lIns="36576" rIns="36576" tIns="18288" bIns="18288" anchor="ctr">
-            <a:spAutoFit/>
-          </a:bodyPr>
-          <a:lstStyle/>
-          <a:p>
-            <a:pPr algn="l">
-              <a:spcAft>
-                <a:spcPts val="200"/>
-              </a:spcAft>
-            </a:pPr>
-            <a:r>
-              <a:rPr sz="1400" b="1">
-                <a:solidFill>
-                  <a:srgbClr val="263642"/>
-                </a:solidFill>
-                <a:latin typeface="Microsoft YaHei"/>
-              </a:rPr>
-              <a:t>小规模人工事实与引用复核</a:t>
-            </a:r>
-          </a:p>
-        </p:txBody>
-      </p:sp>
-      <p:sp>
-        <p:nvSpPr>
-          <p:cNvPr id="30" name="Rounded Rectangle 29"/>
-          <p:cNvSpPr/>
-          <p:nvPr/>
-        </p:nvSpPr>
-        <p:spPr>
-          <a:xfrm>
-            <a:off x="6236208" y="4032504"/>
-            <a:ext cx="5074920" cy="530352"/>
-          </a:xfrm>
-          <a:prstGeom prst="roundRect">
-            <a:avLst/>
-          </a:prstGeom>
-          <a:solidFill>
-            <a:srgbClr val="FBF0D8"/>
-          </a:solidFill>
-          <a:ln w="13970">
-            <a:solidFill>
-              <a:srgbClr val="FBF0D8"/>
-            </a:solidFill>
-          </a:ln>
-        </p:spPr>
-        <p:style>
-          <a:lnRef idx="1">
-            <a:schemeClr val="accent1"/>
-          </a:lnRef>
-          <a:fillRef idx="3">
-            <a:schemeClr val="accent1"/>
-          </a:fillRef>
-          <a:effectRef idx="2">
-            <a:schemeClr val="accent1"/>
-          </a:effectRef>
-          <a:fontRef idx="minor">
-            <a:schemeClr val="lt1"/>
-          </a:fontRef>
-        </p:style>
-        <p:txBody>
-          <a:bodyPr rtlCol="0" anchor="ctr"/>
-          <a:lstStyle/>
-          <a:p>
-            <a:pPr algn="ctr"/>
-          </a:p>
-        </p:txBody>
-      </p:sp>
-      <p:sp>
-        <p:nvSpPr>
-          <p:cNvPr id="31" name="TextBox 30"/>
-          <p:cNvSpPr txBox="1"/>
-          <p:nvPr/>
-        </p:nvSpPr>
-        <p:spPr>
-          <a:xfrm>
-            <a:off x="6345936" y="4105656"/>
-            <a:ext cx="411480" cy="365760"/>
-          </a:xfrm>
-          <a:prstGeom prst="rect">
-            <a:avLst/>
-          </a:prstGeom>
-          <a:noFill/>
-        </p:spPr>
-        <p:txBody>
-          <a:bodyPr wrap="square" lIns="36576" rIns="36576" tIns="18288" bIns="18288" anchor="ctr">
-            <a:spAutoFit/>
-          </a:bodyPr>
-          <a:lstStyle/>
-          <a:p>
-            <a:pPr algn="ctr">
-              <a:spcAft>
-                <a:spcPts val="200"/>
-              </a:spcAft>
-            </a:pPr>
-            <a:r>
-              <a:rPr sz="1400" b="1">
-                <a:solidFill>
-                  <a:srgbClr val="D39A37"/>
-                </a:solidFill>
-                <a:latin typeface="Microsoft YaHei"/>
-              </a:rPr>
-              <a:t>04</a:t>
-            </a:r>
-          </a:p>
-        </p:txBody>
-      </p:sp>
-      <p:sp>
-        <p:nvSpPr>
-          <p:cNvPr id="32" name="TextBox 31"/>
-          <p:cNvSpPr txBox="1"/>
-          <p:nvPr/>
-        </p:nvSpPr>
-        <p:spPr>
-          <a:xfrm>
-            <a:off x="6839712" y="4105656"/>
-            <a:ext cx="4315968" cy="384048"/>
-          </a:xfrm>
-          <a:prstGeom prst="rect">
-            <a:avLst/>
-          </a:prstGeom>
-          <a:noFill/>
-        </p:spPr>
-        <p:txBody>
-          <a:bodyPr wrap="square" lIns="36576" rIns="36576" tIns="18288" bIns="18288" anchor="ctr">
-            <a:spAutoFit/>
-          </a:bodyPr>
-          <a:lstStyle/>
-          <a:p>
-            <a:pPr algn="l">
-              <a:spcAft>
-                <a:spcPts val="200"/>
-              </a:spcAft>
-            </a:pPr>
-            <a:r>
-              <a:rPr sz="1400" b="1">
-                <a:solidFill>
-                  <a:srgbClr val="263642"/>
-                </a:solidFill>
-                <a:latin typeface="Microsoft YaHei"/>
-              </a:rPr>
-              <a:t>成本/资源专项与结题试用</a:t>
-            </a:r>
-          </a:p>
-        </p:txBody>
-      </p:sp>
-      <p:sp>
-        <p:nvSpPr>
-          <p:cNvPr id="33" name="Rounded Rectangle 32"/>
-          <p:cNvSpPr/>
-          <p:nvPr/>
-        </p:nvSpPr>
-        <p:spPr>
-          <a:xfrm>
-            <a:off x="749808" y="5074920"/>
-            <a:ext cx="10561320" cy="777240"/>
+            <a:off x="502920" y="4892040"/>
+            <a:ext cx="11155680" cy="960120"/>
           </a:xfrm>
           <a:prstGeom prst="roundRect">
             <a:avLst/>
@@ -5247,14 +4481,14 @@
       </p:sp>
       <p:sp>
         <p:nvSpPr>
-          <p:cNvPr id="34" name="TextBox 33"/>
+          <p:cNvPr id="12" name="TextBox 11"/>
           <p:cNvSpPr txBox="1"/>
           <p:nvPr/>
         </p:nvSpPr>
         <p:spPr>
           <a:xfrm>
-            <a:off x="960120" y="5257800"/>
-            <a:ext cx="10149840" cy="411480"/>
+            <a:off x="731520" y="5074920"/>
+            <a:ext cx="10698480" cy="594360"/>
           </a:xfrm>
           <a:prstGeom prst="rect">
             <a:avLst/>
@@ -5273,13 +4507,13 @@
               </a:spcAft>
             </a:pPr>
             <a:r>
-              <a:rPr sz="1700" b="1">
+              <a:rPr sz="1600" b="1">
                 <a:solidFill>
                   <a:srgbClr val="FFFFFF"/>
                 </a:solidFill>
                 <a:latin typeface="Microsoft YaHei"/>
               </a:rPr>
-              <a:t>结论：本机可演示的有依据课程问答原型；参考稿供队友改写，终稿可由答辩同学重做。</a:t>
+              <a:t>结论：双叙事亮点可讲清——课界+证据闭环，与页级检索/生成技术；本机可演示。开题「重点争取」项诚实后置。</a:t>
             </a:r>
           </a:p>
         </p:txBody>
@@ -6920,7 +6154,7 @@
                 </a:solidFill>
                 <a:latin typeface="Microsoft YaHei"/>
               </a:rPr>
-              <a:t>三项技术特色</a:t>
+              <a:t>技术亮点 · 双叙事</a:t>
             </a:r>
           </a:p>
         </p:txBody>
@@ -6959,7 +6193,7 @@
                 </a:solidFill>
                 <a:latin typeface="Microsoft YaHei"/>
               </a:rPr>
-              <a:t>开题方案研究重点：资料可追溯、检索可对照、回答可核对（开源复用，不自造平台）</a:t>
+              <a:t>教学场景闭环 + 检索/生成技术；中期只讲能演示、有证据的能力</a:t>
             </a:r>
           </a:p>
         </p:txBody>
@@ -7095,8 +6329,8 @@
         </p:nvSpPr>
         <p:spPr>
           <a:xfrm>
-            <a:off x="640080" y="1645920"/>
-            <a:ext cx="3520440" cy="3840480"/>
+            <a:off x="502920" y="1600200"/>
+            <a:ext cx="5532120" cy="3977639"/>
           </a:xfrm>
           <a:prstGeom prst="roundRect">
             <a:avLst/>
@@ -7134,13 +6368,13 @@
               </a:spcAft>
             </a:pPr>
             <a:r>
-              <a:rPr sz="1800" b="1">
+              <a:rPr sz="1900" b="1">
                 <a:solidFill>
                   <a:srgbClr val="247D78"/>
                 </a:solidFill>
                 <a:latin typeface="Microsoft YaHei"/>
               </a:rPr>
-              <a:t>① 可追溯的资料组织</a:t>
+              <a:t>A. 教学场景闭环</a:t>
             </a:r>
           </a:p>
           <a:p>
@@ -7156,7 +6390,7 @@
                 </a:solidFill>
                 <a:latin typeface="Microsoft YaHei"/>
               </a:rPr>
-              <a:t>PyMuPDF 原生文字提取</a:t>
+              <a:t>• 课界权限贯穿检索—生成—打开原文件</a:t>
             </a:r>
           </a:p>
           <a:p>
@@ -7172,7 +6406,7 @@
                 </a:solidFill>
                 <a:latin typeface="Microsoft YaHei"/>
               </a:rPr>
-              <a:t>保留页码与逐页质量记录</a:t>
+              <a:t>• 证据不足可拒答，不编造课外步骤</a:t>
             </a:r>
           </a:p>
           <a:p>
@@ -7188,7 +6422,7 @@
                 </a:solidFill>
                 <a:latin typeface="Microsoft YaHei"/>
               </a:rPr>
-              <a:t>空页 / 稀疏页 / 异常可登记</a:t>
+              <a:t>• 引用带回原 PDF 页（#page=）</a:t>
             </a:r>
           </a:p>
           <a:p>
@@ -7204,7 +6438,7 @@
                 </a:solidFill>
                 <a:latin typeface="Microsoft YaHei"/>
               </a:rPr>
-              <a:t>资料哈希、切分与索引版本可解释</a:t>
+              <a:t>• 三角色分工清晰，不是单一聊天窗</a:t>
             </a:r>
           </a:p>
           <a:p>
@@ -7220,7 +6454,7 @@
                 </a:solidFill>
                 <a:latin typeface="Microsoft YaHei"/>
               </a:rPr>
-              <a:t>Markdown / Chunk 是派生视图</a:t>
+              <a:t>• 教师问答反馈：高频问句与依据不足线索</a:t>
             </a:r>
           </a:p>
         </p:txBody>
@@ -7233,146 +6467,8 @@
         </p:nvSpPr>
         <p:spPr>
           <a:xfrm>
-            <a:off x="4343400" y="1645920"/>
-            <a:ext cx="3520440" cy="3840480"/>
-          </a:xfrm>
-          <a:prstGeom prst="roundRect">
-            <a:avLst/>
-          </a:prstGeom>
-          <a:solidFill>
-            <a:srgbClr val="FFFFFF"/>
-          </a:solidFill>
-          <a:ln w="13970">
-            <a:solidFill>
-              <a:srgbClr val="D6E0E5"/>
-            </a:solidFill>
-          </a:ln>
-        </p:spPr>
-        <p:style>
-          <a:lnRef idx="1">
-            <a:schemeClr val="accent1"/>
-          </a:lnRef>
-          <a:fillRef idx="3">
-            <a:schemeClr val="accent1"/>
-          </a:fillRef>
-          <a:effectRef idx="2">
-            <a:schemeClr val="accent1"/>
-          </a:effectRef>
-          <a:fontRef idx="minor">
-            <a:schemeClr val="lt1"/>
-          </a:fontRef>
-        </p:style>
-        <p:txBody>
-          <a:bodyPr rtlCol="0" anchor="t" wrap="square" lIns="146304" rIns="146304" tIns="91440" bIns="73152"/>
-          <a:lstStyle/>
-          <a:p>
-            <a:pPr algn="l">
-              <a:spcAft>
-                <a:spcPts val="600"/>
-              </a:spcAft>
-            </a:pPr>
-            <a:r>
-              <a:rPr sz="1800" b="1">
-                <a:solidFill>
-                  <a:srgbClr val="D39A37"/>
-                </a:solidFill>
-                <a:latin typeface="Microsoft YaHei"/>
-              </a:rPr>
-              <a:t>② 课程内检索（可对照）</a:t>
-            </a:r>
-          </a:p>
-          <a:p>
-            <a:pPr algn="l">
-              <a:spcAft>
-                <a:spcPts val="200"/>
-              </a:spcAft>
-            </a:pPr>
-            <a:r>
-              <a:rPr sz="1500">
-                <a:solidFill>
-                  <a:srgbClr val="263642"/>
-                </a:solidFill>
-                <a:latin typeface="Microsoft YaHei"/>
-              </a:rPr>
-              <a:t>中期演示默认：Dense</a:t>
-            </a:r>
-          </a:p>
-          <a:p>
-            <a:pPr algn="l">
-              <a:spcAft>
-                <a:spcPts val="200"/>
-              </a:spcAft>
-            </a:pPr>
-            <a:r>
-              <a:rPr sz="1500">
-                <a:solidFill>
-                  <a:srgbClr val="263642"/>
-                </a:solidFill>
-                <a:latin typeface="Microsoft YaHei"/>
-              </a:rPr>
-              <a:t>Hybrid / BM25 / rerank</a:t>
-            </a:r>
-          </a:p>
-          <a:p>
-            <a:pPr algn="l">
-              <a:spcAft>
-                <a:spcPts val="200"/>
-              </a:spcAft>
-            </a:pPr>
-            <a:r>
-              <a:rPr sz="1500">
-                <a:solidFill>
-                  <a:srgbClr val="263642"/>
-                </a:solidFill>
-                <a:latin typeface="Microsoft YaHei"/>
-              </a:rPr>
-              <a:t>已实现、可开关</a:t>
-            </a:r>
-          </a:p>
-          <a:p>
-            <a:pPr algn="l">
-              <a:spcAft>
-                <a:spcPts val="200"/>
-              </a:spcAft>
-            </a:pPr>
-            <a:r>
-              <a:rPr sz="1500">
-                <a:solidFill>
-                  <a:srgbClr val="263642"/>
-                </a:solidFill>
-                <a:latin typeface="Microsoft YaHei"/>
-              </a:rPr>
-              <a:t>不作中期主结论</a:t>
-            </a:r>
-          </a:p>
-          <a:p>
-            <a:pPr algn="l">
-              <a:spcAft>
-                <a:spcPts val="200"/>
-              </a:spcAft>
-            </a:pPr>
-            <a:r>
-              <a:rPr sz="1500">
-                <a:solidFill>
-                  <a:srgbClr val="263642"/>
-                </a:solidFill>
-                <a:latin typeface="Microsoft YaHei"/>
-              </a:rPr>
-              <a:t>权限贯穿候选与缓存</a:t>
-            </a:r>
-          </a:p>
-        </p:txBody>
-      </p:sp>
-      <p:sp>
-        <p:nvSpPr>
-          <p:cNvPr id="9" name="Rounded Rectangle 8"/>
-          <p:cNvSpPr/>
-          <p:nvPr/>
-        </p:nvSpPr>
-        <p:spPr>
-          <a:xfrm>
-            <a:off x="8046720" y="1645920"/>
-            <a:ext cx="3520440" cy="3840480"/>
+            <a:off x="6263640" y="1600200"/>
+            <a:ext cx="5349240" cy="3977639"/>
           </a:xfrm>
           <a:prstGeom prst="roundRect">
             <a:avLst/>
@@ -7410,13 +6506,13 @@
               </a:spcAft>
             </a:pPr>
             <a:r>
-              <a:rPr sz="1800" b="1">
+              <a:rPr sz="1900" b="1">
                 <a:solidFill>
                   <a:srgbClr val="D39A37"/>
                 </a:solidFill>
                 <a:latin typeface="Microsoft YaHei"/>
               </a:rPr>
-              <a:t>③ 可核对的证据回答</a:t>
+              <a:t>B. 检索 / 生成技术</a:t>
             </a:r>
           </a:p>
           <a:p>
@@ -7432,7 +6528,7 @@
                 </a:solidFill>
                 <a:latin typeface="Microsoft YaHei"/>
               </a:rPr>
-              <a:t>只引用实际送入上下文的来源</a:t>
+              <a:t>• 页级解析 + 质量门禁（PyMuPDF）</a:t>
             </a:r>
           </a:p>
           <a:p>
@@ -7448,7 +6544,7 @@
                 </a:solidFill>
                 <a:latin typeface="Microsoft YaHei"/>
               </a:rPr>
-              <a:t>区分有据回答 / 依据不足 / 失败</a:t>
+              <a:t>• 向量检索 BGE-M3 + 证据约束生成</a:t>
             </a:r>
           </a:p>
           <a:p>
@@ -7464,7 +6560,7 @@
                 </a:solidFill>
                 <a:latin typeface="Microsoft YaHei"/>
               </a:rPr>
-              <a:t>学生可打开原 PDF #page=</a:t>
+              <a:t>• DeepSeek（deepseek-flash）</a:t>
             </a:r>
           </a:p>
           <a:p>
@@ -7480,7 +6576,39 @@
                 </a:solidFill>
                 <a:latin typeface="Microsoft YaHei"/>
               </a:rPr>
-              <a:t>合法引用 ≠ 事实主张被支持</a:t>
+              <a:t>• dense / hybrid / rerank 已实现可开关</a:t>
+            </a:r>
+          </a:p>
+          <a:p>
+            <a:pPr algn="l">
+              <a:spcAft>
+                <a:spcPts val="200"/>
+              </a:spcAft>
+            </a:pPr>
+            <a:r>
+              <a:rPr sz="1500">
+                <a:solidFill>
+                  <a:srgbClr val="263642"/>
+                </a:solidFill>
+                <a:latin typeface="Microsoft YaHei"/>
+              </a:rPr>
+              <a:t>• 中期主演示：dense，rerank 关</a:t>
+            </a:r>
+          </a:p>
+          <a:p>
+            <a:pPr algn="l">
+              <a:spcAft>
+                <a:spcPts val="200"/>
+              </a:spcAft>
+            </a:pPr>
+            <a:r>
+              <a:rPr sz="1500">
+                <a:solidFill>
+                  <a:srgbClr val="263642"/>
+                </a:solidFill>
+                <a:latin typeface="Microsoft YaHei"/>
+              </a:rPr>
+              <a:t>• Hybrid 对照实验放后期，不作主结论</a:t>
             </a:r>
           </a:p>
         </p:txBody>
@@ -11298,7 +10426,7 @@
                 </a:solidFill>
                 <a:latin typeface="Microsoft YaHei"/>
               </a:rPr>
-              <a:t>诚实限制</a:t>
+              <a:t>现有不足（三条）</a:t>
             </a:r>
           </a:p>
         </p:txBody>
@@ -11337,7 +10465,7 @@
                 </a:solidFill>
                 <a:latin typeface="Microsoft YaHei"/>
               </a:rPr>
-              <a:t>工程闭环与通用 RAG 质量是两回事；只陈述有证据的能力</a:t>
+              <a:t>把边界讲清楚，比夸大进展更有说服力</a:t>
             </a:r>
           </a:p>
         </p:txBody>
@@ -11473,8 +10601,8 @@
         </p:nvSpPr>
         <p:spPr>
           <a:xfrm>
-            <a:off x="640080" y="1645920"/>
-            <a:ext cx="5394960" cy="3794760"/>
+            <a:off x="502920" y="1645920"/>
+            <a:ext cx="3611880" cy="3886200"/>
           </a:xfrm>
           <a:prstGeom prst="roundRect">
             <a:avLst/>
@@ -11512,93 +10640,77 @@
               </a:spcAft>
             </a:pPr>
             <a:r>
-              <a:rPr sz="1900" b="1">
+              <a:rPr sz="1800" b="1">
                 <a:solidFill>
                   <a:srgbClr val="B84242"/>
                 </a:solidFill>
                 <a:latin typeface="Microsoft YaHei"/>
               </a:rPr>
-              <a:t>评价口径</a:t>
-            </a:r>
-          </a:p>
-          <a:p>
-            <a:pPr algn="l">
-              <a:spcAft>
-                <a:spcPts val="200"/>
-              </a:spcAft>
-            </a:pPr>
-            <a:r>
-              <a:rPr sz="1600">
+              <a:t>① 评价未人工复核</a:t>
+            </a:r>
+          </a:p>
+          <a:p>
+            <a:pPr algn="l">
+              <a:spcAft>
+                <a:spcPts val="200"/>
+              </a:spcAft>
+            </a:pPr>
+            <a:r>
+              <a:rPr sz="1500">
                 <a:solidFill>
                   <a:srgbClr val="263642"/>
                 </a:solidFill>
                 <a:latin typeface="Microsoft YaHei"/>
               </a:rPr>
-              <a:t>• 事实正确 ≠ 引用支持</a:t>
-            </a:r>
-          </a:p>
-          <a:p>
-            <a:pPr algn="l">
-              <a:spcAft>
-                <a:spcPts val="200"/>
-              </a:spcAft>
-            </a:pPr>
-            <a:r>
-              <a:rPr sz="1600">
+              <a:t>仅有弱规则命中与拒答</a:t>
+            </a:r>
+          </a:p>
+          <a:p>
+            <a:pPr algn="l">
+              <a:spcAft>
+                <a:spcPts val="200"/>
+              </a:spcAft>
+            </a:pPr>
+            <a:r>
+              <a:rPr sz="1500">
                 <a:solidFill>
                   <a:srgbClr val="263642"/>
                 </a:solidFill>
                 <a:latin typeface="Microsoft YaHei"/>
               </a:rPr>
-              <a:t>• 12/12 与 4/4 是弱自动化规则</a:t>
-            </a:r>
-          </a:p>
-          <a:p>
-            <a:pPr algn="l">
-              <a:spcAft>
-                <a:spcPts val="200"/>
-              </a:spcAft>
-            </a:pPr>
-            <a:r>
-              <a:rPr sz="1600">
+              <a:t>事实正确 ≠ 引用支持</a:t>
+            </a:r>
+          </a:p>
+          <a:p>
+            <a:pPr algn="l">
+              <a:spcAft>
+                <a:spcPts val="200"/>
+              </a:spcAft>
+            </a:pPr>
+            <a:r>
+              <a:rPr sz="1500">
                 <a:solidFill>
                   <a:srgbClr val="263642"/>
                 </a:solidFill>
                 <a:latin typeface="Microsoft YaHei"/>
               </a:rPr>
-              <a:t>• AI 预标题集未经独立人工复核</a:t>
-            </a:r>
-          </a:p>
-          <a:p>
-            <a:pPr algn="l">
-              <a:spcAft>
-                <a:spcPts val="200"/>
-              </a:spcAft>
-            </a:pPr>
-            <a:r>
-              <a:rPr sz="1600">
+              <a:t>尚无独立人工事实正确率</a:t>
+            </a:r>
+          </a:p>
+          <a:p>
+            <a:pPr algn="l">
+              <a:spcAft>
+                <a:spcPts val="200"/>
+              </a:spcAft>
+            </a:pPr>
+            <a:r>
+              <a:rPr sz="1500">
                 <a:solidFill>
                   <a:srgbClr val="263642"/>
                 </a:solidFill>
                 <a:latin typeface="Microsoft YaHei"/>
               </a:rPr>
-              <a:t>• 余弦阈值 0.45 未校准</a:t>
-            </a:r>
-          </a:p>
-          <a:p>
-            <a:pPr algn="l">
-              <a:spcAft>
-                <a:spcPts val="200"/>
-              </a:spcAft>
-            </a:pPr>
-            <a:r>
-              <a:rPr sz="1600">
-                <a:solidFill>
-                  <a:srgbClr val="263642"/>
-                </a:solidFill>
-                <a:latin typeface="Microsoft YaHei"/>
-              </a:rPr>
-              <a:t>• Hybrid/rerank 不作中期主结论</a:t>
+              <a:t>题集为 AI 预标</a:t>
             </a:r>
           </a:p>
         </p:txBody>
@@ -11611,8 +10723,8 @@
         </p:nvSpPr>
         <p:spPr>
           <a:xfrm>
-            <a:off x="6263640" y="1645920"/>
-            <a:ext cx="5257800" cy="3794760"/>
+            <a:off x="4297680" y="1645920"/>
+            <a:ext cx="3611880" cy="3886200"/>
           </a:xfrm>
           <a:prstGeom prst="roundRect">
             <a:avLst/>
@@ -11650,93 +10762,199 @@
               </a:spcAft>
             </a:pPr>
             <a:r>
-              <a:rPr sz="1900" b="1">
+              <a:rPr sz="1800" b="1">
                 <a:solidFill>
                   <a:srgbClr val="D39A37"/>
                 </a:solidFill>
                 <a:latin typeface="Microsoft YaHei"/>
               </a:rPr>
-              <a:t>能力与交付边界</a:t>
-            </a:r>
-          </a:p>
-          <a:p>
-            <a:pPr algn="l">
-              <a:spcAft>
-                <a:spcPts val="200"/>
-              </a:spcAft>
-            </a:pPr>
-            <a:r>
-              <a:rPr sz="1600">
+              <a:t>② 复杂资料未覆盖</a:t>
+            </a:r>
+          </a:p>
+          <a:p>
+            <a:pPr algn="l">
+              <a:spcAft>
+                <a:spcPts val="200"/>
+              </a:spcAft>
+            </a:pPr>
+            <a:r>
+              <a:rPr sz="1500">
                 <a:solidFill>
                   <a:srgbClr val="263642"/>
                 </a:solidFill>
                 <a:latin typeface="Microsoft YaHei"/>
               </a:rPr>
-              <a:t>• 非 OCR / 公式 / 图表理解主线</a:t>
-            </a:r>
-          </a:p>
-          <a:p>
-            <a:pPr algn="l">
-              <a:spcAft>
-                <a:spcPts val="200"/>
-              </a:spcAft>
-            </a:pPr>
-            <a:r>
-              <a:rPr sz="1600">
+              <a:t>非 OCR / 扫描件主线</a:t>
+            </a:r>
+          </a:p>
+          <a:p>
+            <a:pPr algn="l">
+              <a:spcAft>
+                <a:spcPts val="200"/>
+              </a:spcAft>
+            </a:pPr>
+            <a:r>
+              <a:rPr sz="1500">
                 <a:solidFill>
                   <a:srgbClr val="263642"/>
                 </a:solidFill>
                 <a:latin typeface="Microsoft YaHei"/>
               </a:rPr>
-              <a:t>• 非校园网生产部署</a:t>
-            </a:r>
-          </a:p>
-          <a:p>
-            <a:pPr algn="l">
-              <a:spcAft>
-                <a:spcPts val="200"/>
-              </a:spcAft>
-            </a:pPr>
-            <a:r>
-              <a:rPr sz="1600">
+              <a:t>公式与图表理解有限</a:t>
+            </a:r>
+          </a:p>
+          <a:p>
+            <a:pPr algn="l">
+              <a:spcAft>
+                <a:spcPts val="200"/>
+              </a:spcAft>
+            </a:pPr>
+            <a:r>
+              <a:rPr sz="1500">
                 <a:solidFill>
                   <a:srgbClr val="263642"/>
                 </a:solidFill>
                 <a:latin typeface="Microsoft YaHei"/>
               </a:rPr>
-              <a:t>• 供应商账单、依赖锁定待验</a:t>
-            </a:r>
-          </a:p>
-          <a:p>
-            <a:pPr algn="l">
-              <a:spcAft>
-                <a:spcPts val="200"/>
-              </a:spcAft>
-            </a:pPr>
-            <a:r>
-              <a:rPr sz="1600">
+              <a:t>纯图页覆盖不全</a:t>
+            </a:r>
+          </a:p>
+          <a:p>
+            <a:pPr algn="l">
+              <a:spcAft>
+                <a:spcPts val="200"/>
+              </a:spcAft>
+            </a:pPr>
+            <a:r>
+              <a:rPr sz="1500">
                 <a:solidFill>
                   <a:srgbClr val="263642"/>
                 </a:solidFill>
                 <a:latin typeface="Microsoft YaHei"/>
               </a:rPr>
-              <a:t>• Demo Reset / 成本专项待验</a:t>
-            </a:r>
-          </a:p>
-          <a:p>
-            <a:pPr algn="l">
-              <a:spcAft>
-                <a:spcPts val="200"/>
-              </a:spcAft>
-            </a:pPr>
-            <a:r>
-              <a:rPr sz="1600">
+              <a:t>文字层 PDF 是中期范围</a:t>
+            </a:r>
+          </a:p>
+        </p:txBody>
+      </p:sp>
+      <p:sp>
+        <p:nvSpPr>
+          <p:cNvPr id="9" name="Rounded Rectangle 8"/>
+          <p:cNvSpPr/>
+          <p:nvPr/>
+        </p:nvSpPr>
+        <p:spPr>
+          <a:xfrm>
+            <a:off x="8092440" y="1645920"/>
+            <a:ext cx="3520440" cy="3886200"/>
+          </a:xfrm>
+          <a:prstGeom prst="roundRect">
+            <a:avLst/>
+          </a:prstGeom>
+          <a:solidFill>
+            <a:srgbClr val="FFFFFF"/>
+          </a:solidFill>
+          <a:ln w="13970">
+            <a:solidFill>
+              <a:srgbClr val="D6E0E5"/>
+            </a:solidFill>
+          </a:ln>
+        </p:spPr>
+        <p:style>
+          <a:lnRef idx="1">
+            <a:schemeClr val="accent1"/>
+          </a:lnRef>
+          <a:fillRef idx="3">
+            <a:schemeClr val="accent1"/>
+          </a:fillRef>
+          <a:effectRef idx="2">
+            <a:schemeClr val="accent1"/>
+          </a:effectRef>
+          <a:fontRef idx="minor">
+            <a:schemeClr val="lt1"/>
+          </a:fontRef>
+        </p:style>
+        <p:txBody>
+          <a:bodyPr rtlCol="0" anchor="t" wrap="square" lIns="146304" rIns="146304" tIns="91440" bIns="73152"/>
+          <a:lstStyle/>
+          <a:p>
+            <a:pPr algn="l">
+              <a:spcAft>
+                <a:spcPts val="600"/>
+              </a:spcAft>
+            </a:pPr>
+            <a:r>
+              <a:rPr sz="1800" b="1">
+                <a:solidFill>
+                  <a:srgbClr val="163247"/>
+                </a:solidFill>
+                <a:latin typeface="Microsoft YaHei"/>
+              </a:rPr>
+              <a:t>③ 产品化待验</a:t>
+            </a:r>
+          </a:p>
+          <a:p>
+            <a:pPr algn="l">
+              <a:spcAft>
+                <a:spcPts val="200"/>
+              </a:spcAft>
+            </a:pPr>
+            <a:r>
+              <a:rPr sz="1500">
                 <a:solidFill>
                   <a:srgbClr val="263642"/>
                 </a:solidFill>
                 <a:latin typeface="Microsoft YaHei"/>
               </a:rPr>
-              <a:t>• 非开发者独立试用尚未完成</a:t>
+              <a:t>阈值与同义分组未校准</a:t>
+            </a:r>
+          </a:p>
+          <a:p>
+            <a:pPr algn="l">
+              <a:spcAft>
+                <a:spcPts val="200"/>
+              </a:spcAft>
+            </a:pPr>
+            <a:r>
+              <a:rPr sz="1500">
+                <a:solidFill>
+                  <a:srgbClr val="263642"/>
+                </a:solidFill>
+                <a:latin typeface="Microsoft YaHei"/>
+              </a:rPr>
+              <a:t>供应商账单 / 成本待验</a:t>
+            </a:r>
+          </a:p>
+          <a:p>
+            <a:pPr algn="l">
+              <a:spcAft>
+                <a:spcPts val="200"/>
+              </a:spcAft>
+            </a:pPr>
+            <a:r>
+              <a:rPr sz="1500">
+                <a:solidFill>
+                  <a:srgbClr val="263642"/>
+                </a:solidFill>
+                <a:latin typeface="Microsoft YaHei"/>
+              </a:rPr>
+              <a:t>单机演示，非校园网并发</a:t>
+            </a:r>
+          </a:p>
+          <a:p>
+            <a:pPr algn="l">
+              <a:spcAft>
+                <a:spcPts val="200"/>
+              </a:spcAft>
+            </a:pPr>
+            <a:r>
+              <a:rPr sz="1500">
+                <a:solidFill>
+                  <a:srgbClr val="263642"/>
+                </a:solidFill>
+                <a:latin typeface="Microsoft YaHei"/>
+              </a:rPr>
+              <a:t>开题争取项尚未全部兑现</a:t>
             </a:r>
           </a:p>
         </p:txBody>
